--- a/assets/powerpoints/module-pub/A2-l-accent-d-insistance.pptx
+++ b/assets/powerpoints/module-pub/A2-l-accent-d-insistance.pptx
@@ -4720,7 +4720,7 @@
                 </a:solidFill>
                 <a:latin typeface="Verdana"/>
               </a:rPr>
-              <a:t>SÉANCE A2  ·  MODULE 7</a:t>
+              <a:t>SÉANCE A2  ·  MODULE 8</a:t>
             </a:r>
           </a:p>
         </p:txBody>

--- a/assets/powerpoints/module-pub/A2-l-accent-d-insistance.pptx
+++ b/assets/powerpoints/module-pub/A2-l-accent-d-insistance.pptx
@@ -22,6 +22,13 @@
     <p:sldId id="270" r:id="rId22"/>
     <p:sldId id="271" r:id="rId23"/>
     <p:sldId id="272" r:id="rId24"/>
+    <p:sldId id="273" r:id="rId25"/>
+    <p:sldId id="274" r:id="rId26"/>
+    <p:sldId id="275" r:id="rId27"/>
+    <p:sldId id="276" r:id="rId28"/>
+    <p:sldId id="277" r:id="rId29"/>
+    <p:sldId id="278" r:id="rId30"/>
+    <p:sldId id="279" r:id="rId31"/>
   </p:sldIdLst>
   <p:sldSz cx="12191695" cy="6858000" type="screen4x3"/>
   <p:notesSz cx="6858000" cy="9144000"/>
@@ -1078,7 +1085,147 @@
           <a:lstStyle/>
           <a:p>
             <a:r>
-              <a:t>La justification est le vrai contenu du billet. Un choix expliqué vaut mieux qu'un bon choix inexpliqué.</a:t>
+              <a:t>Faire poser la main sur la gorge. « ch » ne vibre pas, « j » vibre. C'est le seul critère fiable, et il se sent au doigt.</a:t>
+            </a:r>
+          </a:p>
+        </p:txBody>
+      </p:sp>
+      <p:sp>
+        <p:nvSpPr>
+          <p:cNvPr id="4" name="Slide Number Placeholder 3"/>
+          <p:cNvSpPr>
+            <a:spLocks noGrp="1"/>
+          </p:cNvSpPr>
+          <p:nvPr>
+            <p:ph type="sldNum" idx="5" sz="quarter"/>
+          </p:nvPr>
+        </p:nvSpPr>
+        <p:spPr/>
+      </p:sp>
+    </p:spTree>
+  </p:cSld>
+  <p:clrMapOvr>
+    <a:masterClrMapping/>
+  </p:clrMapOvr>
+</p:notes>
+</file>
+
+<file path=ppt/notesSlides/notesSlide18.xml><?xml version="1.0" encoding="utf-8"?>
+<p:notes xmlns:a="http://schemas.openxmlformats.org/drawingml/2006/main" xmlns:p="http://schemas.openxmlformats.org/presentationml/2006/main" xmlns:r="http://schemas.openxmlformats.org/officeDocument/2006/relationships">
+  <p:cSld>
+    <p:spTree>
+      <p:nvGrpSpPr>
+        <p:cNvPr id="1" name=""/>
+        <p:cNvGrpSpPr/>
+        <p:nvPr/>
+      </p:nvGrpSpPr>
+      <p:grpSpPr>
+        <a:xfrm>
+          <a:off x="0" y="0"/>
+          <a:ext cx="0" cy="0"/>
+          <a:chOff x="0" y="0"/>
+          <a:chExt cx="0" cy="0"/>
+        </a:xfrm>
+      </p:grpSpPr>
+      <p:sp>
+        <p:nvSpPr>
+          <p:cNvPr id="2" name="Slide Image Placeholder 1"/>
+          <p:cNvSpPr>
+            <a:spLocks noGrp="1"/>
+          </p:cNvSpPr>
+          <p:nvPr>
+            <p:ph type="sldImg" idx="2"/>
+          </p:nvPr>
+        </p:nvSpPr>
+        <p:spPr/>
+      </p:sp>
+      <p:sp>
+        <p:nvSpPr>
+          <p:cNvPr id="3" name="Notes Placeholder 2"/>
+          <p:cNvSpPr>
+            <a:spLocks noGrp="1"/>
+          </p:cNvSpPr>
+          <p:nvPr>
+            <p:ph type="body" idx="3" sz="quarter"/>
+          </p:nvPr>
+        </p:nvSpPr>
+        <p:spPr/>
+        <p:txBody>
+          <a:bodyPr/>
+          <a:lstStyle/>
+          <a:p>
+            <a:r>
+              <a:t>Faire classer trois mots supplémentaires trouvés par le groupe avant de montrer la note du bas.</a:t>
+            </a:r>
+          </a:p>
+        </p:txBody>
+      </p:sp>
+      <p:sp>
+        <p:nvSpPr>
+          <p:cNvPr id="4" name="Slide Number Placeholder 3"/>
+          <p:cNvSpPr>
+            <a:spLocks noGrp="1"/>
+          </p:cNvSpPr>
+          <p:nvPr>
+            <p:ph type="sldNum" idx="5" sz="quarter"/>
+          </p:nvPr>
+        </p:nvSpPr>
+        <p:spPr/>
+      </p:sp>
+    </p:spTree>
+  </p:cSld>
+  <p:clrMapOvr>
+    <a:masterClrMapping/>
+  </p:clrMapOvr>
+</p:notes>
+</file>
+
+<file path=ppt/notesSlides/notesSlide19.xml><?xml version="1.0" encoding="utf-8"?>
+<p:notes xmlns:a="http://schemas.openxmlformats.org/drawingml/2006/main" xmlns:p="http://schemas.openxmlformats.org/presentationml/2006/main" xmlns:r="http://schemas.openxmlformats.org/officeDocument/2006/relationships">
+  <p:cSld>
+    <p:spTree>
+      <p:nvGrpSpPr>
+        <p:cNvPr id="1" name=""/>
+        <p:cNvGrpSpPr/>
+        <p:nvPr/>
+      </p:nvGrpSpPr>
+      <p:grpSpPr>
+        <a:xfrm>
+          <a:off x="0" y="0"/>
+          <a:ext cx="0" cy="0"/>
+          <a:chOff x="0" y="0"/>
+          <a:chExt cx="0" cy="0"/>
+        </a:xfrm>
+      </p:grpSpPr>
+      <p:sp>
+        <p:nvSpPr>
+          <p:cNvPr id="2" name="Slide Image Placeholder 1"/>
+          <p:cNvSpPr>
+            <a:spLocks noGrp="1"/>
+          </p:cNvSpPr>
+          <p:nvPr>
+            <p:ph type="sldImg" idx="2"/>
+          </p:nvPr>
+        </p:nvSpPr>
+        <p:spPr/>
+      </p:sp>
+      <p:sp>
+        <p:nvSpPr>
+          <p:cNvPr id="3" name="Notes Placeholder 2"/>
+          <p:cNvSpPr>
+            <a:spLocks noGrp="1"/>
+          </p:cNvSpPr>
+          <p:nvPr>
+            <p:ph type="body" idx="3" sz="quarter"/>
+          </p:nvPr>
+        </p:nvSpPr>
+        <p:spPr/>
+        <p:txBody>
+          <a:bodyPr/>
+          <a:lstStyle/>
+          <a:p>
+            <a:r>
+              <a:t>Faire lire à voix haute « les gens profitent d'un atelier gratuit » : les deux valeurs du g sont dans la même phrase.</a:t>
             </a:r>
           </a:p>
         </p:txBody>
@@ -1149,6 +1296,356 @@
           <a:p>
             <a:r>
               <a:t>Lire les objectifs à voix haute. Y revenir au billet de sortie.</a:t>
+            </a:r>
+          </a:p>
+        </p:txBody>
+      </p:sp>
+      <p:sp>
+        <p:nvSpPr>
+          <p:cNvPr id="4" name="Slide Number Placeholder 3"/>
+          <p:cNvSpPr>
+            <a:spLocks noGrp="1"/>
+          </p:cNvSpPr>
+          <p:nvPr>
+            <p:ph type="sldNum" idx="5" sz="quarter"/>
+          </p:nvPr>
+        </p:nvSpPr>
+        <p:spPr/>
+      </p:sp>
+    </p:spTree>
+  </p:cSld>
+  <p:clrMapOvr>
+    <a:masterClrMapping/>
+  </p:clrMapOvr>
+</p:notes>
+</file>
+
+<file path=ppt/notesSlides/notesSlide20.xml><?xml version="1.0" encoding="utf-8"?>
+<p:notes xmlns:a="http://schemas.openxmlformats.org/drawingml/2006/main" xmlns:p="http://schemas.openxmlformats.org/presentationml/2006/main" xmlns:r="http://schemas.openxmlformats.org/officeDocument/2006/relationships">
+  <p:cSld>
+    <p:spTree>
+      <p:nvGrpSpPr>
+        <p:cNvPr id="1" name=""/>
+        <p:cNvGrpSpPr/>
+        <p:nvPr/>
+      </p:nvGrpSpPr>
+      <p:grpSpPr>
+        <a:xfrm>
+          <a:off x="0" y="0"/>
+          <a:ext cx="0" cy="0"/>
+          <a:chOff x="0" y="0"/>
+          <a:chExt cx="0" cy="0"/>
+        </a:xfrm>
+      </p:grpSpPr>
+      <p:sp>
+        <p:nvSpPr>
+          <p:cNvPr id="2" name="Slide Image Placeholder 1"/>
+          <p:cNvSpPr>
+            <a:spLocks noGrp="1"/>
+          </p:cNvSpPr>
+          <p:nvPr>
+            <p:ph type="sldImg" idx="2"/>
+          </p:nvPr>
+        </p:nvSpPr>
+        <p:spPr/>
+      </p:sp>
+      <p:sp>
+        <p:nvSpPr>
+          <p:cNvPr id="3" name="Notes Placeholder 2"/>
+          <p:cNvSpPr>
+            <a:spLocks noGrp="1"/>
+          </p:cNvSpPr>
+          <p:nvPr>
+            <p:ph type="body" idx="3" sz="quarter"/>
+          </p:nvPr>
+        </p:nvSpPr>
+        <p:spPr/>
+        <p:txBody>
+          <a:bodyPr/>
+          <a:lstStyle/>
+          <a:p>
+            <a:r>
+              <a:t>Les huit mots de l'exercice de sons du module en ligne, dans le même ordre. Faire garder la main sur la gorge pendant l'écoute.</a:t>
+            </a:r>
+          </a:p>
+        </p:txBody>
+      </p:sp>
+      <p:sp>
+        <p:nvSpPr>
+          <p:cNvPr id="4" name="Slide Number Placeholder 3"/>
+          <p:cNvSpPr>
+            <a:spLocks noGrp="1"/>
+          </p:cNvSpPr>
+          <p:nvPr>
+            <p:ph type="sldNum" idx="5" sz="quarter"/>
+          </p:nvPr>
+        </p:nvSpPr>
+        <p:spPr/>
+      </p:sp>
+    </p:spTree>
+  </p:cSld>
+  <p:clrMapOvr>
+    <a:masterClrMapping/>
+  </p:clrMapOvr>
+</p:notes>
+</file>
+
+<file path=ppt/notesSlides/notesSlide21.xml><?xml version="1.0" encoding="utf-8"?>
+<p:notes xmlns:a="http://schemas.openxmlformats.org/drawingml/2006/main" xmlns:p="http://schemas.openxmlformats.org/presentationml/2006/main" xmlns:r="http://schemas.openxmlformats.org/officeDocument/2006/relationships">
+  <p:cSld>
+    <p:spTree>
+      <p:nvGrpSpPr>
+        <p:cNvPr id="1" name=""/>
+        <p:cNvGrpSpPr/>
+        <p:nvPr/>
+      </p:nvGrpSpPr>
+      <p:grpSpPr>
+        <a:xfrm>
+          <a:off x="0" y="0"/>
+          <a:ext cx="0" cy="0"/>
+          <a:chOff x="0" y="0"/>
+          <a:chExt cx="0" cy="0"/>
+        </a:xfrm>
+      </p:grpSpPr>
+      <p:sp>
+        <p:nvSpPr>
+          <p:cNvPr id="2" name="Slide Image Placeholder 1"/>
+          <p:cNvSpPr>
+            <a:spLocks noGrp="1"/>
+          </p:cNvSpPr>
+          <p:nvPr>
+            <p:ph type="sldImg" idx="2"/>
+          </p:nvPr>
+        </p:nvSpPr>
+        <p:spPr/>
+      </p:sp>
+      <p:sp>
+        <p:nvSpPr>
+          <p:cNvPr id="3" name="Notes Placeholder 2"/>
+          <p:cNvSpPr>
+            <a:spLocks noGrp="1"/>
+          </p:cNvSpPr>
+          <p:nvPr>
+            <p:ph type="body" idx="3" sz="quarter"/>
+          </p:nvPr>
+        </p:nvSpPr>
+        <p:spPr/>
+        <p:txBody>
+          <a:bodyPr/>
+          <a:lstStyle/>
+          <a:p>
+            <a:r>
+              <a:t>Corriger en groupe. Donner la bonne réponse, sans revenir sur qui s'est trompé.</a:t>
+            </a:r>
+          </a:p>
+        </p:txBody>
+      </p:sp>
+      <p:sp>
+        <p:nvSpPr>
+          <p:cNvPr id="4" name="Slide Number Placeholder 3"/>
+          <p:cNvSpPr>
+            <a:spLocks noGrp="1"/>
+          </p:cNvSpPr>
+          <p:nvPr>
+            <p:ph type="sldNum" idx="5" sz="quarter"/>
+          </p:nvPr>
+        </p:nvSpPr>
+        <p:spPr/>
+      </p:sp>
+    </p:spTree>
+  </p:cSld>
+  <p:clrMapOvr>
+    <a:masterClrMapping/>
+  </p:clrMapOvr>
+</p:notes>
+</file>
+
+<file path=ppt/notesSlides/notesSlide22.xml><?xml version="1.0" encoding="utf-8"?>
+<p:notes xmlns:a="http://schemas.openxmlformats.org/drawingml/2006/main" xmlns:p="http://schemas.openxmlformats.org/presentationml/2006/main" xmlns:r="http://schemas.openxmlformats.org/officeDocument/2006/relationships">
+  <p:cSld>
+    <p:spTree>
+      <p:nvGrpSpPr>
+        <p:cNvPr id="1" name=""/>
+        <p:cNvGrpSpPr/>
+        <p:nvPr/>
+      </p:nvGrpSpPr>
+      <p:grpSpPr>
+        <a:xfrm>
+          <a:off x="0" y="0"/>
+          <a:ext cx="0" cy="0"/>
+          <a:chOff x="0" y="0"/>
+          <a:chExt cx="0" cy="0"/>
+        </a:xfrm>
+      </p:grpSpPr>
+      <p:sp>
+        <p:nvSpPr>
+          <p:cNvPr id="2" name="Slide Image Placeholder 1"/>
+          <p:cNvSpPr>
+            <a:spLocks noGrp="1"/>
+          </p:cNvSpPr>
+          <p:nvPr>
+            <p:ph type="sldImg" idx="2"/>
+          </p:nvPr>
+        </p:nvSpPr>
+        <p:spPr/>
+      </p:sp>
+      <p:sp>
+        <p:nvSpPr>
+          <p:cNvPr id="3" name="Notes Placeholder 2"/>
+          <p:cNvSpPr>
+            <a:spLocks noGrp="1"/>
+          </p:cNvSpPr>
+          <p:nvPr>
+            <p:ph type="body" idx="3" sz="quarter"/>
+          </p:nvPr>
+        </p:nvSpPr>
+        <p:spPr/>
+        <p:txBody>
+          <a:bodyPr/>
+          <a:lstStyle/>
+          <a:p>
+            <a:r>
+              <a:t>La troisième phrase est la plus utile : elle oppose le son « ch », le son « j » et le g dur en une seule ligne.</a:t>
+            </a:r>
+          </a:p>
+        </p:txBody>
+      </p:sp>
+      <p:sp>
+        <p:nvSpPr>
+          <p:cNvPr id="4" name="Slide Number Placeholder 3"/>
+          <p:cNvSpPr>
+            <a:spLocks noGrp="1"/>
+          </p:cNvSpPr>
+          <p:nvPr>
+            <p:ph type="sldNum" idx="5" sz="quarter"/>
+          </p:nvPr>
+        </p:nvSpPr>
+        <p:spPr/>
+      </p:sp>
+    </p:spTree>
+  </p:cSld>
+  <p:clrMapOvr>
+    <a:masterClrMapping/>
+  </p:clrMapOvr>
+</p:notes>
+</file>
+
+<file path=ppt/notesSlides/notesSlide23.xml><?xml version="1.0" encoding="utf-8"?>
+<p:notes xmlns:a="http://schemas.openxmlformats.org/drawingml/2006/main" xmlns:p="http://schemas.openxmlformats.org/presentationml/2006/main" xmlns:r="http://schemas.openxmlformats.org/officeDocument/2006/relationships">
+  <p:cSld>
+    <p:spTree>
+      <p:nvGrpSpPr>
+        <p:cNvPr id="1" name=""/>
+        <p:cNvGrpSpPr/>
+        <p:nvPr/>
+      </p:nvGrpSpPr>
+      <p:grpSpPr>
+        <a:xfrm>
+          <a:off x="0" y="0"/>
+          <a:ext cx="0" cy="0"/>
+          <a:chOff x="0" y="0"/>
+          <a:chExt cx="0" cy="0"/>
+        </a:xfrm>
+      </p:grpSpPr>
+      <p:sp>
+        <p:nvSpPr>
+          <p:cNvPr id="2" name="Slide Image Placeholder 1"/>
+          <p:cNvSpPr>
+            <a:spLocks noGrp="1"/>
+          </p:cNvSpPr>
+          <p:nvPr>
+            <p:ph type="sldImg" idx="2"/>
+          </p:nvPr>
+        </p:nvSpPr>
+        <p:spPr/>
+      </p:sp>
+      <p:sp>
+        <p:nvSpPr>
+          <p:cNvPr id="3" name="Notes Placeholder 2"/>
+          <p:cNvSpPr>
+            <a:spLocks noGrp="1"/>
+          </p:cNvSpPr>
+          <p:nvPr>
+            <p:ph type="body" idx="3" sz="quarter"/>
+          </p:nvPr>
+        </p:nvSpPr>
+        <p:spPr/>
+        <p:txBody>
+          <a:bodyPr/>
+          <a:lstStyle/>
+          <a:p>
+            <a:r>
+              <a:t>Corriger en groupe. Donner la bonne réponse, sans revenir sur qui s'est trompé.</a:t>
+            </a:r>
+          </a:p>
+        </p:txBody>
+      </p:sp>
+      <p:sp>
+        <p:nvSpPr>
+          <p:cNvPr id="4" name="Slide Number Placeholder 3"/>
+          <p:cNvSpPr>
+            <a:spLocks noGrp="1"/>
+          </p:cNvSpPr>
+          <p:nvPr>
+            <p:ph type="sldNum" idx="5" sz="quarter"/>
+          </p:nvPr>
+        </p:nvSpPr>
+        <p:spPr/>
+      </p:sp>
+    </p:spTree>
+  </p:cSld>
+  <p:clrMapOvr>
+    <a:masterClrMapping/>
+  </p:clrMapOvr>
+</p:notes>
+</file>
+
+<file path=ppt/notesSlides/notesSlide24.xml><?xml version="1.0" encoding="utf-8"?>
+<p:notes xmlns:a="http://schemas.openxmlformats.org/drawingml/2006/main" xmlns:p="http://schemas.openxmlformats.org/presentationml/2006/main" xmlns:r="http://schemas.openxmlformats.org/officeDocument/2006/relationships">
+  <p:cSld>
+    <p:spTree>
+      <p:nvGrpSpPr>
+        <p:cNvPr id="1" name=""/>
+        <p:cNvGrpSpPr/>
+        <p:nvPr/>
+      </p:nvGrpSpPr>
+      <p:grpSpPr>
+        <a:xfrm>
+          <a:off x="0" y="0"/>
+          <a:ext cx="0" cy="0"/>
+          <a:chOff x="0" y="0"/>
+          <a:chExt cx="0" cy="0"/>
+        </a:xfrm>
+      </p:grpSpPr>
+      <p:sp>
+        <p:nvSpPr>
+          <p:cNvPr id="2" name="Slide Image Placeholder 1"/>
+          <p:cNvSpPr>
+            <a:spLocks noGrp="1"/>
+          </p:cNvSpPr>
+          <p:nvPr>
+            <p:ph type="sldImg" idx="2"/>
+          </p:nvPr>
+        </p:nvSpPr>
+        <p:spPr/>
+      </p:sp>
+      <p:sp>
+        <p:nvSpPr>
+          <p:cNvPr id="3" name="Notes Placeholder 2"/>
+          <p:cNvSpPr>
+            <a:spLocks noGrp="1"/>
+          </p:cNvSpPr>
+          <p:nvPr>
+            <p:ph type="body" idx="3" sz="quarter"/>
+          </p:nvPr>
+        </p:nvSpPr>
+        <p:spPr/>
+        <p:txBody>
+          <a:bodyPr/>
+          <a:lstStyle/>
+          <a:p>
+            <a:r>
+              <a:t>La justification est le vrai contenu du billet. Un choix expliqué vaut mieux qu'un bon choix inexpliqué.</a:t>
             </a:r>
           </a:p>
         </p:txBody>
@@ -7298,7 +7795,7 @@
                 </a:solidFill>
                 <a:latin typeface="Verdana"/>
               </a:rPr>
-              <a:t>PRATIQUE · 3 DE 4</a:t>
+              <a:t>PRATIQUE · 3 DE 6</a:t>
             </a:r>
           </a:p>
         </p:txBody>
@@ -9188,7 +9685,7 @@
                 </a:solidFill>
                 <a:latin typeface="Verdana"/>
               </a:rPr>
-              <a:t>PRATIQUE · 4 DE 4</a:t>
+              <a:t>PRATIQUE · 4 DE 6</a:t>
             </a:r>
           </a:p>
         </p:txBody>
@@ -10701,7 +11198,234 @@
       </p:sp>
       <p:sp>
         <p:nvSpPr>
-          <p:cNvPr id="5" name="Rectangle 4"/>
+          <p:cNvPr id="5" name="TextBox 4"/>
+          <p:cNvSpPr txBox="1"/>
+          <p:nvPr/>
+        </p:nvSpPr>
+        <p:spPr>
+          <a:xfrm>
+            <a:off x="566928" y="420624"/>
+            <a:ext cx="11057839" cy="237744"/>
+          </a:xfrm>
+          <a:prstGeom prst="rect">
+            <a:avLst/>
+          </a:prstGeom>
+          <a:noFill/>
+        </p:spPr>
+        <p:txBody>
+          <a:bodyPr wrap="square" lIns="0" rIns="0" tIns="0" bIns="0" anchor="t">
+            <a:spAutoFit/>
+          </a:bodyPr>
+          <a:lstStyle/>
+          <a:p>
+            <a:pPr algn="l">
+              <a:lnSpc>
+                <a:spcPct val="135000"/>
+              </a:lnSpc>
+            </a:pPr>
+            <a:r>
+              <a:rPr sz="1300" b="1" i="0" spc="156">
+                <a:solidFill>
+                  <a:srgbClr val="6B4FBB"/>
+                </a:solidFill>
+                <a:latin typeface="Verdana"/>
+              </a:rPr>
+              <a:t>DEUX SONS PROCHES DE LA CAPSULE</a:t>
+            </a:r>
+          </a:p>
+        </p:txBody>
+      </p:sp>
+      <p:sp>
+        <p:nvSpPr>
+          <p:cNvPr id="6" name="Rounded Rectangle 5"/>
+          <p:cNvSpPr/>
+          <p:nvPr/>
+        </p:nvSpPr>
+        <p:spPr>
+          <a:xfrm>
+            <a:off x="566928" y="1225296"/>
+            <a:ext cx="11057839" cy="1967991"/>
+          </a:xfrm>
+          <a:prstGeom prst="roundRect">
+            <a:avLst>
+              <a:gd name="adj" fmla="val 7434"/>
+            </a:avLst>
+          </a:prstGeom>
+          <a:solidFill>
+            <a:srgbClr val="EFEAFA"/>
+          </a:solidFill>
+          <a:ln w="12700">
+            <a:solidFill>
+              <a:srgbClr val="EAEAE8"/>
+            </a:solidFill>
+          </a:ln>
+          <a:effectLst/>
+        </p:spPr>
+        <p:style>
+          <a:lnRef idx="1">
+            <a:schemeClr val="accent1"/>
+          </a:lnRef>
+          <a:fillRef idx="3">
+            <a:schemeClr val="accent1"/>
+          </a:fillRef>
+          <a:effectRef idx="2">
+            <a:schemeClr val="accent1"/>
+          </a:effectRef>
+          <a:fontRef idx="minor">
+            <a:schemeClr val="lt1"/>
+          </a:fontRef>
+        </p:style>
+        <p:txBody>
+          <a:bodyPr rtlCol="0" anchor="ctr"/>
+          <a:lstStyle/>
+          <a:p/>
+        </p:txBody>
+      </p:sp>
+      <p:sp>
+        <p:nvSpPr>
+          <p:cNvPr id="7" name="TextBox 6"/>
+          <p:cNvSpPr txBox="1"/>
+          <p:nvPr/>
+        </p:nvSpPr>
+        <p:spPr>
+          <a:xfrm>
+            <a:off x="1298448" y="1682496"/>
+            <a:ext cx="9594799" cy="1145032"/>
+          </a:xfrm>
+          <a:prstGeom prst="rect">
+            <a:avLst/>
+          </a:prstGeom>
+          <a:noFill/>
+        </p:spPr>
+        <p:txBody>
+          <a:bodyPr wrap="square" lIns="0" rIns="0" tIns="0" bIns="0" anchor="t">
+            <a:spAutoFit/>
+          </a:bodyPr>
+          <a:lstStyle/>
+          <a:p>
+            <a:pPr algn="l">
+              <a:lnSpc>
+                <a:spcPct val="122000"/>
+              </a:lnSpc>
+            </a:pPr>
+            <a:r>
+              <a:rPr sz="3400" b="1" i="0">
+                <a:solidFill>
+                  <a:srgbClr val="17181A"/>
+                </a:solidFill>
+                <a:latin typeface="Verdana"/>
+              </a:rPr>
+              <a:t>Le son « ch » souffle sans voix ; le son « j » fait vibrer la gorge.</a:t>
+            </a:r>
+          </a:p>
+        </p:txBody>
+      </p:sp>
+      <p:sp>
+        <p:nvSpPr>
+          <p:cNvPr id="8" name="Rounded Rectangle 7"/>
+          <p:cNvSpPr/>
+          <p:nvPr/>
+        </p:nvSpPr>
+        <p:spPr>
+          <a:xfrm>
+            <a:off x="566928" y="3467607"/>
+            <a:ext cx="11057839" cy="1303528"/>
+          </a:xfrm>
+          <a:prstGeom prst="roundRect">
+            <a:avLst>
+              <a:gd name="adj" fmla="val 11223"/>
+            </a:avLst>
+          </a:prstGeom>
+          <a:solidFill>
+            <a:srgbClr val="FFFFFF"/>
+          </a:solidFill>
+          <a:ln w="12700">
+            <a:solidFill>
+              <a:srgbClr val="EAEAE8"/>
+            </a:solidFill>
+          </a:ln>
+          <a:effectLst/>
+        </p:spPr>
+        <p:style>
+          <a:lnRef idx="1">
+            <a:schemeClr val="accent1"/>
+          </a:lnRef>
+          <a:fillRef idx="3">
+            <a:schemeClr val="accent1"/>
+          </a:fillRef>
+          <a:effectRef idx="2">
+            <a:schemeClr val="accent1"/>
+          </a:effectRef>
+          <a:fontRef idx="minor">
+            <a:schemeClr val="lt1"/>
+          </a:fontRef>
+        </p:style>
+        <p:txBody>
+          <a:bodyPr rtlCol="0" anchor="ctr"/>
+          <a:lstStyle/>
+          <a:p/>
+        </p:txBody>
+      </p:sp>
+      <p:sp>
+        <p:nvSpPr>
+          <p:cNvPr id="9" name="TextBox 8"/>
+          <p:cNvSpPr txBox="1"/>
+          <p:nvPr/>
+        </p:nvSpPr>
+        <p:spPr>
+          <a:xfrm>
+            <a:off x="969264" y="3741927"/>
+            <a:ext cx="10234879" cy="846327"/>
+          </a:xfrm>
+          <a:prstGeom prst="rect">
+            <a:avLst/>
+          </a:prstGeom>
+          <a:noFill/>
+        </p:spPr>
+        <p:txBody>
+          <a:bodyPr wrap="square" lIns="0" rIns="0" tIns="0" bIns="0" anchor="t">
+            <a:spAutoFit/>
+          </a:bodyPr>
+          <a:lstStyle/>
+          <a:p>
+            <a:pPr algn="l">
+              <a:lnSpc>
+                <a:spcPct val="145000"/>
+              </a:lnSpc>
+            </a:pPr>
+            <a:r>
+              <a:rPr sz="2000" b="0" i="0">
+                <a:solidFill>
+                  <a:srgbClr val="4B4F52"/>
+                </a:solidFill>
+                <a:latin typeface="Verdana"/>
+              </a:rPr>
+              <a:t>« Affiche » et « message » sont les deux supports du module. Leurs deux sons se font au même endroit de la bouche : seule la vibration les sépare.</a:t>
+            </a:r>
+          </a:p>
+        </p:txBody>
+      </p:sp>
+    </p:spTree>
+  </p:cSld>
+  <p:clrMapOvr>
+    <a:masterClrMapping/>
+  </p:clrMapOvr>
+</p:sld>
+</file>
+
+<file path=ppt/slides/slide18.xml><?xml version="1.0" encoding="utf-8"?>
+<p:sld xmlns:a="http://schemas.openxmlformats.org/drawingml/2006/main" xmlns:p="http://schemas.openxmlformats.org/presentationml/2006/main" xmlns:r="http://schemas.openxmlformats.org/officeDocument/2006/relationships">
+  <p:cSld>
+    <p:spTree>
+      <p:nvGrpSpPr>
+        <p:cNvPr id="1" name=""/>
+        <p:cNvGrpSpPr/>
+        <p:nvPr/>
+      </p:nvGrpSpPr>
+      <p:grpSpPr/>
+      <p:sp>
+        <p:nvSpPr>
+          <p:cNvPr id="2" name="Rectangle 1"/>
           <p:cNvSpPr/>
           <p:nvPr/>
         </p:nvSpPr>
@@ -10714,7 +11438,7 @@
             <a:avLst/>
           </a:prstGeom>
           <a:solidFill>
-            <a:srgbClr val="17181A"/>
+            <a:srgbClr val="F7F7F5"/>
           </a:solidFill>
           <a:ln>
             <a:noFill/>
@@ -10743,14 +11467,131 @@
       </p:sp>
       <p:sp>
         <p:nvSpPr>
+          <p:cNvPr id="3" name="TextBox 2"/>
+          <p:cNvSpPr txBox="1"/>
+          <p:nvPr/>
+        </p:nvSpPr>
+        <p:spPr>
+          <a:xfrm>
+            <a:off x="566928" y="6355080"/>
+            <a:ext cx="6400800" cy="219456"/>
+          </a:xfrm>
+          <a:prstGeom prst="rect">
+            <a:avLst/>
+          </a:prstGeom>
+          <a:noFill/>
+        </p:spPr>
+        <p:txBody>
+          <a:bodyPr wrap="square" lIns="0" rIns="0" tIns="0" bIns="0" anchor="t">
+            <a:spAutoFit/>
+          </a:bodyPr>
+          <a:lstStyle/>
+          <a:p>
+            <a:pPr algn="l">
+              <a:lnSpc>
+                <a:spcPct val="135000"/>
+              </a:lnSpc>
+            </a:pPr>
+            <a:r>
+              <a:rPr sz="1200" b="0" i="0">
+                <a:solidFill>
+                  <a:srgbClr val="6E7175"/>
+                </a:solidFill>
+                <a:latin typeface="Verdana"/>
+              </a:rPr>
+              <a:t>A2 · Des publicités efficaces</a:t>
+            </a:r>
+          </a:p>
+        </p:txBody>
+      </p:sp>
+      <p:sp>
+        <p:nvSpPr>
+          <p:cNvPr id="4" name="TextBox 3"/>
+          <p:cNvSpPr txBox="1"/>
+          <p:nvPr/>
+        </p:nvSpPr>
+        <p:spPr>
+          <a:xfrm>
+            <a:off x="10710367" y="6355080"/>
+            <a:ext cx="914400" cy="219456"/>
+          </a:xfrm>
+          <a:prstGeom prst="rect">
+            <a:avLst/>
+          </a:prstGeom>
+          <a:noFill/>
+        </p:spPr>
+        <p:txBody>
+          <a:bodyPr wrap="square" lIns="0" rIns="0" tIns="0" bIns="0" anchor="t">
+            <a:spAutoFit/>
+          </a:bodyPr>
+          <a:lstStyle/>
+          <a:p>
+            <a:pPr algn="r">
+              <a:lnSpc>
+                <a:spcPct val="135000"/>
+              </a:lnSpc>
+            </a:pPr>
+            <a:r>
+              <a:rPr sz="1200" b="0" i="0">
+                <a:solidFill>
+                  <a:srgbClr val="6E7175"/>
+                </a:solidFill>
+                <a:latin typeface="Verdana"/>
+              </a:rPr>
+              <a:t>18</a:t>
+            </a:r>
+          </a:p>
+        </p:txBody>
+      </p:sp>
+      <p:sp>
+        <p:nvSpPr>
+          <p:cNvPr id="5" name="TextBox 4"/>
+          <p:cNvSpPr txBox="1"/>
+          <p:nvPr/>
+        </p:nvSpPr>
+        <p:spPr>
+          <a:xfrm>
+            <a:off x="566928" y="420624"/>
+            <a:ext cx="11057839" cy="237744"/>
+          </a:xfrm>
+          <a:prstGeom prst="rect">
+            <a:avLst/>
+          </a:prstGeom>
+          <a:noFill/>
+        </p:spPr>
+        <p:txBody>
+          <a:bodyPr wrap="square" lIns="0" rIns="0" tIns="0" bIns="0" anchor="t">
+            <a:spAutoFit/>
+          </a:bodyPr>
+          <a:lstStyle/>
+          <a:p>
+            <a:pPr algn="l">
+              <a:lnSpc>
+                <a:spcPct val="135000"/>
+              </a:lnSpc>
+            </a:pPr>
+            <a:r>
+              <a:rPr sz="1300" b="1" i="0" spc="156">
+                <a:solidFill>
+                  <a:srgbClr val="6B4FBB"/>
+                </a:solidFill>
+                <a:latin typeface="Verdana"/>
+              </a:rPr>
+              <a:t>ANALYSE</a:t>
+            </a:r>
+          </a:p>
+        </p:txBody>
+      </p:sp>
+      <p:sp>
+        <p:nvSpPr>
           <p:cNvPr id="6" name="TextBox 5"/>
           <p:cNvSpPr txBox="1"/>
           <p:nvPr/>
         </p:nvSpPr>
         <p:spPr>
           <a:xfrm>
-            <a:off x="566928" y="1051560"/>
-            <a:ext cx="11057839" cy="274320"/>
+            <a:off x="566928" y="749808"/>
+            <a:ext cx="11057839" cy="877824"/>
           </a:xfrm>
           <a:prstGeom prst="rect">
             <a:avLst/>
@@ -10765,78 +11606,317 @@
           <a:p>
             <a:pPr algn="l">
               <a:lnSpc>
-                <a:spcPct val="135000"/>
-              </a:lnSpc>
-            </a:pPr>
-            <a:r>
-              <a:rPr sz="1300" b="1" i="0" spc="156">
-                <a:solidFill>
-                  <a:srgbClr val="FFFFFF"/>
-                </a:solidFill>
-                <a:latin typeface="Verdana"/>
-              </a:rPr>
-              <a:t>BILLET DE SORTIE</a:t>
-            </a:r>
-          </a:p>
-        </p:txBody>
-      </p:sp>
-      <p:sp>
-        <p:nvSpPr>
-          <p:cNvPr id="7" name="TextBox 6"/>
-          <p:cNvSpPr txBox="1"/>
-          <p:nvPr/>
-        </p:nvSpPr>
-        <p:spPr>
-          <a:xfrm>
-            <a:off x="566928" y="1572768"/>
-            <a:ext cx="9777679" cy="2103120"/>
-          </a:xfrm>
-          <a:prstGeom prst="rect">
-            <a:avLst/>
-          </a:prstGeom>
-          <a:noFill/>
-        </p:spPr>
-        <p:txBody>
-          <a:bodyPr wrap="square" lIns="0" rIns="0" tIns="0" bIns="0" anchor="t">
-            <a:spAutoFit/>
-          </a:bodyPr>
-          <a:lstStyle/>
-          <a:p>
-            <a:pPr algn="l">
-              <a:lnSpc>
-                <a:spcPct val="125000"/>
+                <a:spcPct val="115000"/>
               </a:lnSpc>
             </a:pPr>
             <a:r>
               <a:rPr sz="3400" b="1" i="0">
                 <a:solidFill>
-                  <a:srgbClr val="FFFFFF"/>
-                </a:solidFill>
-                <a:latin typeface="Verdana"/>
-              </a:rPr>
-              <a:t>Écrivez une annonce de deux phrases et soulignez le mot sur lequel vous insisterez.</a:t>
-            </a:r>
-          </a:p>
-        </p:txBody>
-      </p:sp>
-      <p:sp>
-        <p:nvSpPr>
-          <p:cNvPr id="8" name="Rounded Rectangle 7"/>
+                  <a:srgbClr val="17181A"/>
+                </a:solidFill>
+                <a:latin typeface="Verdana"/>
+              </a:rPr>
+              <a:t>Les deux sons dans les mots de la publicité</a:t>
+            </a:r>
+          </a:p>
+        </p:txBody>
+      </p:sp>
+      <p:sp>
+        <p:nvSpPr>
+          <p:cNvPr id="7" name="Rounded Rectangle 6"/>
           <p:cNvSpPr/>
           <p:nvPr/>
         </p:nvSpPr>
         <p:spPr>
           <a:xfrm>
-            <a:off x="566928" y="3931920"/>
-            <a:ext cx="11057839" cy="666496"/>
+            <a:off x="566928" y="1810512"/>
+            <a:ext cx="11057839" cy="2322576"/>
           </a:xfrm>
           <a:prstGeom prst="roundRect">
             <a:avLst>
-              <a:gd name="adj" fmla="val 13719"/>
+              <a:gd name="adj" fmla="val 6299"/>
             </a:avLst>
           </a:prstGeom>
           <a:solidFill>
-            <a:srgbClr val="2A2C2F"/>
+            <a:srgbClr val="FFFFFF"/>
+          </a:solidFill>
+          <a:ln w="12700">
+            <a:solidFill>
+              <a:srgbClr val="EAEAE8"/>
+            </a:solidFill>
+          </a:ln>
+          <a:effectLst/>
+        </p:spPr>
+        <p:style>
+          <a:lnRef idx="1">
+            <a:schemeClr val="accent1"/>
+          </a:lnRef>
+          <a:fillRef idx="3">
+            <a:schemeClr val="accent1"/>
+          </a:fillRef>
+          <a:effectRef idx="2">
+            <a:schemeClr val="accent1"/>
+          </a:effectRef>
+          <a:fontRef idx="minor">
+            <a:schemeClr val="lt1"/>
+          </a:fontRef>
+        </p:style>
+        <p:txBody>
+          <a:bodyPr rtlCol="0" anchor="ctr"/>
+          <a:lstStyle/>
+          <a:p/>
+        </p:txBody>
+      </p:sp>
+      <p:sp>
+        <p:nvSpPr>
+          <p:cNvPr id="8" name="TextBox 7"/>
+          <p:cNvSpPr txBox="1"/>
+          <p:nvPr/>
+        </p:nvSpPr>
+        <p:spPr>
+          <a:xfrm>
+            <a:off x="932688" y="1975104"/>
+            <a:ext cx="3222650" cy="237744"/>
+          </a:xfrm>
+          <a:prstGeom prst="rect">
+            <a:avLst/>
+          </a:prstGeom>
+          <a:noFill/>
+        </p:spPr>
+        <p:txBody>
+          <a:bodyPr wrap="square" lIns="0" rIns="0" tIns="0" bIns="0" anchor="t">
+            <a:spAutoFit/>
+          </a:bodyPr>
+          <a:lstStyle/>
+          <a:p>
+            <a:pPr algn="l">
+              <a:lnSpc>
+                <a:spcPct val="135000"/>
+              </a:lnSpc>
+            </a:pPr>
+            <a:r>
+              <a:rPr sz="1300" b="1" i="0" spc="156">
+                <a:solidFill>
+                  <a:srgbClr val="6E7175"/>
+                </a:solidFill>
+                <a:latin typeface="Verdana"/>
+              </a:rPr>
+              <a:t>LE SON</a:t>
+            </a:r>
+          </a:p>
+        </p:txBody>
+      </p:sp>
+      <p:sp>
+        <p:nvSpPr>
+          <p:cNvPr id="9" name="TextBox 8"/>
+          <p:cNvSpPr txBox="1"/>
+          <p:nvPr/>
+        </p:nvSpPr>
+        <p:spPr>
+          <a:xfrm>
+            <a:off x="4374794" y="1975104"/>
+            <a:ext cx="3222650" cy="237744"/>
+          </a:xfrm>
+          <a:prstGeom prst="rect">
+            <a:avLst/>
+          </a:prstGeom>
+          <a:noFill/>
+        </p:spPr>
+        <p:txBody>
+          <a:bodyPr wrap="square" lIns="0" rIns="0" tIns="0" bIns="0" anchor="t">
+            <a:spAutoFit/>
+          </a:bodyPr>
+          <a:lstStyle/>
+          <a:p>
+            <a:pPr algn="l">
+              <a:lnSpc>
+                <a:spcPct val="135000"/>
+              </a:lnSpc>
+            </a:pPr>
+            <a:r>
+              <a:rPr sz="1300" b="1" i="0" spc="156">
+                <a:solidFill>
+                  <a:srgbClr val="6E7175"/>
+                </a:solidFill>
+                <a:latin typeface="Verdana"/>
+              </a:rPr>
+              <a:t>IL S'ÉCRIT</a:t>
+            </a:r>
+          </a:p>
+        </p:txBody>
+      </p:sp>
+      <p:sp>
+        <p:nvSpPr>
+          <p:cNvPr id="10" name="TextBox 9"/>
+          <p:cNvSpPr txBox="1"/>
+          <p:nvPr/>
+        </p:nvSpPr>
+        <p:spPr>
+          <a:xfrm>
+            <a:off x="7816900" y="1975104"/>
+            <a:ext cx="3222650" cy="237744"/>
+          </a:xfrm>
+          <a:prstGeom prst="rect">
+            <a:avLst/>
+          </a:prstGeom>
+          <a:noFill/>
+        </p:spPr>
+        <p:txBody>
+          <a:bodyPr wrap="square" lIns="0" rIns="0" tIns="0" bIns="0" anchor="t">
+            <a:spAutoFit/>
+          </a:bodyPr>
+          <a:lstStyle/>
+          <a:p>
+            <a:pPr algn="l">
+              <a:lnSpc>
+                <a:spcPct val="135000"/>
+              </a:lnSpc>
+            </a:pPr>
+            <a:r>
+              <a:rPr sz="1300" b="1" i="0" spc="156">
+                <a:solidFill>
+                  <a:srgbClr val="6E7175"/>
+                </a:solidFill>
+                <a:latin typeface="Verdana"/>
+              </a:rPr>
+              <a:t>MOTS DU MODULE</a:t>
+            </a:r>
+          </a:p>
+        </p:txBody>
+      </p:sp>
+      <p:sp>
+        <p:nvSpPr>
+          <p:cNvPr id="11" name="TextBox 10"/>
+          <p:cNvSpPr txBox="1"/>
+          <p:nvPr/>
+        </p:nvSpPr>
+        <p:spPr>
+          <a:xfrm>
+            <a:off x="932688" y="2395728"/>
+            <a:ext cx="3222650" cy="640080"/>
+          </a:xfrm>
+          <a:prstGeom prst="rect">
+            <a:avLst/>
+          </a:prstGeom>
+          <a:noFill/>
+        </p:spPr>
+        <p:txBody>
+          <a:bodyPr wrap="square" lIns="0" rIns="0" tIns="0" bIns="0" anchor="t">
+            <a:spAutoFit/>
+          </a:bodyPr>
+          <a:lstStyle/>
+          <a:p>
+            <a:pPr algn="l">
+              <a:lnSpc>
+                <a:spcPct val="132000"/>
+              </a:lnSpc>
+            </a:pPr>
+            <a:r>
+              <a:rPr sz="1800" b="1" i="0">
+                <a:solidFill>
+                  <a:srgbClr val="6B4FBB"/>
+                </a:solidFill>
+                <a:latin typeface="Verdana"/>
+              </a:rPr>
+              <a:t>le son « ch »</a:t>
+            </a:r>
+          </a:p>
+        </p:txBody>
+      </p:sp>
+      <p:sp>
+        <p:nvSpPr>
+          <p:cNvPr id="12" name="TextBox 11"/>
+          <p:cNvSpPr txBox="1"/>
+          <p:nvPr/>
+        </p:nvSpPr>
+        <p:spPr>
+          <a:xfrm>
+            <a:off x="4374794" y="2395728"/>
+            <a:ext cx="3222650" cy="640080"/>
+          </a:xfrm>
+          <a:prstGeom prst="rect">
+            <a:avLst/>
+          </a:prstGeom>
+          <a:noFill/>
+        </p:spPr>
+        <p:txBody>
+          <a:bodyPr wrap="square" lIns="0" rIns="0" tIns="0" bIns="0" anchor="t">
+            <a:spAutoFit/>
+          </a:bodyPr>
+          <a:lstStyle/>
+          <a:p>
+            <a:pPr algn="l">
+              <a:lnSpc>
+                <a:spcPct val="132000"/>
+              </a:lnSpc>
+            </a:pPr>
+            <a:r>
+              <a:rPr sz="1800" b="0" i="0">
+                <a:solidFill>
+                  <a:srgbClr val="3A3D40"/>
+                </a:solidFill>
+                <a:latin typeface="Verdana"/>
+              </a:rPr>
+              <a:t>ch</a:t>
+            </a:r>
+          </a:p>
+        </p:txBody>
+      </p:sp>
+      <p:sp>
+        <p:nvSpPr>
+          <p:cNvPr id="13" name="TextBox 12"/>
+          <p:cNvSpPr txBox="1"/>
+          <p:nvPr/>
+        </p:nvSpPr>
+        <p:spPr>
+          <a:xfrm>
+            <a:off x="7816900" y="2395728"/>
+            <a:ext cx="3222650" cy="640080"/>
+          </a:xfrm>
+          <a:prstGeom prst="rect">
+            <a:avLst/>
+          </a:prstGeom>
+          <a:noFill/>
+        </p:spPr>
+        <p:txBody>
+          <a:bodyPr wrap="square" lIns="0" rIns="0" tIns="0" bIns="0" anchor="t">
+            <a:spAutoFit/>
+          </a:bodyPr>
+          <a:lstStyle/>
+          <a:p>
+            <a:pPr algn="l">
+              <a:lnSpc>
+                <a:spcPct val="132000"/>
+              </a:lnSpc>
+            </a:pPr>
+            <a:r>
+              <a:rPr sz="1800" b="0" i="0">
+                <a:solidFill>
+                  <a:srgbClr val="3A3D40"/>
+                </a:solidFill>
+                <a:latin typeface="Verdana"/>
+              </a:rPr>
+              <a:t>affiche, choisis, chaîne, déchirés</a:t>
+            </a:r>
+          </a:p>
+        </p:txBody>
+      </p:sp>
+      <p:sp>
+        <p:nvSpPr>
+          <p:cNvPr id="14" name="Rectangle 13"/>
+          <p:cNvSpPr/>
+          <p:nvPr/>
+        </p:nvSpPr>
+        <p:spPr>
+          <a:xfrm>
+            <a:off x="932688" y="3108960"/>
+            <a:ext cx="10326319" cy="10058"/>
+          </a:xfrm>
+          <a:prstGeom prst="rect">
+            <a:avLst/>
+          </a:prstGeom>
+          <a:solidFill>
+            <a:srgbClr val="EAEAE8"/>
           </a:solidFill>
           <a:ln>
             <a:noFill/>
@@ -10865,14 +11945,14 @@
       </p:sp>
       <p:sp>
         <p:nvSpPr>
-          <p:cNvPr id="9" name="TextBox 8"/>
-          <p:cNvSpPr txBox="1"/>
-          <p:nvPr/>
-        </p:nvSpPr>
-        <p:spPr>
-          <a:xfrm>
-            <a:off x="932688" y="4087368"/>
-            <a:ext cx="10051999" cy="392176"/>
+          <p:cNvPr id="15" name="TextBox 14"/>
+          <p:cNvSpPr txBox="1"/>
+          <p:nvPr/>
+        </p:nvSpPr>
+        <p:spPr>
+          <a:xfrm>
+            <a:off x="932688" y="3236976"/>
+            <a:ext cx="3222650" cy="640080"/>
           </a:xfrm>
           <a:prstGeom prst="rect">
             <a:avLst/>
@@ -10887,39 +11967,218 @@
           <a:p>
             <a:pPr algn="l">
               <a:lnSpc>
-                <a:spcPct val="140000"/>
-              </a:lnSpc>
-            </a:pPr>
-            <a:r>
-              <a:rPr sz="2000" b="0" i="0">
-                <a:solidFill>
-                  <a:srgbClr val="FFFFFF"/>
-                </a:solidFill>
-                <a:latin typeface="Verdana"/>
-              </a:rPr>
-              <a:t>Un seul mot souligné.</a:t>
-            </a:r>
-          </a:p>
-        </p:txBody>
-      </p:sp>
-      <p:sp>
-        <p:nvSpPr>
-          <p:cNvPr id="10" name="Rounded Rectangle 9"/>
+                <a:spcPct val="132000"/>
+              </a:lnSpc>
+            </a:pPr>
+            <a:r>
+              <a:rPr sz="1800" b="1" i="0">
+                <a:solidFill>
+                  <a:srgbClr val="6B4FBB"/>
+                </a:solidFill>
+                <a:latin typeface="Verdana"/>
+              </a:rPr>
+              <a:t>le son « j »</a:t>
+            </a:r>
+          </a:p>
+        </p:txBody>
+      </p:sp>
+      <p:sp>
+        <p:nvSpPr>
+          <p:cNvPr id="16" name="TextBox 15"/>
+          <p:cNvSpPr txBox="1"/>
+          <p:nvPr/>
+        </p:nvSpPr>
+        <p:spPr>
+          <a:xfrm>
+            <a:off x="4374794" y="3236976"/>
+            <a:ext cx="3222650" cy="640080"/>
+          </a:xfrm>
+          <a:prstGeom prst="rect">
+            <a:avLst/>
+          </a:prstGeom>
+          <a:noFill/>
+        </p:spPr>
+        <p:txBody>
+          <a:bodyPr wrap="square" lIns="0" rIns="0" tIns="0" bIns="0" anchor="t">
+            <a:spAutoFit/>
+          </a:bodyPr>
+          <a:lstStyle/>
+          <a:p>
+            <a:pPr algn="l">
+              <a:lnSpc>
+                <a:spcPct val="132000"/>
+              </a:lnSpc>
+            </a:pPr>
+            <a:r>
+              <a:rPr sz="1800" b="0" i="0">
+                <a:solidFill>
+                  <a:srgbClr val="3A3D40"/>
+                </a:solidFill>
+                <a:latin typeface="Verdana"/>
+              </a:rPr>
+              <a:t>j, ou g devant e, i, y</a:t>
+            </a:r>
+          </a:p>
+        </p:txBody>
+      </p:sp>
+      <p:sp>
+        <p:nvSpPr>
+          <p:cNvPr id="17" name="TextBox 16"/>
+          <p:cNvSpPr txBox="1"/>
+          <p:nvPr/>
+        </p:nvSpPr>
+        <p:spPr>
+          <a:xfrm>
+            <a:off x="7816900" y="3236976"/>
+            <a:ext cx="3222650" cy="640080"/>
+          </a:xfrm>
+          <a:prstGeom prst="rect">
+            <a:avLst/>
+          </a:prstGeom>
+          <a:noFill/>
+        </p:spPr>
+        <p:txBody>
+          <a:bodyPr wrap="square" lIns="0" rIns="0" tIns="0" bIns="0" anchor="t">
+            <a:spAutoFit/>
+          </a:bodyPr>
+          <a:lstStyle/>
+          <a:p>
+            <a:pPr algn="l">
+              <a:lnSpc>
+                <a:spcPct val="132000"/>
+              </a:lnSpc>
+            </a:pPr>
+            <a:r>
+              <a:rPr sz="1800" b="0" i="0">
+                <a:solidFill>
+                  <a:srgbClr val="3A3D40"/>
+                </a:solidFill>
+                <a:latin typeface="Verdana"/>
+              </a:rPr>
+              <a:t>gens, justement, message, rejoindre</a:t>
+            </a:r>
+          </a:p>
+        </p:txBody>
+      </p:sp>
+      <p:sp>
+        <p:nvSpPr>
+          <p:cNvPr id="18" name="Rounded Rectangle 17"/>
           <p:cNvSpPr/>
           <p:nvPr/>
         </p:nvSpPr>
         <p:spPr>
           <a:xfrm>
-            <a:off x="566928" y="4680712"/>
-            <a:ext cx="11057839" cy="666496"/>
+            <a:off x="566928" y="4370831"/>
+            <a:ext cx="11057839" cy="1175004"/>
           </a:xfrm>
           <a:prstGeom prst="roundRect">
             <a:avLst>
-              <a:gd name="adj" fmla="val 13719"/>
+              <a:gd name="adj" fmla="val 12451"/>
             </a:avLst>
           </a:prstGeom>
           <a:solidFill>
-            <a:srgbClr val="2A2C2F"/>
+            <a:srgbClr val="FBFBFA"/>
+          </a:solidFill>
+          <a:ln w="12700">
+            <a:solidFill>
+              <a:srgbClr val="EAEAE8"/>
+            </a:solidFill>
+          </a:ln>
+          <a:effectLst/>
+        </p:spPr>
+        <p:style>
+          <a:lnRef idx="1">
+            <a:schemeClr val="accent1"/>
+          </a:lnRef>
+          <a:fillRef idx="3">
+            <a:schemeClr val="accent1"/>
+          </a:fillRef>
+          <a:effectRef idx="2">
+            <a:schemeClr val="accent1"/>
+          </a:effectRef>
+          <a:fontRef idx="minor">
+            <a:schemeClr val="lt1"/>
+          </a:fontRef>
+        </p:style>
+        <p:txBody>
+          <a:bodyPr rtlCol="0" anchor="ctr"/>
+          <a:lstStyle/>
+          <a:p/>
+        </p:txBody>
+      </p:sp>
+      <p:sp>
+        <p:nvSpPr>
+          <p:cNvPr id="19" name="TextBox 18"/>
+          <p:cNvSpPr txBox="1"/>
+          <p:nvPr/>
+        </p:nvSpPr>
+        <p:spPr>
+          <a:xfrm>
+            <a:off x="969264" y="4626864"/>
+            <a:ext cx="10234879" cy="717804"/>
+          </a:xfrm>
+          <a:prstGeom prst="rect">
+            <a:avLst/>
+          </a:prstGeom>
+          <a:noFill/>
+        </p:spPr>
+        <p:txBody>
+          <a:bodyPr wrap="square" lIns="0" rIns="0" tIns="0" bIns="0" anchor="t">
+            <a:spAutoFit/>
+          </a:bodyPr>
+          <a:lstStyle/>
+          <a:p>
+            <a:pPr algn="l">
+              <a:lnSpc>
+                <a:spcPct val="145000"/>
+              </a:lnSpc>
+            </a:pPr>
+            <a:r>
+              <a:rPr sz="1800" b="0" i="0">
+                <a:solidFill>
+                  <a:srgbClr val="4B4F52"/>
+                </a:solidFill>
+                <a:latin typeface="Verdana"/>
+              </a:rPr>
+              <a:t>Devant a, o et u, le g ne fait pas le son « j » mais le son « g » : gratuit, garde, légume.</a:t>
+            </a:r>
+          </a:p>
+        </p:txBody>
+      </p:sp>
+    </p:spTree>
+  </p:cSld>
+  <p:clrMapOvr>
+    <a:masterClrMapping/>
+  </p:clrMapOvr>
+</p:sld>
+</file>
+
+<file path=ppt/slides/slide19.xml><?xml version="1.0" encoding="utf-8"?>
+<p:sld xmlns:a="http://schemas.openxmlformats.org/drawingml/2006/main" xmlns:p="http://schemas.openxmlformats.org/presentationml/2006/main" xmlns:r="http://schemas.openxmlformats.org/officeDocument/2006/relationships">
+  <p:cSld>
+    <p:spTree>
+      <p:nvGrpSpPr>
+        <p:cNvPr id="1" name=""/>
+        <p:cNvGrpSpPr/>
+        <p:nvPr/>
+      </p:nvGrpSpPr>
+      <p:grpSpPr/>
+      <p:sp>
+        <p:nvSpPr>
+          <p:cNvPr id="2" name="Rectangle 1"/>
+          <p:cNvSpPr/>
+          <p:nvPr/>
+        </p:nvSpPr>
+        <p:spPr>
+          <a:xfrm>
+            <a:off x="0" y="0"/>
+            <a:ext cx="12191695" cy="6858000"/>
+          </a:xfrm>
+          <a:prstGeom prst="rect">
+            <a:avLst/>
+          </a:prstGeom>
+          <a:solidFill>
+            <a:srgbClr val="F7F7F5"/>
           </a:solidFill>
           <a:ln>
             <a:noFill/>
@@ -10948,46 +12207,7 @@
       </p:sp>
       <p:sp>
         <p:nvSpPr>
-          <p:cNvPr id="11" name="TextBox 10"/>
-          <p:cNvSpPr txBox="1"/>
-          <p:nvPr/>
-        </p:nvSpPr>
-        <p:spPr>
-          <a:xfrm>
-            <a:off x="932688" y="4836160"/>
-            <a:ext cx="10051999" cy="392176"/>
-          </a:xfrm>
-          <a:prstGeom prst="rect">
-            <a:avLst/>
-          </a:prstGeom>
-          <a:noFill/>
-        </p:spPr>
-        <p:txBody>
-          <a:bodyPr wrap="square" lIns="0" rIns="0" tIns="0" bIns="0" anchor="t">
-            <a:spAutoFit/>
-          </a:bodyPr>
-          <a:lstStyle/>
-          <a:p>
-            <a:pPr algn="l">
-              <a:lnSpc>
-                <a:spcPct val="140000"/>
-              </a:lnSpc>
-            </a:pPr>
-            <a:r>
-              <a:rPr sz="2000" b="0" i="0">
-                <a:solidFill>
-                  <a:srgbClr val="FFFFFF"/>
-                </a:solidFill>
-                <a:latin typeface="Verdana"/>
-              </a:rPr>
-              <a:t>Écrivez à côté pourquoi vous avez choisi celui-là.</a:t>
-            </a:r>
-          </a:p>
-        </p:txBody>
-      </p:sp>
-      <p:sp>
-        <p:nvSpPr>
-          <p:cNvPr id="12" name="TextBox 11"/>
+          <p:cNvPr id="3" name="TextBox 2"/>
           <p:cNvSpPr txBox="1"/>
           <p:nvPr/>
         </p:nvSpPr>
@@ -11020,6 +12240,456 @@
                 <a:latin typeface="Verdana"/>
               </a:rPr>
               <a:t>A2 · Des publicités efficaces</a:t>
+            </a:r>
+          </a:p>
+        </p:txBody>
+      </p:sp>
+      <p:sp>
+        <p:nvSpPr>
+          <p:cNvPr id="4" name="TextBox 3"/>
+          <p:cNvSpPr txBox="1"/>
+          <p:nvPr/>
+        </p:nvSpPr>
+        <p:spPr>
+          <a:xfrm>
+            <a:off x="10710367" y="6355080"/>
+            <a:ext cx="914400" cy="219456"/>
+          </a:xfrm>
+          <a:prstGeom prst="rect">
+            <a:avLst/>
+          </a:prstGeom>
+          <a:noFill/>
+        </p:spPr>
+        <p:txBody>
+          <a:bodyPr wrap="square" lIns="0" rIns="0" tIns="0" bIns="0" anchor="t">
+            <a:spAutoFit/>
+          </a:bodyPr>
+          <a:lstStyle/>
+          <a:p>
+            <a:pPr algn="r">
+              <a:lnSpc>
+                <a:spcPct val="135000"/>
+              </a:lnSpc>
+            </a:pPr>
+            <a:r>
+              <a:rPr sz="1200" b="0" i="0">
+                <a:solidFill>
+                  <a:srgbClr val="6E7175"/>
+                </a:solidFill>
+                <a:latin typeface="Verdana"/>
+              </a:rPr>
+              <a:t>19</a:t>
+            </a:r>
+          </a:p>
+        </p:txBody>
+      </p:sp>
+      <p:sp>
+        <p:nvSpPr>
+          <p:cNvPr id="5" name="TextBox 4"/>
+          <p:cNvSpPr txBox="1"/>
+          <p:nvPr/>
+        </p:nvSpPr>
+        <p:spPr>
+          <a:xfrm>
+            <a:off x="566928" y="420624"/>
+            <a:ext cx="11057839" cy="237744"/>
+          </a:xfrm>
+          <a:prstGeom prst="rect">
+            <a:avLst/>
+          </a:prstGeom>
+          <a:noFill/>
+        </p:spPr>
+        <p:txBody>
+          <a:bodyPr wrap="square" lIns="0" rIns="0" tIns="0" bIns="0" anchor="t">
+            <a:spAutoFit/>
+          </a:bodyPr>
+          <a:lstStyle/>
+          <a:p>
+            <a:pPr algn="l">
+              <a:lnSpc>
+                <a:spcPct val="135000"/>
+              </a:lnSpc>
+            </a:pPr>
+            <a:r>
+              <a:rPr sz="1300" b="1" i="0" spc="156">
+                <a:solidFill>
+                  <a:srgbClr val="6B4FBB"/>
+                </a:solidFill>
+                <a:latin typeface="Verdana"/>
+              </a:rPr>
+              <a:t>LE PIÈGE DU G DE « GRATUIT »</a:t>
+            </a:r>
+          </a:p>
+        </p:txBody>
+      </p:sp>
+      <p:sp>
+        <p:nvSpPr>
+          <p:cNvPr id="6" name="TextBox 5"/>
+          <p:cNvSpPr txBox="1"/>
+          <p:nvPr/>
+        </p:nvSpPr>
+        <p:spPr>
+          <a:xfrm>
+            <a:off x="566928" y="749808"/>
+            <a:ext cx="11057839" cy="877824"/>
+          </a:xfrm>
+          <a:prstGeom prst="rect">
+            <a:avLst/>
+          </a:prstGeom>
+          <a:noFill/>
+        </p:spPr>
+        <p:txBody>
+          <a:bodyPr wrap="square" lIns="0" rIns="0" tIns="0" bIns="0" anchor="t">
+            <a:spAutoFit/>
+          </a:bodyPr>
+          <a:lstStyle/>
+          <a:p>
+            <a:pPr algn="l">
+              <a:lnSpc>
+                <a:spcPct val="115000"/>
+              </a:lnSpc>
+            </a:pPr>
+            <a:r>
+              <a:rPr sz="3400" b="1" i="0">
+                <a:solidFill>
+                  <a:srgbClr val="17181A"/>
+                </a:solidFill>
+                <a:latin typeface="Verdana"/>
+              </a:rPr>
+              <a:t>Le piège le plus fréquent</a:t>
+            </a:r>
+          </a:p>
+        </p:txBody>
+      </p:sp>
+      <p:sp>
+        <p:nvSpPr>
+          <p:cNvPr id="7" name="Rounded Rectangle 6"/>
+          <p:cNvSpPr/>
+          <p:nvPr/>
+        </p:nvSpPr>
+        <p:spPr>
+          <a:xfrm>
+            <a:off x="566928" y="1856232"/>
+            <a:ext cx="5428335" cy="2331720"/>
+          </a:xfrm>
+          <a:prstGeom prst="roundRect">
+            <a:avLst>
+              <a:gd name="adj" fmla="val 6274"/>
+            </a:avLst>
+          </a:prstGeom>
+          <a:solidFill>
+            <a:srgbClr val="FFF6F5"/>
+          </a:solidFill>
+          <a:ln w="12700">
+            <a:solidFill>
+              <a:srgbClr val="DC2626"/>
+            </a:solidFill>
+          </a:ln>
+          <a:effectLst/>
+        </p:spPr>
+        <p:style>
+          <a:lnRef idx="1">
+            <a:schemeClr val="accent1"/>
+          </a:lnRef>
+          <a:fillRef idx="3">
+            <a:schemeClr val="accent1"/>
+          </a:fillRef>
+          <a:effectRef idx="2">
+            <a:schemeClr val="accent1"/>
+          </a:effectRef>
+          <a:fontRef idx="minor">
+            <a:schemeClr val="lt1"/>
+          </a:fontRef>
+        </p:style>
+        <p:txBody>
+          <a:bodyPr rtlCol="0" anchor="ctr"/>
+          <a:lstStyle/>
+          <a:p/>
+        </p:txBody>
+      </p:sp>
+      <p:sp>
+        <p:nvSpPr>
+          <p:cNvPr id="8" name="TextBox 7"/>
+          <p:cNvSpPr txBox="1"/>
+          <p:nvPr/>
+        </p:nvSpPr>
+        <p:spPr>
+          <a:xfrm>
+            <a:off x="932688" y="2130552"/>
+            <a:ext cx="4696815" cy="274320"/>
+          </a:xfrm>
+          <a:prstGeom prst="rect">
+            <a:avLst/>
+          </a:prstGeom>
+          <a:noFill/>
+        </p:spPr>
+        <p:txBody>
+          <a:bodyPr wrap="square" lIns="0" rIns="0" tIns="0" bIns="0" anchor="t">
+            <a:spAutoFit/>
+          </a:bodyPr>
+          <a:lstStyle/>
+          <a:p>
+            <a:pPr algn="l">
+              <a:lnSpc>
+                <a:spcPct val="135000"/>
+              </a:lnSpc>
+            </a:pPr>
+            <a:r>
+              <a:rPr sz="1300" b="1" i="0" spc="156">
+                <a:solidFill>
+                  <a:srgbClr val="B91C1C"/>
+                </a:solidFill>
+                <a:latin typeface="Verdana"/>
+              </a:rPr>
+              <a:t>ON ENTEND SOUVENT</a:t>
+            </a:r>
+          </a:p>
+        </p:txBody>
+      </p:sp>
+      <p:sp>
+        <p:nvSpPr>
+          <p:cNvPr id="9" name="TextBox 8"/>
+          <p:cNvSpPr txBox="1"/>
+          <p:nvPr/>
+        </p:nvSpPr>
+        <p:spPr>
+          <a:xfrm>
+            <a:off x="932688" y="2569464"/>
+            <a:ext cx="4696815" cy="1417320"/>
+          </a:xfrm>
+          <a:prstGeom prst="rect">
+            <a:avLst/>
+          </a:prstGeom>
+          <a:noFill/>
+        </p:spPr>
+        <p:txBody>
+          <a:bodyPr wrap="square" lIns="0" rIns="0" tIns="0" bIns="0" anchor="t">
+            <a:spAutoFit/>
+          </a:bodyPr>
+          <a:lstStyle/>
+          <a:p>
+            <a:pPr algn="l">
+              <a:lnSpc>
+                <a:spcPct val="130000"/>
+              </a:lnSpc>
+            </a:pPr>
+            <a:r>
+              <a:rPr sz="2500" b="1" i="0">
+                <a:solidFill>
+                  <a:srgbClr val="17181A"/>
+                </a:solidFill>
+                <a:latin typeface="Verdana"/>
+              </a:rPr>
+              <a:t>jratuit, avec le son « j »</a:t>
+            </a:r>
+          </a:p>
+        </p:txBody>
+      </p:sp>
+      <p:sp>
+        <p:nvSpPr>
+          <p:cNvPr id="10" name="Rounded Rectangle 9"/>
+          <p:cNvSpPr/>
+          <p:nvPr/>
+        </p:nvSpPr>
+        <p:spPr>
+          <a:xfrm>
+            <a:off x="6196431" y="1856232"/>
+            <a:ext cx="5428335" cy="2331720"/>
+          </a:xfrm>
+          <a:prstGeom prst="roundRect">
+            <a:avLst>
+              <a:gd name="adj" fmla="val 6274"/>
+            </a:avLst>
+          </a:prstGeom>
+          <a:solidFill>
+            <a:srgbClr val="E6F5EE"/>
+          </a:solidFill>
+          <a:ln w="12700">
+            <a:solidFill>
+              <a:srgbClr val="0A8F5B"/>
+            </a:solidFill>
+          </a:ln>
+          <a:effectLst/>
+        </p:spPr>
+        <p:style>
+          <a:lnRef idx="1">
+            <a:schemeClr val="accent1"/>
+          </a:lnRef>
+          <a:fillRef idx="3">
+            <a:schemeClr val="accent1"/>
+          </a:fillRef>
+          <a:effectRef idx="2">
+            <a:schemeClr val="accent1"/>
+          </a:effectRef>
+          <a:fontRef idx="minor">
+            <a:schemeClr val="lt1"/>
+          </a:fontRef>
+        </p:style>
+        <p:txBody>
+          <a:bodyPr rtlCol="0" anchor="ctr"/>
+          <a:lstStyle/>
+          <a:p/>
+        </p:txBody>
+      </p:sp>
+      <p:sp>
+        <p:nvSpPr>
+          <p:cNvPr id="11" name="TextBox 10"/>
+          <p:cNvSpPr txBox="1"/>
+          <p:nvPr/>
+        </p:nvSpPr>
+        <p:spPr>
+          <a:xfrm>
+            <a:off x="6562191" y="2130552"/>
+            <a:ext cx="4696815" cy="274320"/>
+          </a:xfrm>
+          <a:prstGeom prst="rect">
+            <a:avLst/>
+          </a:prstGeom>
+          <a:noFill/>
+        </p:spPr>
+        <p:txBody>
+          <a:bodyPr wrap="square" lIns="0" rIns="0" tIns="0" bIns="0" anchor="t">
+            <a:spAutoFit/>
+          </a:bodyPr>
+          <a:lstStyle/>
+          <a:p>
+            <a:pPr algn="l">
+              <a:lnSpc>
+                <a:spcPct val="135000"/>
+              </a:lnSpc>
+            </a:pPr>
+            <a:r>
+              <a:rPr sz="1300" b="1" i="0" spc="156">
+                <a:solidFill>
+                  <a:srgbClr val="07734A"/>
+                </a:solidFill>
+                <a:latin typeface="Verdana"/>
+              </a:rPr>
+              <a:t>IL FAUT DIRE PLUTÔT</a:t>
+            </a:r>
+          </a:p>
+        </p:txBody>
+      </p:sp>
+      <p:sp>
+        <p:nvSpPr>
+          <p:cNvPr id="12" name="TextBox 11"/>
+          <p:cNvSpPr txBox="1"/>
+          <p:nvPr/>
+        </p:nvSpPr>
+        <p:spPr>
+          <a:xfrm>
+            <a:off x="6562191" y="2569464"/>
+            <a:ext cx="4696815" cy="1417320"/>
+          </a:xfrm>
+          <a:prstGeom prst="rect">
+            <a:avLst/>
+          </a:prstGeom>
+          <a:noFill/>
+        </p:spPr>
+        <p:txBody>
+          <a:bodyPr wrap="square" lIns="0" rIns="0" tIns="0" bIns="0" anchor="t">
+            <a:spAutoFit/>
+          </a:bodyPr>
+          <a:lstStyle/>
+          <a:p>
+            <a:pPr algn="l">
+              <a:lnSpc>
+                <a:spcPct val="130000"/>
+              </a:lnSpc>
+            </a:pPr>
+            <a:r>
+              <a:rPr sz="2500" b="1" i="0">
+                <a:solidFill>
+                  <a:srgbClr val="17181A"/>
+                </a:solidFill>
+                <a:latin typeface="Verdana"/>
+              </a:rPr>
+              <a:t>gratuit — le son « g », parce que le g précède un r</a:t>
+            </a:r>
+          </a:p>
+        </p:txBody>
+      </p:sp>
+      <p:sp>
+        <p:nvSpPr>
+          <p:cNvPr id="13" name="Rounded Rectangle 12"/>
+          <p:cNvSpPr/>
+          <p:nvPr/>
+        </p:nvSpPr>
+        <p:spPr>
+          <a:xfrm>
+            <a:off x="566928" y="4462272"/>
+            <a:ext cx="11057839" cy="1618487"/>
+          </a:xfrm>
+          <a:prstGeom prst="roundRect">
+            <a:avLst>
+              <a:gd name="adj" fmla="val 9039"/>
+            </a:avLst>
+          </a:prstGeom>
+          <a:solidFill>
+            <a:srgbClr val="FFFFFF"/>
+          </a:solidFill>
+          <a:ln w="12700">
+            <a:solidFill>
+              <a:srgbClr val="EAEAE8"/>
+            </a:solidFill>
+          </a:ln>
+          <a:effectLst/>
+        </p:spPr>
+        <p:style>
+          <a:lnRef idx="1">
+            <a:schemeClr val="accent1"/>
+          </a:lnRef>
+          <a:fillRef idx="3">
+            <a:schemeClr val="accent1"/>
+          </a:fillRef>
+          <a:effectRef idx="2">
+            <a:schemeClr val="accent1"/>
+          </a:effectRef>
+          <a:fontRef idx="minor">
+            <a:schemeClr val="lt1"/>
+          </a:fontRef>
+        </p:style>
+        <p:txBody>
+          <a:bodyPr rtlCol="0" anchor="ctr"/>
+          <a:lstStyle/>
+          <a:p/>
+        </p:txBody>
+      </p:sp>
+      <p:sp>
+        <p:nvSpPr>
+          <p:cNvPr id="14" name="TextBox 13"/>
+          <p:cNvSpPr txBox="1"/>
+          <p:nvPr/>
+        </p:nvSpPr>
+        <p:spPr>
+          <a:xfrm>
+            <a:off x="969264" y="4736592"/>
+            <a:ext cx="10234879" cy="1150620"/>
+          </a:xfrm>
+          <a:prstGeom prst="rect">
+            <a:avLst/>
+          </a:prstGeom>
+          <a:noFill/>
+        </p:spPr>
+        <p:txBody>
+          <a:bodyPr wrap="square" lIns="0" rIns="0" tIns="0" bIns="0" anchor="t">
+            <a:spAutoFit/>
+          </a:bodyPr>
+          <a:lstStyle/>
+          <a:p>
+            <a:pPr algn="l">
+              <a:lnSpc>
+                <a:spcPct val="145000"/>
+              </a:lnSpc>
+            </a:pPr>
+            <a:r>
+              <a:rPr sz="2000" b="0" i="0">
+                <a:solidFill>
+                  <a:srgbClr val="4B4F52"/>
+                </a:solidFill>
+                <a:latin typeface="Verdana"/>
+              </a:rPr>
+              <a:t>Le g ne se ramollit qu'avant e, i ou y : gens, agence, budget. Partout ailleurs il reste dur : gratuit, garde, légume. Dans une publicité, « gratuit » est le mot qu'on répète le plus : il vaut la peine d'être juste.</a:t>
             </a:r>
           </a:p>
         </p:txBody>
@@ -11907,7 +13577,5453 @@
                 </a:solidFill>
                 <a:latin typeface="Verdana"/>
               </a:rPr>
-              <a:t>employer l'intonation d'une phrase exclamative.</a:t>
+              <a:t>employer l'intonation d'une phrase exclamative ;</a:t>
+            </a:r>
+          </a:p>
+        </p:txBody>
+      </p:sp>
+      <p:sp>
+        <p:nvSpPr>
+          <p:cNvPr id="23" name="Rounded Rectangle 22"/>
+          <p:cNvSpPr/>
+          <p:nvPr/>
+        </p:nvSpPr>
+        <p:spPr>
+          <a:xfrm>
+            <a:off x="566928" y="5308600"/>
+            <a:ext cx="11057839" cy="757936"/>
+          </a:xfrm>
+          <a:prstGeom prst="roundRect">
+            <a:avLst>
+              <a:gd name="adj" fmla="val 19302"/>
+            </a:avLst>
+          </a:prstGeom>
+          <a:solidFill>
+            <a:srgbClr val="FFFFFF"/>
+          </a:solidFill>
+          <a:ln w="12700">
+            <a:solidFill>
+              <a:srgbClr val="EAEAE8"/>
+            </a:solidFill>
+          </a:ln>
+          <a:effectLst/>
+        </p:spPr>
+        <p:style>
+          <a:lnRef idx="1">
+            <a:schemeClr val="accent1"/>
+          </a:lnRef>
+          <a:fillRef idx="3">
+            <a:schemeClr val="accent1"/>
+          </a:fillRef>
+          <a:effectRef idx="2">
+            <a:schemeClr val="accent1"/>
+          </a:effectRef>
+          <a:fontRef idx="minor">
+            <a:schemeClr val="lt1"/>
+          </a:fontRef>
+        </p:style>
+        <p:txBody>
+          <a:bodyPr rtlCol="0" anchor="ctr"/>
+          <a:lstStyle/>
+          <a:p/>
+        </p:txBody>
+      </p:sp>
+      <p:sp>
+        <p:nvSpPr>
+          <p:cNvPr id="24" name="Rounded Rectangle 23"/>
+          <p:cNvSpPr/>
+          <p:nvPr/>
+        </p:nvSpPr>
+        <p:spPr>
+          <a:xfrm>
+            <a:off x="804672" y="5486400"/>
+            <a:ext cx="402336" cy="402336"/>
+          </a:xfrm>
+          <a:prstGeom prst="roundRect">
+            <a:avLst>
+              <a:gd name="adj" fmla="val 31818"/>
+            </a:avLst>
+          </a:prstGeom>
+          <a:solidFill>
+            <a:srgbClr val="EFEAFA"/>
+          </a:solidFill>
+          <a:ln>
+            <a:noFill/>
+          </a:ln>
+          <a:effectLst/>
+        </p:spPr>
+        <p:style>
+          <a:lnRef idx="1">
+            <a:schemeClr val="accent1"/>
+          </a:lnRef>
+          <a:fillRef idx="3">
+            <a:schemeClr val="accent1"/>
+          </a:fillRef>
+          <a:effectRef idx="2">
+            <a:schemeClr val="accent1"/>
+          </a:effectRef>
+          <a:fontRef idx="minor">
+            <a:schemeClr val="lt1"/>
+          </a:fontRef>
+        </p:style>
+        <p:txBody>
+          <a:bodyPr rtlCol="0" anchor="ctr"/>
+          <a:lstStyle/>
+          <a:p/>
+        </p:txBody>
+      </p:sp>
+      <p:sp>
+        <p:nvSpPr>
+          <p:cNvPr id="25" name="TextBox 24"/>
+          <p:cNvSpPr txBox="1"/>
+          <p:nvPr/>
+        </p:nvSpPr>
+        <p:spPr>
+          <a:xfrm>
+            <a:off x="804672" y="5568696"/>
+            <a:ext cx="402336" cy="274320"/>
+          </a:xfrm>
+          <a:prstGeom prst="rect">
+            <a:avLst/>
+          </a:prstGeom>
+          <a:noFill/>
+        </p:spPr>
+        <p:txBody>
+          <a:bodyPr wrap="square" lIns="0" rIns="0" tIns="0" bIns="0" anchor="t">
+            <a:spAutoFit/>
+          </a:bodyPr>
+          <a:lstStyle/>
+          <a:p>
+            <a:pPr algn="ctr">
+              <a:lnSpc>
+                <a:spcPct val="135000"/>
+              </a:lnSpc>
+            </a:pPr>
+            <a:r>
+              <a:rPr sz="1500" b="1" i="0">
+                <a:solidFill>
+                  <a:srgbClr val="6B4FBB"/>
+                </a:solidFill>
+                <a:latin typeface="Verdana"/>
+              </a:rPr>
+              <a:t>5</a:t>
+            </a:r>
+          </a:p>
+        </p:txBody>
+      </p:sp>
+      <p:sp>
+        <p:nvSpPr>
+          <p:cNvPr id="26" name="TextBox 25"/>
+          <p:cNvSpPr txBox="1"/>
+          <p:nvPr/>
+        </p:nvSpPr>
+        <p:spPr>
+          <a:xfrm>
+            <a:off x="1408176" y="5509768"/>
+            <a:ext cx="9549079" cy="392176"/>
+          </a:xfrm>
+          <a:prstGeom prst="rect">
+            <a:avLst/>
+          </a:prstGeom>
+          <a:noFill/>
+        </p:spPr>
+        <p:txBody>
+          <a:bodyPr wrap="square" lIns="0" rIns="0" tIns="0" bIns="0" anchor="t">
+            <a:spAutoFit/>
+          </a:bodyPr>
+          <a:lstStyle/>
+          <a:p>
+            <a:pPr algn="l">
+              <a:lnSpc>
+                <a:spcPct val="140000"/>
+              </a:lnSpc>
+            </a:pPr>
+            <a:r>
+              <a:rPr sz="2000" b="0" i="0">
+                <a:solidFill>
+                  <a:srgbClr val="3A3D40"/>
+                </a:solidFill>
+                <a:latin typeface="Verdana"/>
+              </a:rPr>
+              <a:t>distinguer le son « ch » du son « j » dans le vocabulaire de la publicité.</a:t>
+            </a:r>
+          </a:p>
+        </p:txBody>
+      </p:sp>
+    </p:spTree>
+  </p:cSld>
+  <p:clrMapOvr>
+    <a:masterClrMapping/>
+  </p:clrMapOvr>
+</p:sld>
+</file>
+
+<file path=ppt/slides/slide20.xml><?xml version="1.0" encoding="utf-8"?>
+<p:sld xmlns:a="http://schemas.openxmlformats.org/drawingml/2006/main" xmlns:p="http://schemas.openxmlformats.org/presentationml/2006/main" xmlns:r="http://schemas.openxmlformats.org/officeDocument/2006/relationships">
+  <p:cSld>
+    <p:spTree>
+      <p:nvGrpSpPr>
+        <p:cNvPr id="1" name=""/>
+        <p:cNvGrpSpPr/>
+        <p:nvPr/>
+      </p:nvGrpSpPr>
+      <p:grpSpPr/>
+      <p:sp>
+        <p:nvSpPr>
+          <p:cNvPr id="2" name="Rectangle 1"/>
+          <p:cNvSpPr/>
+          <p:nvPr/>
+        </p:nvSpPr>
+        <p:spPr>
+          <a:xfrm>
+            <a:off x="0" y="0"/>
+            <a:ext cx="12191695" cy="6858000"/>
+          </a:xfrm>
+          <a:prstGeom prst="rect">
+            <a:avLst/>
+          </a:prstGeom>
+          <a:solidFill>
+            <a:srgbClr val="F7F7F5"/>
+          </a:solidFill>
+          <a:ln>
+            <a:noFill/>
+          </a:ln>
+          <a:effectLst/>
+        </p:spPr>
+        <p:style>
+          <a:lnRef idx="1">
+            <a:schemeClr val="accent1"/>
+          </a:lnRef>
+          <a:fillRef idx="3">
+            <a:schemeClr val="accent1"/>
+          </a:fillRef>
+          <a:effectRef idx="2">
+            <a:schemeClr val="accent1"/>
+          </a:effectRef>
+          <a:fontRef idx="minor">
+            <a:schemeClr val="lt1"/>
+          </a:fontRef>
+        </p:style>
+        <p:txBody>
+          <a:bodyPr rtlCol="0" anchor="ctr"/>
+          <a:lstStyle/>
+          <a:p/>
+        </p:txBody>
+      </p:sp>
+      <p:sp>
+        <p:nvSpPr>
+          <p:cNvPr id="3" name="TextBox 2"/>
+          <p:cNvSpPr txBox="1"/>
+          <p:nvPr/>
+        </p:nvSpPr>
+        <p:spPr>
+          <a:xfrm>
+            <a:off x="566928" y="6355080"/>
+            <a:ext cx="6400800" cy="219456"/>
+          </a:xfrm>
+          <a:prstGeom prst="rect">
+            <a:avLst/>
+          </a:prstGeom>
+          <a:noFill/>
+        </p:spPr>
+        <p:txBody>
+          <a:bodyPr wrap="square" lIns="0" rIns="0" tIns="0" bIns="0" anchor="t">
+            <a:spAutoFit/>
+          </a:bodyPr>
+          <a:lstStyle/>
+          <a:p>
+            <a:pPr algn="l">
+              <a:lnSpc>
+                <a:spcPct val="135000"/>
+              </a:lnSpc>
+            </a:pPr>
+            <a:r>
+              <a:rPr sz="1200" b="0" i="0">
+                <a:solidFill>
+                  <a:srgbClr val="6E7175"/>
+                </a:solidFill>
+                <a:latin typeface="Verdana"/>
+              </a:rPr>
+              <a:t>A2 · Des publicités efficaces</a:t>
+            </a:r>
+          </a:p>
+        </p:txBody>
+      </p:sp>
+      <p:sp>
+        <p:nvSpPr>
+          <p:cNvPr id="4" name="TextBox 3"/>
+          <p:cNvSpPr txBox="1"/>
+          <p:nvPr/>
+        </p:nvSpPr>
+        <p:spPr>
+          <a:xfrm>
+            <a:off x="10710367" y="6355080"/>
+            <a:ext cx="914400" cy="219456"/>
+          </a:xfrm>
+          <a:prstGeom prst="rect">
+            <a:avLst/>
+          </a:prstGeom>
+          <a:noFill/>
+        </p:spPr>
+        <p:txBody>
+          <a:bodyPr wrap="square" lIns="0" rIns="0" tIns="0" bIns="0" anchor="t">
+            <a:spAutoFit/>
+          </a:bodyPr>
+          <a:lstStyle/>
+          <a:p>
+            <a:pPr algn="r">
+              <a:lnSpc>
+                <a:spcPct val="135000"/>
+              </a:lnSpc>
+            </a:pPr>
+            <a:r>
+              <a:rPr sz="1200" b="0" i="0">
+                <a:solidFill>
+                  <a:srgbClr val="6E7175"/>
+                </a:solidFill>
+                <a:latin typeface="Verdana"/>
+              </a:rPr>
+              <a:t>20</a:t>
+            </a:r>
+          </a:p>
+        </p:txBody>
+      </p:sp>
+      <p:sp>
+        <p:nvSpPr>
+          <p:cNvPr id="5" name="TextBox 4"/>
+          <p:cNvSpPr txBox="1"/>
+          <p:nvPr/>
+        </p:nvSpPr>
+        <p:spPr>
+          <a:xfrm>
+            <a:off x="566928" y="420624"/>
+            <a:ext cx="11057839" cy="237744"/>
+          </a:xfrm>
+          <a:prstGeom prst="rect">
+            <a:avLst/>
+          </a:prstGeom>
+          <a:noFill/>
+        </p:spPr>
+        <p:txBody>
+          <a:bodyPr wrap="square" lIns="0" rIns="0" tIns="0" bIns="0" anchor="t">
+            <a:spAutoFit/>
+          </a:bodyPr>
+          <a:lstStyle/>
+          <a:p>
+            <a:pPr algn="l">
+              <a:lnSpc>
+                <a:spcPct val="135000"/>
+              </a:lnSpc>
+            </a:pPr>
+            <a:r>
+              <a:rPr sz="1300" b="1" i="0" spc="156">
+                <a:solidFill>
+                  <a:srgbClr val="6B4FBB"/>
+                </a:solidFill>
+                <a:latin typeface="Verdana"/>
+              </a:rPr>
+              <a:t>PRATIQUE · 5 DE 6</a:t>
+            </a:r>
+          </a:p>
+        </p:txBody>
+      </p:sp>
+      <p:sp>
+        <p:nvSpPr>
+          <p:cNvPr id="6" name="TextBox 5"/>
+          <p:cNvSpPr txBox="1"/>
+          <p:nvPr/>
+        </p:nvSpPr>
+        <p:spPr>
+          <a:xfrm>
+            <a:off x="566928" y="749808"/>
+            <a:ext cx="11057839" cy="877824"/>
+          </a:xfrm>
+          <a:prstGeom prst="rect">
+            <a:avLst/>
+          </a:prstGeom>
+          <a:noFill/>
+        </p:spPr>
+        <p:txBody>
+          <a:bodyPr wrap="square" lIns="0" rIns="0" tIns="0" bIns="0" anchor="t">
+            <a:spAutoFit/>
+          </a:bodyPr>
+          <a:lstStyle/>
+          <a:p>
+            <a:pPr algn="l">
+              <a:lnSpc>
+                <a:spcPct val="115000"/>
+              </a:lnSpc>
+            </a:pPr>
+            <a:r>
+              <a:rPr sz="3400" b="1" i="0">
+                <a:solidFill>
+                  <a:srgbClr val="17181A"/>
+                </a:solidFill>
+                <a:latin typeface="Verdana"/>
+              </a:rPr>
+              <a:t>Quel son entendez-vous ?</a:t>
+            </a:r>
+          </a:p>
+        </p:txBody>
+      </p:sp>
+      <p:sp>
+        <p:nvSpPr>
+          <p:cNvPr id="7" name="TextBox 6"/>
+          <p:cNvSpPr txBox="1"/>
+          <p:nvPr/>
+        </p:nvSpPr>
+        <p:spPr>
+          <a:xfrm>
+            <a:off x="566928" y="1645920"/>
+            <a:ext cx="11057839" cy="329184"/>
+          </a:xfrm>
+          <a:prstGeom prst="rect">
+            <a:avLst/>
+          </a:prstGeom>
+          <a:noFill/>
+        </p:spPr>
+        <p:txBody>
+          <a:bodyPr wrap="square" lIns="0" rIns="0" tIns="0" bIns="0" anchor="t">
+            <a:spAutoFit/>
+          </a:bodyPr>
+          <a:lstStyle/>
+          <a:p>
+            <a:pPr algn="l">
+              <a:lnSpc>
+                <a:spcPct val="135000"/>
+              </a:lnSpc>
+            </a:pPr>
+            <a:r>
+              <a:rPr sz="1800" b="0" i="0">
+                <a:solidFill>
+                  <a:srgbClr val="6E7175"/>
+                </a:solidFill>
+                <a:latin typeface="Verdana"/>
+              </a:rPr>
+              <a:t>Écoutez le mot, écrivez « ch » ou « j ».</a:t>
+            </a:r>
+          </a:p>
+        </p:txBody>
+      </p:sp>
+      <p:sp>
+        <p:nvSpPr>
+          <p:cNvPr id="8" name="Rounded Rectangle 7"/>
+          <p:cNvSpPr/>
+          <p:nvPr/>
+        </p:nvSpPr>
+        <p:spPr>
+          <a:xfrm>
+            <a:off x="566928" y="2139696"/>
+            <a:ext cx="5464911" cy="648716"/>
+          </a:xfrm>
+          <a:prstGeom prst="roundRect">
+            <a:avLst>
+              <a:gd name="adj" fmla="val 22552"/>
+            </a:avLst>
+          </a:prstGeom>
+          <a:solidFill>
+            <a:srgbClr val="FFFFFF"/>
+          </a:solidFill>
+          <a:ln w="12700">
+            <a:solidFill>
+              <a:srgbClr val="EAEAE8"/>
+            </a:solidFill>
+          </a:ln>
+          <a:effectLst/>
+        </p:spPr>
+        <p:style>
+          <a:lnRef idx="1">
+            <a:schemeClr val="accent1"/>
+          </a:lnRef>
+          <a:fillRef idx="3">
+            <a:schemeClr val="accent1"/>
+          </a:fillRef>
+          <a:effectRef idx="2">
+            <a:schemeClr val="accent1"/>
+          </a:effectRef>
+          <a:fontRef idx="minor">
+            <a:schemeClr val="lt1"/>
+          </a:fontRef>
+        </p:style>
+        <p:txBody>
+          <a:bodyPr rtlCol="0" anchor="ctr"/>
+          <a:lstStyle/>
+          <a:p/>
+        </p:txBody>
+      </p:sp>
+      <p:sp>
+        <p:nvSpPr>
+          <p:cNvPr id="9" name="Rounded Rectangle 8"/>
+          <p:cNvSpPr/>
+          <p:nvPr/>
+        </p:nvSpPr>
+        <p:spPr>
+          <a:xfrm>
+            <a:off x="841247" y="2281174"/>
+            <a:ext cx="365760" cy="365760"/>
+          </a:xfrm>
+          <a:prstGeom prst="roundRect">
+            <a:avLst>
+              <a:gd name="adj" fmla="val 32500"/>
+            </a:avLst>
+          </a:prstGeom>
+          <a:solidFill>
+            <a:srgbClr val="EFEAFA"/>
+          </a:solidFill>
+          <a:ln>
+            <a:noFill/>
+          </a:ln>
+          <a:effectLst/>
+        </p:spPr>
+        <p:style>
+          <a:lnRef idx="1">
+            <a:schemeClr val="accent1"/>
+          </a:lnRef>
+          <a:fillRef idx="3">
+            <a:schemeClr val="accent1"/>
+          </a:fillRef>
+          <a:effectRef idx="2">
+            <a:schemeClr val="accent1"/>
+          </a:effectRef>
+          <a:fontRef idx="minor">
+            <a:schemeClr val="lt1"/>
+          </a:fontRef>
+        </p:style>
+        <p:txBody>
+          <a:bodyPr rtlCol="0" anchor="ctr"/>
+          <a:lstStyle/>
+          <a:p/>
+        </p:txBody>
+      </p:sp>
+      <p:sp>
+        <p:nvSpPr>
+          <p:cNvPr id="10" name="TextBox 9"/>
+          <p:cNvSpPr txBox="1"/>
+          <p:nvPr/>
+        </p:nvSpPr>
+        <p:spPr>
+          <a:xfrm>
+            <a:off x="841247" y="2345182"/>
+            <a:ext cx="365760" cy="256032"/>
+          </a:xfrm>
+          <a:prstGeom prst="rect">
+            <a:avLst/>
+          </a:prstGeom>
+          <a:noFill/>
+        </p:spPr>
+        <p:txBody>
+          <a:bodyPr wrap="square" lIns="0" rIns="0" tIns="0" bIns="0" anchor="t">
+            <a:spAutoFit/>
+          </a:bodyPr>
+          <a:lstStyle/>
+          <a:p>
+            <a:pPr algn="ctr">
+              <a:lnSpc>
+                <a:spcPct val="135000"/>
+              </a:lnSpc>
+            </a:pPr>
+            <a:r>
+              <a:rPr sz="1500" b="1" i="0">
+                <a:solidFill>
+                  <a:srgbClr val="6B4FBB"/>
+                </a:solidFill>
+                <a:latin typeface="Verdana"/>
+              </a:rPr>
+              <a:t>1</a:t>
+            </a:r>
+          </a:p>
+        </p:txBody>
+      </p:sp>
+      <p:sp>
+        <p:nvSpPr>
+          <p:cNvPr id="11" name="TextBox 10"/>
+          <p:cNvSpPr txBox="1"/>
+          <p:nvPr/>
+        </p:nvSpPr>
+        <p:spPr>
+          <a:xfrm>
+            <a:off x="1344168" y="2295144"/>
+            <a:ext cx="4504791" cy="374396"/>
+          </a:xfrm>
+          <a:prstGeom prst="rect">
+            <a:avLst/>
+          </a:prstGeom>
+          <a:noFill/>
+        </p:spPr>
+        <p:txBody>
+          <a:bodyPr wrap="square" lIns="0" rIns="0" tIns="0" bIns="0" anchor="t">
+            <a:spAutoFit/>
+          </a:bodyPr>
+          <a:lstStyle/>
+          <a:p>
+            <a:pPr algn="l">
+              <a:lnSpc>
+                <a:spcPct val="140000"/>
+              </a:lnSpc>
+            </a:pPr>
+            <a:r>
+              <a:rPr sz="1900" b="0" i="0">
+                <a:solidFill>
+                  <a:srgbClr val="3A3D40"/>
+                </a:solidFill>
+                <a:latin typeface="Verdana"/>
+              </a:rPr>
+              <a:t>affiche</a:t>
+            </a:r>
+          </a:p>
+        </p:txBody>
+      </p:sp>
+      <p:sp>
+        <p:nvSpPr>
+          <p:cNvPr id="12" name="Rounded Rectangle 11"/>
+          <p:cNvSpPr/>
+          <p:nvPr/>
+        </p:nvSpPr>
+        <p:spPr>
+          <a:xfrm>
+            <a:off x="6159855" y="2139696"/>
+            <a:ext cx="5464911" cy="648716"/>
+          </a:xfrm>
+          <a:prstGeom prst="roundRect">
+            <a:avLst>
+              <a:gd name="adj" fmla="val 22552"/>
+            </a:avLst>
+          </a:prstGeom>
+          <a:solidFill>
+            <a:srgbClr val="FFFFFF"/>
+          </a:solidFill>
+          <a:ln w="12700">
+            <a:solidFill>
+              <a:srgbClr val="EAEAE8"/>
+            </a:solidFill>
+          </a:ln>
+          <a:effectLst/>
+        </p:spPr>
+        <p:style>
+          <a:lnRef idx="1">
+            <a:schemeClr val="accent1"/>
+          </a:lnRef>
+          <a:fillRef idx="3">
+            <a:schemeClr val="accent1"/>
+          </a:fillRef>
+          <a:effectRef idx="2">
+            <a:schemeClr val="accent1"/>
+          </a:effectRef>
+          <a:fontRef idx="minor">
+            <a:schemeClr val="lt1"/>
+          </a:fontRef>
+        </p:style>
+        <p:txBody>
+          <a:bodyPr rtlCol="0" anchor="ctr"/>
+          <a:lstStyle/>
+          <a:p/>
+        </p:txBody>
+      </p:sp>
+      <p:sp>
+        <p:nvSpPr>
+          <p:cNvPr id="13" name="Rounded Rectangle 12"/>
+          <p:cNvSpPr/>
+          <p:nvPr/>
+        </p:nvSpPr>
+        <p:spPr>
+          <a:xfrm>
+            <a:off x="6434175" y="2281174"/>
+            <a:ext cx="365760" cy="365760"/>
+          </a:xfrm>
+          <a:prstGeom prst="roundRect">
+            <a:avLst>
+              <a:gd name="adj" fmla="val 32500"/>
+            </a:avLst>
+          </a:prstGeom>
+          <a:solidFill>
+            <a:srgbClr val="EFEAFA"/>
+          </a:solidFill>
+          <a:ln>
+            <a:noFill/>
+          </a:ln>
+          <a:effectLst/>
+        </p:spPr>
+        <p:style>
+          <a:lnRef idx="1">
+            <a:schemeClr val="accent1"/>
+          </a:lnRef>
+          <a:fillRef idx="3">
+            <a:schemeClr val="accent1"/>
+          </a:fillRef>
+          <a:effectRef idx="2">
+            <a:schemeClr val="accent1"/>
+          </a:effectRef>
+          <a:fontRef idx="minor">
+            <a:schemeClr val="lt1"/>
+          </a:fontRef>
+        </p:style>
+        <p:txBody>
+          <a:bodyPr rtlCol="0" anchor="ctr"/>
+          <a:lstStyle/>
+          <a:p/>
+        </p:txBody>
+      </p:sp>
+      <p:sp>
+        <p:nvSpPr>
+          <p:cNvPr id="14" name="TextBox 13"/>
+          <p:cNvSpPr txBox="1"/>
+          <p:nvPr/>
+        </p:nvSpPr>
+        <p:spPr>
+          <a:xfrm>
+            <a:off x="6434175" y="2345182"/>
+            <a:ext cx="365760" cy="256032"/>
+          </a:xfrm>
+          <a:prstGeom prst="rect">
+            <a:avLst/>
+          </a:prstGeom>
+          <a:noFill/>
+        </p:spPr>
+        <p:txBody>
+          <a:bodyPr wrap="square" lIns="0" rIns="0" tIns="0" bIns="0" anchor="t">
+            <a:spAutoFit/>
+          </a:bodyPr>
+          <a:lstStyle/>
+          <a:p>
+            <a:pPr algn="ctr">
+              <a:lnSpc>
+                <a:spcPct val="135000"/>
+              </a:lnSpc>
+            </a:pPr>
+            <a:r>
+              <a:rPr sz="1500" b="1" i="0">
+                <a:solidFill>
+                  <a:srgbClr val="6B4FBB"/>
+                </a:solidFill>
+                <a:latin typeface="Verdana"/>
+              </a:rPr>
+              <a:t>2</a:t>
+            </a:r>
+          </a:p>
+        </p:txBody>
+      </p:sp>
+      <p:sp>
+        <p:nvSpPr>
+          <p:cNvPr id="15" name="TextBox 14"/>
+          <p:cNvSpPr txBox="1"/>
+          <p:nvPr/>
+        </p:nvSpPr>
+        <p:spPr>
+          <a:xfrm>
+            <a:off x="6937095" y="2295144"/>
+            <a:ext cx="4504791" cy="374396"/>
+          </a:xfrm>
+          <a:prstGeom prst="rect">
+            <a:avLst/>
+          </a:prstGeom>
+          <a:noFill/>
+        </p:spPr>
+        <p:txBody>
+          <a:bodyPr wrap="square" lIns="0" rIns="0" tIns="0" bIns="0" anchor="t">
+            <a:spAutoFit/>
+          </a:bodyPr>
+          <a:lstStyle/>
+          <a:p>
+            <a:pPr algn="l">
+              <a:lnSpc>
+                <a:spcPct val="140000"/>
+              </a:lnSpc>
+            </a:pPr>
+            <a:r>
+              <a:rPr sz="1900" b="0" i="0">
+                <a:solidFill>
+                  <a:srgbClr val="3A3D40"/>
+                </a:solidFill>
+                <a:latin typeface="Verdana"/>
+              </a:rPr>
+              <a:t>message</a:t>
+            </a:r>
+          </a:p>
+        </p:txBody>
+      </p:sp>
+      <p:sp>
+        <p:nvSpPr>
+          <p:cNvPr id="16" name="Rounded Rectangle 15"/>
+          <p:cNvSpPr/>
+          <p:nvPr/>
+        </p:nvSpPr>
+        <p:spPr>
+          <a:xfrm>
+            <a:off x="566928" y="2916428"/>
+            <a:ext cx="5464911" cy="648716"/>
+          </a:xfrm>
+          <a:prstGeom prst="roundRect">
+            <a:avLst>
+              <a:gd name="adj" fmla="val 22552"/>
+            </a:avLst>
+          </a:prstGeom>
+          <a:solidFill>
+            <a:srgbClr val="FFFFFF"/>
+          </a:solidFill>
+          <a:ln w="12700">
+            <a:solidFill>
+              <a:srgbClr val="EAEAE8"/>
+            </a:solidFill>
+          </a:ln>
+          <a:effectLst/>
+        </p:spPr>
+        <p:style>
+          <a:lnRef idx="1">
+            <a:schemeClr val="accent1"/>
+          </a:lnRef>
+          <a:fillRef idx="3">
+            <a:schemeClr val="accent1"/>
+          </a:fillRef>
+          <a:effectRef idx="2">
+            <a:schemeClr val="accent1"/>
+          </a:effectRef>
+          <a:fontRef idx="minor">
+            <a:schemeClr val="lt1"/>
+          </a:fontRef>
+        </p:style>
+        <p:txBody>
+          <a:bodyPr rtlCol="0" anchor="ctr"/>
+          <a:lstStyle/>
+          <a:p/>
+        </p:txBody>
+      </p:sp>
+      <p:sp>
+        <p:nvSpPr>
+          <p:cNvPr id="17" name="Rounded Rectangle 16"/>
+          <p:cNvSpPr/>
+          <p:nvPr/>
+        </p:nvSpPr>
+        <p:spPr>
+          <a:xfrm>
+            <a:off x="841247" y="3057905"/>
+            <a:ext cx="365760" cy="365760"/>
+          </a:xfrm>
+          <a:prstGeom prst="roundRect">
+            <a:avLst>
+              <a:gd name="adj" fmla="val 32500"/>
+            </a:avLst>
+          </a:prstGeom>
+          <a:solidFill>
+            <a:srgbClr val="EFEAFA"/>
+          </a:solidFill>
+          <a:ln>
+            <a:noFill/>
+          </a:ln>
+          <a:effectLst/>
+        </p:spPr>
+        <p:style>
+          <a:lnRef idx="1">
+            <a:schemeClr val="accent1"/>
+          </a:lnRef>
+          <a:fillRef idx="3">
+            <a:schemeClr val="accent1"/>
+          </a:fillRef>
+          <a:effectRef idx="2">
+            <a:schemeClr val="accent1"/>
+          </a:effectRef>
+          <a:fontRef idx="minor">
+            <a:schemeClr val="lt1"/>
+          </a:fontRef>
+        </p:style>
+        <p:txBody>
+          <a:bodyPr rtlCol="0" anchor="ctr"/>
+          <a:lstStyle/>
+          <a:p/>
+        </p:txBody>
+      </p:sp>
+      <p:sp>
+        <p:nvSpPr>
+          <p:cNvPr id="18" name="TextBox 17"/>
+          <p:cNvSpPr txBox="1"/>
+          <p:nvPr/>
+        </p:nvSpPr>
+        <p:spPr>
+          <a:xfrm>
+            <a:off x="841247" y="3121913"/>
+            <a:ext cx="365760" cy="256032"/>
+          </a:xfrm>
+          <a:prstGeom prst="rect">
+            <a:avLst/>
+          </a:prstGeom>
+          <a:noFill/>
+        </p:spPr>
+        <p:txBody>
+          <a:bodyPr wrap="square" lIns="0" rIns="0" tIns="0" bIns="0" anchor="t">
+            <a:spAutoFit/>
+          </a:bodyPr>
+          <a:lstStyle/>
+          <a:p>
+            <a:pPr algn="ctr">
+              <a:lnSpc>
+                <a:spcPct val="135000"/>
+              </a:lnSpc>
+            </a:pPr>
+            <a:r>
+              <a:rPr sz="1500" b="1" i="0">
+                <a:solidFill>
+                  <a:srgbClr val="6B4FBB"/>
+                </a:solidFill>
+                <a:latin typeface="Verdana"/>
+              </a:rPr>
+              <a:t>3</a:t>
+            </a:r>
+          </a:p>
+        </p:txBody>
+      </p:sp>
+      <p:sp>
+        <p:nvSpPr>
+          <p:cNvPr id="19" name="TextBox 18"/>
+          <p:cNvSpPr txBox="1"/>
+          <p:nvPr/>
+        </p:nvSpPr>
+        <p:spPr>
+          <a:xfrm>
+            <a:off x="1344168" y="3071876"/>
+            <a:ext cx="4504791" cy="374396"/>
+          </a:xfrm>
+          <a:prstGeom prst="rect">
+            <a:avLst/>
+          </a:prstGeom>
+          <a:noFill/>
+        </p:spPr>
+        <p:txBody>
+          <a:bodyPr wrap="square" lIns="0" rIns="0" tIns="0" bIns="0" anchor="t">
+            <a:spAutoFit/>
+          </a:bodyPr>
+          <a:lstStyle/>
+          <a:p>
+            <a:pPr algn="l">
+              <a:lnSpc>
+                <a:spcPct val="140000"/>
+              </a:lnSpc>
+            </a:pPr>
+            <a:r>
+              <a:rPr sz="1900" b="0" i="0">
+                <a:solidFill>
+                  <a:srgbClr val="3A3D40"/>
+                </a:solidFill>
+                <a:latin typeface="Verdana"/>
+              </a:rPr>
+              <a:t>choisis</a:t>
+            </a:r>
+          </a:p>
+        </p:txBody>
+      </p:sp>
+      <p:sp>
+        <p:nvSpPr>
+          <p:cNvPr id="20" name="Rounded Rectangle 19"/>
+          <p:cNvSpPr/>
+          <p:nvPr/>
+        </p:nvSpPr>
+        <p:spPr>
+          <a:xfrm>
+            <a:off x="6159855" y="2916428"/>
+            <a:ext cx="5464911" cy="648716"/>
+          </a:xfrm>
+          <a:prstGeom prst="roundRect">
+            <a:avLst>
+              <a:gd name="adj" fmla="val 22552"/>
+            </a:avLst>
+          </a:prstGeom>
+          <a:solidFill>
+            <a:srgbClr val="FFFFFF"/>
+          </a:solidFill>
+          <a:ln w="12700">
+            <a:solidFill>
+              <a:srgbClr val="EAEAE8"/>
+            </a:solidFill>
+          </a:ln>
+          <a:effectLst/>
+        </p:spPr>
+        <p:style>
+          <a:lnRef idx="1">
+            <a:schemeClr val="accent1"/>
+          </a:lnRef>
+          <a:fillRef idx="3">
+            <a:schemeClr val="accent1"/>
+          </a:fillRef>
+          <a:effectRef idx="2">
+            <a:schemeClr val="accent1"/>
+          </a:effectRef>
+          <a:fontRef idx="minor">
+            <a:schemeClr val="lt1"/>
+          </a:fontRef>
+        </p:style>
+        <p:txBody>
+          <a:bodyPr rtlCol="0" anchor="ctr"/>
+          <a:lstStyle/>
+          <a:p/>
+        </p:txBody>
+      </p:sp>
+      <p:sp>
+        <p:nvSpPr>
+          <p:cNvPr id="21" name="Rounded Rectangle 20"/>
+          <p:cNvSpPr/>
+          <p:nvPr/>
+        </p:nvSpPr>
+        <p:spPr>
+          <a:xfrm>
+            <a:off x="6434175" y="3057905"/>
+            <a:ext cx="365760" cy="365760"/>
+          </a:xfrm>
+          <a:prstGeom prst="roundRect">
+            <a:avLst>
+              <a:gd name="adj" fmla="val 32500"/>
+            </a:avLst>
+          </a:prstGeom>
+          <a:solidFill>
+            <a:srgbClr val="EFEAFA"/>
+          </a:solidFill>
+          <a:ln>
+            <a:noFill/>
+          </a:ln>
+          <a:effectLst/>
+        </p:spPr>
+        <p:style>
+          <a:lnRef idx="1">
+            <a:schemeClr val="accent1"/>
+          </a:lnRef>
+          <a:fillRef idx="3">
+            <a:schemeClr val="accent1"/>
+          </a:fillRef>
+          <a:effectRef idx="2">
+            <a:schemeClr val="accent1"/>
+          </a:effectRef>
+          <a:fontRef idx="minor">
+            <a:schemeClr val="lt1"/>
+          </a:fontRef>
+        </p:style>
+        <p:txBody>
+          <a:bodyPr rtlCol="0" anchor="ctr"/>
+          <a:lstStyle/>
+          <a:p/>
+        </p:txBody>
+      </p:sp>
+      <p:sp>
+        <p:nvSpPr>
+          <p:cNvPr id="22" name="TextBox 21"/>
+          <p:cNvSpPr txBox="1"/>
+          <p:nvPr/>
+        </p:nvSpPr>
+        <p:spPr>
+          <a:xfrm>
+            <a:off x="6434175" y="3121913"/>
+            <a:ext cx="365760" cy="256032"/>
+          </a:xfrm>
+          <a:prstGeom prst="rect">
+            <a:avLst/>
+          </a:prstGeom>
+          <a:noFill/>
+        </p:spPr>
+        <p:txBody>
+          <a:bodyPr wrap="square" lIns="0" rIns="0" tIns="0" bIns="0" anchor="t">
+            <a:spAutoFit/>
+          </a:bodyPr>
+          <a:lstStyle/>
+          <a:p>
+            <a:pPr algn="ctr">
+              <a:lnSpc>
+                <a:spcPct val="135000"/>
+              </a:lnSpc>
+            </a:pPr>
+            <a:r>
+              <a:rPr sz="1500" b="1" i="0">
+                <a:solidFill>
+                  <a:srgbClr val="6B4FBB"/>
+                </a:solidFill>
+                <a:latin typeface="Verdana"/>
+              </a:rPr>
+              <a:t>4</a:t>
+            </a:r>
+          </a:p>
+        </p:txBody>
+      </p:sp>
+      <p:sp>
+        <p:nvSpPr>
+          <p:cNvPr id="23" name="TextBox 22"/>
+          <p:cNvSpPr txBox="1"/>
+          <p:nvPr/>
+        </p:nvSpPr>
+        <p:spPr>
+          <a:xfrm>
+            <a:off x="6937095" y="3071876"/>
+            <a:ext cx="4504791" cy="374396"/>
+          </a:xfrm>
+          <a:prstGeom prst="rect">
+            <a:avLst/>
+          </a:prstGeom>
+          <a:noFill/>
+        </p:spPr>
+        <p:txBody>
+          <a:bodyPr wrap="square" lIns="0" rIns="0" tIns="0" bIns="0" anchor="t">
+            <a:spAutoFit/>
+          </a:bodyPr>
+          <a:lstStyle/>
+          <a:p>
+            <a:pPr algn="l">
+              <a:lnSpc>
+                <a:spcPct val="140000"/>
+              </a:lnSpc>
+            </a:pPr>
+            <a:r>
+              <a:rPr sz="1900" b="0" i="0">
+                <a:solidFill>
+                  <a:srgbClr val="3A3D40"/>
+                </a:solidFill>
+                <a:latin typeface="Verdana"/>
+              </a:rPr>
+              <a:t>gens</a:t>
+            </a:r>
+          </a:p>
+        </p:txBody>
+      </p:sp>
+      <p:sp>
+        <p:nvSpPr>
+          <p:cNvPr id="24" name="Rounded Rectangle 23"/>
+          <p:cNvSpPr/>
+          <p:nvPr/>
+        </p:nvSpPr>
+        <p:spPr>
+          <a:xfrm>
+            <a:off x="566928" y="3693160"/>
+            <a:ext cx="5464911" cy="648716"/>
+          </a:xfrm>
+          <a:prstGeom prst="roundRect">
+            <a:avLst>
+              <a:gd name="adj" fmla="val 22552"/>
+            </a:avLst>
+          </a:prstGeom>
+          <a:solidFill>
+            <a:srgbClr val="FFFFFF"/>
+          </a:solidFill>
+          <a:ln w="12700">
+            <a:solidFill>
+              <a:srgbClr val="EAEAE8"/>
+            </a:solidFill>
+          </a:ln>
+          <a:effectLst/>
+        </p:spPr>
+        <p:style>
+          <a:lnRef idx="1">
+            <a:schemeClr val="accent1"/>
+          </a:lnRef>
+          <a:fillRef idx="3">
+            <a:schemeClr val="accent1"/>
+          </a:fillRef>
+          <a:effectRef idx="2">
+            <a:schemeClr val="accent1"/>
+          </a:effectRef>
+          <a:fontRef idx="minor">
+            <a:schemeClr val="lt1"/>
+          </a:fontRef>
+        </p:style>
+        <p:txBody>
+          <a:bodyPr rtlCol="0" anchor="ctr"/>
+          <a:lstStyle/>
+          <a:p/>
+        </p:txBody>
+      </p:sp>
+      <p:sp>
+        <p:nvSpPr>
+          <p:cNvPr id="25" name="Rounded Rectangle 24"/>
+          <p:cNvSpPr/>
+          <p:nvPr/>
+        </p:nvSpPr>
+        <p:spPr>
+          <a:xfrm>
+            <a:off x="841247" y="3834638"/>
+            <a:ext cx="365760" cy="365760"/>
+          </a:xfrm>
+          <a:prstGeom prst="roundRect">
+            <a:avLst>
+              <a:gd name="adj" fmla="val 32500"/>
+            </a:avLst>
+          </a:prstGeom>
+          <a:solidFill>
+            <a:srgbClr val="EFEAFA"/>
+          </a:solidFill>
+          <a:ln>
+            <a:noFill/>
+          </a:ln>
+          <a:effectLst/>
+        </p:spPr>
+        <p:style>
+          <a:lnRef idx="1">
+            <a:schemeClr val="accent1"/>
+          </a:lnRef>
+          <a:fillRef idx="3">
+            <a:schemeClr val="accent1"/>
+          </a:fillRef>
+          <a:effectRef idx="2">
+            <a:schemeClr val="accent1"/>
+          </a:effectRef>
+          <a:fontRef idx="minor">
+            <a:schemeClr val="lt1"/>
+          </a:fontRef>
+        </p:style>
+        <p:txBody>
+          <a:bodyPr rtlCol="0" anchor="ctr"/>
+          <a:lstStyle/>
+          <a:p/>
+        </p:txBody>
+      </p:sp>
+      <p:sp>
+        <p:nvSpPr>
+          <p:cNvPr id="26" name="TextBox 25"/>
+          <p:cNvSpPr txBox="1"/>
+          <p:nvPr/>
+        </p:nvSpPr>
+        <p:spPr>
+          <a:xfrm>
+            <a:off x="841247" y="3898646"/>
+            <a:ext cx="365760" cy="256032"/>
+          </a:xfrm>
+          <a:prstGeom prst="rect">
+            <a:avLst/>
+          </a:prstGeom>
+          <a:noFill/>
+        </p:spPr>
+        <p:txBody>
+          <a:bodyPr wrap="square" lIns="0" rIns="0" tIns="0" bIns="0" anchor="t">
+            <a:spAutoFit/>
+          </a:bodyPr>
+          <a:lstStyle/>
+          <a:p>
+            <a:pPr algn="ctr">
+              <a:lnSpc>
+                <a:spcPct val="135000"/>
+              </a:lnSpc>
+            </a:pPr>
+            <a:r>
+              <a:rPr sz="1500" b="1" i="0">
+                <a:solidFill>
+                  <a:srgbClr val="6B4FBB"/>
+                </a:solidFill>
+                <a:latin typeface="Verdana"/>
+              </a:rPr>
+              <a:t>5</a:t>
+            </a:r>
+          </a:p>
+        </p:txBody>
+      </p:sp>
+      <p:sp>
+        <p:nvSpPr>
+          <p:cNvPr id="27" name="TextBox 26"/>
+          <p:cNvSpPr txBox="1"/>
+          <p:nvPr/>
+        </p:nvSpPr>
+        <p:spPr>
+          <a:xfrm>
+            <a:off x="1344168" y="3848608"/>
+            <a:ext cx="4504791" cy="374396"/>
+          </a:xfrm>
+          <a:prstGeom prst="rect">
+            <a:avLst/>
+          </a:prstGeom>
+          <a:noFill/>
+        </p:spPr>
+        <p:txBody>
+          <a:bodyPr wrap="square" lIns="0" rIns="0" tIns="0" bIns="0" anchor="t">
+            <a:spAutoFit/>
+          </a:bodyPr>
+          <a:lstStyle/>
+          <a:p>
+            <a:pPr algn="l">
+              <a:lnSpc>
+                <a:spcPct val="140000"/>
+              </a:lnSpc>
+            </a:pPr>
+            <a:r>
+              <a:rPr sz="1900" b="0" i="0">
+                <a:solidFill>
+                  <a:srgbClr val="3A3D40"/>
+                </a:solidFill>
+                <a:latin typeface="Verdana"/>
+              </a:rPr>
+              <a:t>chaîne</a:t>
+            </a:r>
+          </a:p>
+        </p:txBody>
+      </p:sp>
+      <p:sp>
+        <p:nvSpPr>
+          <p:cNvPr id="28" name="Rounded Rectangle 27"/>
+          <p:cNvSpPr/>
+          <p:nvPr/>
+        </p:nvSpPr>
+        <p:spPr>
+          <a:xfrm>
+            <a:off x="6159855" y="3693160"/>
+            <a:ext cx="5464911" cy="648716"/>
+          </a:xfrm>
+          <a:prstGeom prst="roundRect">
+            <a:avLst>
+              <a:gd name="adj" fmla="val 22552"/>
+            </a:avLst>
+          </a:prstGeom>
+          <a:solidFill>
+            <a:srgbClr val="FFFFFF"/>
+          </a:solidFill>
+          <a:ln w="12700">
+            <a:solidFill>
+              <a:srgbClr val="EAEAE8"/>
+            </a:solidFill>
+          </a:ln>
+          <a:effectLst/>
+        </p:spPr>
+        <p:style>
+          <a:lnRef idx="1">
+            <a:schemeClr val="accent1"/>
+          </a:lnRef>
+          <a:fillRef idx="3">
+            <a:schemeClr val="accent1"/>
+          </a:fillRef>
+          <a:effectRef idx="2">
+            <a:schemeClr val="accent1"/>
+          </a:effectRef>
+          <a:fontRef idx="minor">
+            <a:schemeClr val="lt1"/>
+          </a:fontRef>
+        </p:style>
+        <p:txBody>
+          <a:bodyPr rtlCol="0" anchor="ctr"/>
+          <a:lstStyle/>
+          <a:p/>
+        </p:txBody>
+      </p:sp>
+      <p:sp>
+        <p:nvSpPr>
+          <p:cNvPr id="29" name="Rounded Rectangle 28"/>
+          <p:cNvSpPr/>
+          <p:nvPr/>
+        </p:nvSpPr>
+        <p:spPr>
+          <a:xfrm>
+            <a:off x="6434175" y="3834638"/>
+            <a:ext cx="365760" cy="365760"/>
+          </a:xfrm>
+          <a:prstGeom prst="roundRect">
+            <a:avLst>
+              <a:gd name="adj" fmla="val 32500"/>
+            </a:avLst>
+          </a:prstGeom>
+          <a:solidFill>
+            <a:srgbClr val="EFEAFA"/>
+          </a:solidFill>
+          <a:ln>
+            <a:noFill/>
+          </a:ln>
+          <a:effectLst/>
+        </p:spPr>
+        <p:style>
+          <a:lnRef idx="1">
+            <a:schemeClr val="accent1"/>
+          </a:lnRef>
+          <a:fillRef idx="3">
+            <a:schemeClr val="accent1"/>
+          </a:fillRef>
+          <a:effectRef idx="2">
+            <a:schemeClr val="accent1"/>
+          </a:effectRef>
+          <a:fontRef idx="minor">
+            <a:schemeClr val="lt1"/>
+          </a:fontRef>
+        </p:style>
+        <p:txBody>
+          <a:bodyPr rtlCol="0" anchor="ctr"/>
+          <a:lstStyle/>
+          <a:p/>
+        </p:txBody>
+      </p:sp>
+      <p:sp>
+        <p:nvSpPr>
+          <p:cNvPr id="30" name="TextBox 29"/>
+          <p:cNvSpPr txBox="1"/>
+          <p:nvPr/>
+        </p:nvSpPr>
+        <p:spPr>
+          <a:xfrm>
+            <a:off x="6434175" y="3898646"/>
+            <a:ext cx="365760" cy="256032"/>
+          </a:xfrm>
+          <a:prstGeom prst="rect">
+            <a:avLst/>
+          </a:prstGeom>
+          <a:noFill/>
+        </p:spPr>
+        <p:txBody>
+          <a:bodyPr wrap="square" lIns="0" rIns="0" tIns="0" bIns="0" anchor="t">
+            <a:spAutoFit/>
+          </a:bodyPr>
+          <a:lstStyle/>
+          <a:p>
+            <a:pPr algn="ctr">
+              <a:lnSpc>
+                <a:spcPct val="135000"/>
+              </a:lnSpc>
+            </a:pPr>
+            <a:r>
+              <a:rPr sz="1500" b="1" i="0">
+                <a:solidFill>
+                  <a:srgbClr val="6B4FBB"/>
+                </a:solidFill>
+                <a:latin typeface="Verdana"/>
+              </a:rPr>
+              <a:t>6</a:t>
+            </a:r>
+          </a:p>
+        </p:txBody>
+      </p:sp>
+      <p:sp>
+        <p:nvSpPr>
+          <p:cNvPr id="31" name="TextBox 30"/>
+          <p:cNvSpPr txBox="1"/>
+          <p:nvPr/>
+        </p:nvSpPr>
+        <p:spPr>
+          <a:xfrm>
+            <a:off x="6937095" y="3848608"/>
+            <a:ext cx="4504791" cy="374396"/>
+          </a:xfrm>
+          <a:prstGeom prst="rect">
+            <a:avLst/>
+          </a:prstGeom>
+          <a:noFill/>
+        </p:spPr>
+        <p:txBody>
+          <a:bodyPr wrap="square" lIns="0" rIns="0" tIns="0" bIns="0" anchor="t">
+            <a:spAutoFit/>
+          </a:bodyPr>
+          <a:lstStyle/>
+          <a:p>
+            <a:pPr algn="l">
+              <a:lnSpc>
+                <a:spcPct val="140000"/>
+              </a:lnSpc>
+            </a:pPr>
+            <a:r>
+              <a:rPr sz="1900" b="0" i="0">
+                <a:solidFill>
+                  <a:srgbClr val="3A3D40"/>
+                </a:solidFill>
+                <a:latin typeface="Verdana"/>
+              </a:rPr>
+              <a:t>justement</a:t>
+            </a:r>
+          </a:p>
+        </p:txBody>
+      </p:sp>
+      <p:sp>
+        <p:nvSpPr>
+          <p:cNvPr id="32" name="Rounded Rectangle 31"/>
+          <p:cNvSpPr/>
+          <p:nvPr/>
+        </p:nvSpPr>
+        <p:spPr>
+          <a:xfrm>
+            <a:off x="566928" y="4469892"/>
+            <a:ext cx="5464911" cy="648716"/>
+          </a:xfrm>
+          <a:prstGeom prst="roundRect">
+            <a:avLst>
+              <a:gd name="adj" fmla="val 22552"/>
+            </a:avLst>
+          </a:prstGeom>
+          <a:solidFill>
+            <a:srgbClr val="FFFFFF"/>
+          </a:solidFill>
+          <a:ln w="12700">
+            <a:solidFill>
+              <a:srgbClr val="EAEAE8"/>
+            </a:solidFill>
+          </a:ln>
+          <a:effectLst/>
+        </p:spPr>
+        <p:style>
+          <a:lnRef idx="1">
+            <a:schemeClr val="accent1"/>
+          </a:lnRef>
+          <a:fillRef idx="3">
+            <a:schemeClr val="accent1"/>
+          </a:fillRef>
+          <a:effectRef idx="2">
+            <a:schemeClr val="accent1"/>
+          </a:effectRef>
+          <a:fontRef idx="minor">
+            <a:schemeClr val="lt1"/>
+          </a:fontRef>
+        </p:style>
+        <p:txBody>
+          <a:bodyPr rtlCol="0" anchor="ctr"/>
+          <a:lstStyle/>
+          <a:p/>
+        </p:txBody>
+      </p:sp>
+      <p:sp>
+        <p:nvSpPr>
+          <p:cNvPr id="33" name="Rounded Rectangle 32"/>
+          <p:cNvSpPr/>
+          <p:nvPr/>
+        </p:nvSpPr>
+        <p:spPr>
+          <a:xfrm>
+            <a:off x="841247" y="4611370"/>
+            <a:ext cx="365760" cy="365760"/>
+          </a:xfrm>
+          <a:prstGeom prst="roundRect">
+            <a:avLst>
+              <a:gd name="adj" fmla="val 32500"/>
+            </a:avLst>
+          </a:prstGeom>
+          <a:solidFill>
+            <a:srgbClr val="EFEAFA"/>
+          </a:solidFill>
+          <a:ln>
+            <a:noFill/>
+          </a:ln>
+          <a:effectLst/>
+        </p:spPr>
+        <p:style>
+          <a:lnRef idx="1">
+            <a:schemeClr val="accent1"/>
+          </a:lnRef>
+          <a:fillRef idx="3">
+            <a:schemeClr val="accent1"/>
+          </a:fillRef>
+          <a:effectRef idx="2">
+            <a:schemeClr val="accent1"/>
+          </a:effectRef>
+          <a:fontRef idx="minor">
+            <a:schemeClr val="lt1"/>
+          </a:fontRef>
+        </p:style>
+        <p:txBody>
+          <a:bodyPr rtlCol="0" anchor="ctr"/>
+          <a:lstStyle/>
+          <a:p/>
+        </p:txBody>
+      </p:sp>
+      <p:sp>
+        <p:nvSpPr>
+          <p:cNvPr id="34" name="TextBox 33"/>
+          <p:cNvSpPr txBox="1"/>
+          <p:nvPr/>
+        </p:nvSpPr>
+        <p:spPr>
+          <a:xfrm>
+            <a:off x="841247" y="4675378"/>
+            <a:ext cx="365760" cy="256032"/>
+          </a:xfrm>
+          <a:prstGeom prst="rect">
+            <a:avLst/>
+          </a:prstGeom>
+          <a:noFill/>
+        </p:spPr>
+        <p:txBody>
+          <a:bodyPr wrap="square" lIns="0" rIns="0" tIns="0" bIns="0" anchor="t">
+            <a:spAutoFit/>
+          </a:bodyPr>
+          <a:lstStyle/>
+          <a:p>
+            <a:pPr algn="ctr">
+              <a:lnSpc>
+                <a:spcPct val="135000"/>
+              </a:lnSpc>
+            </a:pPr>
+            <a:r>
+              <a:rPr sz="1500" b="1" i="0">
+                <a:solidFill>
+                  <a:srgbClr val="6B4FBB"/>
+                </a:solidFill>
+                <a:latin typeface="Verdana"/>
+              </a:rPr>
+              <a:t>7</a:t>
+            </a:r>
+          </a:p>
+        </p:txBody>
+      </p:sp>
+      <p:sp>
+        <p:nvSpPr>
+          <p:cNvPr id="35" name="TextBox 34"/>
+          <p:cNvSpPr txBox="1"/>
+          <p:nvPr/>
+        </p:nvSpPr>
+        <p:spPr>
+          <a:xfrm>
+            <a:off x="1344168" y="4625340"/>
+            <a:ext cx="4504791" cy="374396"/>
+          </a:xfrm>
+          <a:prstGeom prst="rect">
+            <a:avLst/>
+          </a:prstGeom>
+          <a:noFill/>
+        </p:spPr>
+        <p:txBody>
+          <a:bodyPr wrap="square" lIns="0" rIns="0" tIns="0" bIns="0" anchor="t">
+            <a:spAutoFit/>
+          </a:bodyPr>
+          <a:lstStyle/>
+          <a:p>
+            <a:pPr algn="l">
+              <a:lnSpc>
+                <a:spcPct val="140000"/>
+              </a:lnSpc>
+            </a:pPr>
+            <a:r>
+              <a:rPr sz="1900" b="0" i="0">
+                <a:solidFill>
+                  <a:srgbClr val="3A3D40"/>
+                </a:solidFill>
+                <a:latin typeface="Verdana"/>
+              </a:rPr>
+              <a:t>déchirés</a:t>
+            </a:r>
+          </a:p>
+        </p:txBody>
+      </p:sp>
+      <p:sp>
+        <p:nvSpPr>
+          <p:cNvPr id="36" name="Rounded Rectangle 35"/>
+          <p:cNvSpPr/>
+          <p:nvPr/>
+        </p:nvSpPr>
+        <p:spPr>
+          <a:xfrm>
+            <a:off x="6159855" y="4469892"/>
+            <a:ext cx="5464911" cy="648716"/>
+          </a:xfrm>
+          <a:prstGeom prst="roundRect">
+            <a:avLst>
+              <a:gd name="adj" fmla="val 22552"/>
+            </a:avLst>
+          </a:prstGeom>
+          <a:solidFill>
+            <a:srgbClr val="FFFFFF"/>
+          </a:solidFill>
+          <a:ln w="12700">
+            <a:solidFill>
+              <a:srgbClr val="EAEAE8"/>
+            </a:solidFill>
+          </a:ln>
+          <a:effectLst/>
+        </p:spPr>
+        <p:style>
+          <a:lnRef idx="1">
+            <a:schemeClr val="accent1"/>
+          </a:lnRef>
+          <a:fillRef idx="3">
+            <a:schemeClr val="accent1"/>
+          </a:fillRef>
+          <a:effectRef idx="2">
+            <a:schemeClr val="accent1"/>
+          </a:effectRef>
+          <a:fontRef idx="minor">
+            <a:schemeClr val="lt1"/>
+          </a:fontRef>
+        </p:style>
+        <p:txBody>
+          <a:bodyPr rtlCol="0" anchor="ctr"/>
+          <a:lstStyle/>
+          <a:p/>
+        </p:txBody>
+      </p:sp>
+      <p:sp>
+        <p:nvSpPr>
+          <p:cNvPr id="37" name="Rounded Rectangle 36"/>
+          <p:cNvSpPr/>
+          <p:nvPr/>
+        </p:nvSpPr>
+        <p:spPr>
+          <a:xfrm>
+            <a:off x="6434175" y="4611370"/>
+            <a:ext cx="365760" cy="365760"/>
+          </a:xfrm>
+          <a:prstGeom prst="roundRect">
+            <a:avLst>
+              <a:gd name="adj" fmla="val 32500"/>
+            </a:avLst>
+          </a:prstGeom>
+          <a:solidFill>
+            <a:srgbClr val="EFEAFA"/>
+          </a:solidFill>
+          <a:ln>
+            <a:noFill/>
+          </a:ln>
+          <a:effectLst/>
+        </p:spPr>
+        <p:style>
+          <a:lnRef idx="1">
+            <a:schemeClr val="accent1"/>
+          </a:lnRef>
+          <a:fillRef idx="3">
+            <a:schemeClr val="accent1"/>
+          </a:fillRef>
+          <a:effectRef idx="2">
+            <a:schemeClr val="accent1"/>
+          </a:effectRef>
+          <a:fontRef idx="minor">
+            <a:schemeClr val="lt1"/>
+          </a:fontRef>
+        </p:style>
+        <p:txBody>
+          <a:bodyPr rtlCol="0" anchor="ctr"/>
+          <a:lstStyle/>
+          <a:p/>
+        </p:txBody>
+      </p:sp>
+      <p:sp>
+        <p:nvSpPr>
+          <p:cNvPr id="38" name="TextBox 37"/>
+          <p:cNvSpPr txBox="1"/>
+          <p:nvPr/>
+        </p:nvSpPr>
+        <p:spPr>
+          <a:xfrm>
+            <a:off x="6434175" y="4675378"/>
+            <a:ext cx="365760" cy="256032"/>
+          </a:xfrm>
+          <a:prstGeom prst="rect">
+            <a:avLst/>
+          </a:prstGeom>
+          <a:noFill/>
+        </p:spPr>
+        <p:txBody>
+          <a:bodyPr wrap="square" lIns="0" rIns="0" tIns="0" bIns="0" anchor="t">
+            <a:spAutoFit/>
+          </a:bodyPr>
+          <a:lstStyle/>
+          <a:p>
+            <a:pPr algn="ctr">
+              <a:lnSpc>
+                <a:spcPct val="135000"/>
+              </a:lnSpc>
+            </a:pPr>
+            <a:r>
+              <a:rPr sz="1500" b="1" i="0">
+                <a:solidFill>
+                  <a:srgbClr val="6B4FBB"/>
+                </a:solidFill>
+                <a:latin typeface="Verdana"/>
+              </a:rPr>
+              <a:t>8</a:t>
+            </a:r>
+          </a:p>
+        </p:txBody>
+      </p:sp>
+      <p:sp>
+        <p:nvSpPr>
+          <p:cNvPr id="39" name="TextBox 38"/>
+          <p:cNvSpPr txBox="1"/>
+          <p:nvPr/>
+        </p:nvSpPr>
+        <p:spPr>
+          <a:xfrm>
+            <a:off x="6937095" y="4625340"/>
+            <a:ext cx="4504791" cy="374396"/>
+          </a:xfrm>
+          <a:prstGeom prst="rect">
+            <a:avLst/>
+          </a:prstGeom>
+          <a:noFill/>
+        </p:spPr>
+        <p:txBody>
+          <a:bodyPr wrap="square" lIns="0" rIns="0" tIns="0" bIns="0" anchor="t">
+            <a:spAutoFit/>
+          </a:bodyPr>
+          <a:lstStyle/>
+          <a:p>
+            <a:pPr algn="l">
+              <a:lnSpc>
+                <a:spcPct val="140000"/>
+              </a:lnSpc>
+            </a:pPr>
+            <a:r>
+              <a:rPr sz="1900" b="0" i="0">
+                <a:solidFill>
+                  <a:srgbClr val="3A3D40"/>
+                </a:solidFill>
+                <a:latin typeface="Verdana"/>
+              </a:rPr>
+              <a:t>rejoindre</a:t>
+            </a:r>
+          </a:p>
+        </p:txBody>
+      </p:sp>
+    </p:spTree>
+  </p:cSld>
+  <p:clrMapOvr>
+    <a:masterClrMapping/>
+  </p:clrMapOvr>
+</p:sld>
+</file>
+
+<file path=ppt/slides/slide21.xml><?xml version="1.0" encoding="utf-8"?>
+<p:sld xmlns:a="http://schemas.openxmlformats.org/drawingml/2006/main" xmlns:p="http://schemas.openxmlformats.org/presentationml/2006/main" xmlns:r="http://schemas.openxmlformats.org/officeDocument/2006/relationships">
+  <p:cSld>
+    <p:spTree>
+      <p:nvGrpSpPr>
+        <p:cNvPr id="1" name=""/>
+        <p:cNvGrpSpPr/>
+        <p:nvPr/>
+      </p:nvGrpSpPr>
+      <p:grpSpPr/>
+      <p:sp>
+        <p:nvSpPr>
+          <p:cNvPr id="2" name="Rectangle 1"/>
+          <p:cNvSpPr/>
+          <p:nvPr/>
+        </p:nvSpPr>
+        <p:spPr>
+          <a:xfrm>
+            <a:off x="0" y="0"/>
+            <a:ext cx="12191695" cy="6858000"/>
+          </a:xfrm>
+          <a:prstGeom prst="rect">
+            <a:avLst/>
+          </a:prstGeom>
+          <a:solidFill>
+            <a:srgbClr val="F7F7F5"/>
+          </a:solidFill>
+          <a:ln>
+            <a:noFill/>
+          </a:ln>
+          <a:effectLst/>
+        </p:spPr>
+        <p:style>
+          <a:lnRef idx="1">
+            <a:schemeClr val="accent1"/>
+          </a:lnRef>
+          <a:fillRef idx="3">
+            <a:schemeClr val="accent1"/>
+          </a:fillRef>
+          <a:effectRef idx="2">
+            <a:schemeClr val="accent1"/>
+          </a:effectRef>
+          <a:fontRef idx="minor">
+            <a:schemeClr val="lt1"/>
+          </a:fontRef>
+        </p:style>
+        <p:txBody>
+          <a:bodyPr rtlCol="0" anchor="ctr"/>
+          <a:lstStyle/>
+          <a:p/>
+        </p:txBody>
+      </p:sp>
+      <p:sp>
+        <p:nvSpPr>
+          <p:cNvPr id="3" name="TextBox 2"/>
+          <p:cNvSpPr txBox="1"/>
+          <p:nvPr/>
+        </p:nvSpPr>
+        <p:spPr>
+          <a:xfrm>
+            <a:off x="566928" y="6355080"/>
+            <a:ext cx="6400800" cy="219456"/>
+          </a:xfrm>
+          <a:prstGeom prst="rect">
+            <a:avLst/>
+          </a:prstGeom>
+          <a:noFill/>
+        </p:spPr>
+        <p:txBody>
+          <a:bodyPr wrap="square" lIns="0" rIns="0" tIns="0" bIns="0" anchor="t">
+            <a:spAutoFit/>
+          </a:bodyPr>
+          <a:lstStyle/>
+          <a:p>
+            <a:pPr algn="l">
+              <a:lnSpc>
+                <a:spcPct val="135000"/>
+              </a:lnSpc>
+            </a:pPr>
+            <a:r>
+              <a:rPr sz="1200" b="0" i="0">
+                <a:solidFill>
+                  <a:srgbClr val="6E7175"/>
+                </a:solidFill>
+                <a:latin typeface="Verdana"/>
+              </a:rPr>
+              <a:t>A2 · Des publicités efficaces</a:t>
+            </a:r>
+          </a:p>
+        </p:txBody>
+      </p:sp>
+      <p:sp>
+        <p:nvSpPr>
+          <p:cNvPr id="4" name="TextBox 3"/>
+          <p:cNvSpPr txBox="1"/>
+          <p:nvPr/>
+        </p:nvSpPr>
+        <p:spPr>
+          <a:xfrm>
+            <a:off x="10710367" y="6355080"/>
+            <a:ext cx="914400" cy="219456"/>
+          </a:xfrm>
+          <a:prstGeom prst="rect">
+            <a:avLst/>
+          </a:prstGeom>
+          <a:noFill/>
+        </p:spPr>
+        <p:txBody>
+          <a:bodyPr wrap="square" lIns="0" rIns="0" tIns="0" bIns="0" anchor="t">
+            <a:spAutoFit/>
+          </a:bodyPr>
+          <a:lstStyle/>
+          <a:p>
+            <a:pPr algn="r">
+              <a:lnSpc>
+                <a:spcPct val="135000"/>
+              </a:lnSpc>
+            </a:pPr>
+            <a:r>
+              <a:rPr sz="1200" b="0" i="0">
+                <a:solidFill>
+                  <a:srgbClr val="6E7175"/>
+                </a:solidFill>
+                <a:latin typeface="Verdana"/>
+              </a:rPr>
+              <a:t>21</a:t>
+            </a:r>
+          </a:p>
+        </p:txBody>
+      </p:sp>
+      <p:sp>
+        <p:nvSpPr>
+          <p:cNvPr id="5" name="TextBox 4"/>
+          <p:cNvSpPr txBox="1"/>
+          <p:nvPr/>
+        </p:nvSpPr>
+        <p:spPr>
+          <a:xfrm>
+            <a:off x="566928" y="420624"/>
+            <a:ext cx="11057839" cy="237744"/>
+          </a:xfrm>
+          <a:prstGeom prst="rect">
+            <a:avLst/>
+          </a:prstGeom>
+          <a:noFill/>
+        </p:spPr>
+        <p:txBody>
+          <a:bodyPr wrap="square" lIns="0" rIns="0" tIns="0" bIns="0" anchor="t">
+            <a:spAutoFit/>
+          </a:bodyPr>
+          <a:lstStyle/>
+          <a:p>
+            <a:pPr algn="l">
+              <a:lnSpc>
+                <a:spcPct val="135000"/>
+              </a:lnSpc>
+            </a:pPr>
+            <a:r>
+              <a:rPr sz="1300" b="1" i="0" spc="156">
+                <a:solidFill>
+                  <a:srgbClr val="6B4FBB"/>
+                </a:solidFill>
+                <a:latin typeface="Verdana"/>
+              </a:rPr>
+              <a:t>CORRECTION</a:t>
+            </a:r>
+          </a:p>
+        </p:txBody>
+      </p:sp>
+      <p:sp>
+        <p:nvSpPr>
+          <p:cNvPr id="6" name="TextBox 5"/>
+          <p:cNvSpPr txBox="1"/>
+          <p:nvPr/>
+        </p:nvSpPr>
+        <p:spPr>
+          <a:xfrm>
+            <a:off x="566928" y="749808"/>
+            <a:ext cx="11057839" cy="877824"/>
+          </a:xfrm>
+          <a:prstGeom prst="rect">
+            <a:avLst/>
+          </a:prstGeom>
+          <a:noFill/>
+        </p:spPr>
+        <p:txBody>
+          <a:bodyPr wrap="square" lIns="0" rIns="0" tIns="0" bIns="0" anchor="t">
+            <a:spAutoFit/>
+          </a:bodyPr>
+          <a:lstStyle/>
+          <a:p>
+            <a:pPr algn="l">
+              <a:lnSpc>
+                <a:spcPct val="115000"/>
+              </a:lnSpc>
+            </a:pPr>
+            <a:r>
+              <a:rPr sz="3400" b="1" i="0">
+                <a:solidFill>
+                  <a:srgbClr val="17181A"/>
+                </a:solidFill>
+                <a:latin typeface="Verdana"/>
+              </a:rPr>
+              <a:t>Quel son entendez-vous ?</a:t>
+            </a:r>
+          </a:p>
+        </p:txBody>
+      </p:sp>
+      <p:sp>
+        <p:nvSpPr>
+          <p:cNvPr id="7" name="TextBox 6"/>
+          <p:cNvSpPr txBox="1"/>
+          <p:nvPr/>
+        </p:nvSpPr>
+        <p:spPr>
+          <a:xfrm>
+            <a:off x="566928" y="1645920"/>
+            <a:ext cx="11057839" cy="329184"/>
+          </a:xfrm>
+          <a:prstGeom prst="rect">
+            <a:avLst/>
+          </a:prstGeom>
+          <a:noFill/>
+        </p:spPr>
+        <p:txBody>
+          <a:bodyPr wrap="square" lIns="0" rIns="0" tIns="0" bIns="0" anchor="t">
+            <a:spAutoFit/>
+          </a:bodyPr>
+          <a:lstStyle/>
+          <a:p>
+            <a:pPr algn="l">
+              <a:lnSpc>
+                <a:spcPct val="135000"/>
+              </a:lnSpc>
+            </a:pPr>
+            <a:r>
+              <a:rPr sz="1800" b="0" i="0">
+                <a:solidFill>
+                  <a:srgbClr val="6E7175"/>
+                </a:solidFill>
+                <a:latin typeface="Verdana"/>
+              </a:rPr>
+              <a:t>Correction — on lit la réponse, on ne commente pas l'erreur.</a:t>
+            </a:r>
+          </a:p>
+        </p:txBody>
+      </p:sp>
+      <p:sp>
+        <p:nvSpPr>
+          <p:cNvPr id="8" name="Rounded Rectangle 7"/>
+          <p:cNvSpPr/>
+          <p:nvPr/>
+        </p:nvSpPr>
+        <p:spPr>
+          <a:xfrm>
+            <a:off x="566928" y="2139696"/>
+            <a:ext cx="5464911" cy="648716"/>
+          </a:xfrm>
+          <a:prstGeom prst="roundRect">
+            <a:avLst>
+              <a:gd name="adj" fmla="val 22552"/>
+            </a:avLst>
+          </a:prstGeom>
+          <a:solidFill>
+            <a:srgbClr val="E6F5EE"/>
+          </a:solidFill>
+          <a:ln w="12700">
+            <a:solidFill>
+              <a:srgbClr val="EAEAE8"/>
+            </a:solidFill>
+          </a:ln>
+          <a:effectLst/>
+        </p:spPr>
+        <p:style>
+          <a:lnRef idx="1">
+            <a:schemeClr val="accent1"/>
+          </a:lnRef>
+          <a:fillRef idx="3">
+            <a:schemeClr val="accent1"/>
+          </a:fillRef>
+          <a:effectRef idx="2">
+            <a:schemeClr val="accent1"/>
+          </a:effectRef>
+          <a:fontRef idx="minor">
+            <a:schemeClr val="lt1"/>
+          </a:fontRef>
+        </p:style>
+        <p:txBody>
+          <a:bodyPr rtlCol="0" anchor="ctr"/>
+          <a:lstStyle/>
+          <a:p/>
+        </p:txBody>
+      </p:sp>
+      <p:sp>
+        <p:nvSpPr>
+          <p:cNvPr id="9" name="Rounded Rectangle 8"/>
+          <p:cNvSpPr/>
+          <p:nvPr/>
+        </p:nvSpPr>
+        <p:spPr>
+          <a:xfrm>
+            <a:off x="841247" y="2281174"/>
+            <a:ext cx="365760" cy="365760"/>
+          </a:xfrm>
+          <a:prstGeom prst="roundRect">
+            <a:avLst>
+              <a:gd name="adj" fmla="val 32500"/>
+            </a:avLst>
+          </a:prstGeom>
+          <a:solidFill>
+            <a:srgbClr val="EFEAFA"/>
+          </a:solidFill>
+          <a:ln>
+            <a:noFill/>
+          </a:ln>
+          <a:effectLst/>
+        </p:spPr>
+        <p:style>
+          <a:lnRef idx="1">
+            <a:schemeClr val="accent1"/>
+          </a:lnRef>
+          <a:fillRef idx="3">
+            <a:schemeClr val="accent1"/>
+          </a:fillRef>
+          <a:effectRef idx="2">
+            <a:schemeClr val="accent1"/>
+          </a:effectRef>
+          <a:fontRef idx="minor">
+            <a:schemeClr val="lt1"/>
+          </a:fontRef>
+        </p:style>
+        <p:txBody>
+          <a:bodyPr rtlCol="0" anchor="ctr"/>
+          <a:lstStyle/>
+          <a:p/>
+        </p:txBody>
+      </p:sp>
+      <p:sp>
+        <p:nvSpPr>
+          <p:cNvPr id="10" name="TextBox 9"/>
+          <p:cNvSpPr txBox="1"/>
+          <p:nvPr/>
+        </p:nvSpPr>
+        <p:spPr>
+          <a:xfrm>
+            <a:off x="841247" y="2345182"/>
+            <a:ext cx="365760" cy="256032"/>
+          </a:xfrm>
+          <a:prstGeom prst="rect">
+            <a:avLst/>
+          </a:prstGeom>
+          <a:noFill/>
+        </p:spPr>
+        <p:txBody>
+          <a:bodyPr wrap="square" lIns="0" rIns="0" tIns="0" bIns="0" anchor="t">
+            <a:spAutoFit/>
+          </a:bodyPr>
+          <a:lstStyle/>
+          <a:p>
+            <a:pPr algn="ctr">
+              <a:lnSpc>
+                <a:spcPct val="135000"/>
+              </a:lnSpc>
+            </a:pPr>
+            <a:r>
+              <a:rPr sz="1500" b="1" i="0">
+                <a:solidFill>
+                  <a:srgbClr val="6B4FBB"/>
+                </a:solidFill>
+                <a:latin typeface="Verdana"/>
+              </a:rPr>
+              <a:t>1</a:t>
+            </a:r>
+          </a:p>
+        </p:txBody>
+      </p:sp>
+      <p:sp>
+        <p:nvSpPr>
+          <p:cNvPr id="11" name="TextBox 10"/>
+          <p:cNvSpPr txBox="1"/>
+          <p:nvPr/>
+        </p:nvSpPr>
+        <p:spPr>
+          <a:xfrm>
+            <a:off x="1344168" y="2295144"/>
+            <a:ext cx="4504791" cy="374396"/>
+          </a:xfrm>
+          <a:prstGeom prst="rect">
+            <a:avLst/>
+          </a:prstGeom>
+          <a:noFill/>
+        </p:spPr>
+        <p:txBody>
+          <a:bodyPr wrap="square" lIns="0" rIns="0" tIns="0" bIns="0" anchor="t">
+            <a:spAutoFit/>
+          </a:bodyPr>
+          <a:lstStyle/>
+          <a:p>
+            <a:pPr algn="l">
+              <a:lnSpc>
+                <a:spcPct val="140000"/>
+              </a:lnSpc>
+            </a:pPr>
+            <a:r>
+              <a:rPr sz="1900" b="0" i="0">
+                <a:solidFill>
+                  <a:srgbClr val="3A3D40"/>
+                </a:solidFill>
+                <a:latin typeface="Verdana"/>
+              </a:rPr>
+              <a:t>affiche   </a:t>
+            </a:r>
+            <a:r>
+              <a:rPr sz="1900" b="1" i="0">
+                <a:solidFill>
+                  <a:srgbClr val="07734A"/>
+                </a:solidFill>
+                <a:latin typeface="Verdana"/>
+              </a:rPr>
+              <a:t>» le son « ch »</a:t>
+            </a:r>
+          </a:p>
+        </p:txBody>
+      </p:sp>
+      <p:sp>
+        <p:nvSpPr>
+          <p:cNvPr id="12" name="Rounded Rectangle 11"/>
+          <p:cNvSpPr/>
+          <p:nvPr/>
+        </p:nvSpPr>
+        <p:spPr>
+          <a:xfrm>
+            <a:off x="6159855" y="2139696"/>
+            <a:ext cx="5464911" cy="648716"/>
+          </a:xfrm>
+          <a:prstGeom prst="roundRect">
+            <a:avLst>
+              <a:gd name="adj" fmla="val 22552"/>
+            </a:avLst>
+          </a:prstGeom>
+          <a:solidFill>
+            <a:srgbClr val="E6F5EE"/>
+          </a:solidFill>
+          <a:ln w="12700">
+            <a:solidFill>
+              <a:srgbClr val="EAEAE8"/>
+            </a:solidFill>
+          </a:ln>
+          <a:effectLst/>
+        </p:spPr>
+        <p:style>
+          <a:lnRef idx="1">
+            <a:schemeClr val="accent1"/>
+          </a:lnRef>
+          <a:fillRef idx="3">
+            <a:schemeClr val="accent1"/>
+          </a:fillRef>
+          <a:effectRef idx="2">
+            <a:schemeClr val="accent1"/>
+          </a:effectRef>
+          <a:fontRef idx="minor">
+            <a:schemeClr val="lt1"/>
+          </a:fontRef>
+        </p:style>
+        <p:txBody>
+          <a:bodyPr rtlCol="0" anchor="ctr"/>
+          <a:lstStyle/>
+          <a:p/>
+        </p:txBody>
+      </p:sp>
+      <p:sp>
+        <p:nvSpPr>
+          <p:cNvPr id="13" name="Rounded Rectangle 12"/>
+          <p:cNvSpPr/>
+          <p:nvPr/>
+        </p:nvSpPr>
+        <p:spPr>
+          <a:xfrm>
+            <a:off x="6434175" y="2281174"/>
+            <a:ext cx="365760" cy="365760"/>
+          </a:xfrm>
+          <a:prstGeom prst="roundRect">
+            <a:avLst>
+              <a:gd name="adj" fmla="val 32500"/>
+            </a:avLst>
+          </a:prstGeom>
+          <a:solidFill>
+            <a:srgbClr val="EFEAFA"/>
+          </a:solidFill>
+          <a:ln>
+            <a:noFill/>
+          </a:ln>
+          <a:effectLst/>
+        </p:spPr>
+        <p:style>
+          <a:lnRef idx="1">
+            <a:schemeClr val="accent1"/>
+          </a:lnRef>
+          <a:fillRef idx="3">
+            <a:schemeClr val="accent1"/>
+          </a:fillRef>
+          <a:effectRef idx="2">
+            <a:schemeClr val="accent1"/>
+          </a:effectRef>
+          <a:fontRef idx="minor">
+            <a:schemeClr val="lt1"/>
+          </a:fontRef>
+        </p:style>
+        <p:txBody>
+          <a:bodyPr rtlCol="0" anchor="ctr"/>
+          <a:lstStyle/>
+          <a:p/>
+        </p:txBody>
+      </p:sp>
+      <p:sp>
+        <p:nvSpPr>
+          <p:cNvPr id="14" name="TextBox 13"/>
+          <p:cNvSpPr txBox="1"/>
+          <p:nvPr/>
+        </p:nvSpPr>
+        <p:spPr>
+          <a:xfrm>
+            <a:off x="6434175" y="2345182"/>
+            <a:ext cx="365760" cy="256032"/>
+          </a:xfrm>
+          <a:prstGeom prst="rect">
+            <a:avLst/>
+          </a:prstGeom>
+          <a:noFill/>
+        </p:spPr>
+        <p:txBody>
+          <a:bodyPr wrap="square" lIns="0" rIns="0" tIns="0" bIns="0" anchor="t">
+            <a:spAutoFit/>
+          </a:bodyPr>
+          <a:lstStyle/>
+          <a:p>
+            <a:pPr algn="ctr">
+              <a:lnSpc>
+                <a:spcPct val="135000"/>
+              </a:lnSpc>
+            </a:pPr>
+            <a:r>
+              <a:rPr sz="1500" b="1" i="0">
+                <a:solidFill>
+                  <a:srgbClr val="6B4FBB"/>
+                </a:solidFill>
+                <a:latin typeface="Verdana"/>
+              </a:rPr>
+              <a:t>2</a:t>
+            </a:r>
+          </a:p>
+        </p:txBody>
+      </p:sp>
+      <p:sp>
+        <p:nvSpPr>
+          <p:cNvPr id="15" name="TextBox 14"/>
+          <p:cNvSpPr txBox="1"/>
+          <p:nvPr/>
+        </p:nvSpPr>
+        <p:spPr>
+          <a:xfrm>
+            <a:off x="6937095" y="2295144"/>
+            <a:ext cx="4504791" cy="374396"/>
+          </a:xfrm>
+          <a:prstGeom prst="rect">
+            <a:avLst/>
+          </a:prstGeom>
+          <a:noFill/>
+        </p:spPr>
+        <p:txBody>
+          <a:bodyPr wrap="square" lIns="0" rIns="0" tIns="0" bIns="0" anchor="t">
+            <a:spAutoFit/>
+          </a:bodyPr>
+          <a:lstStyle/>
+          <a:p>
+            <a:pPr algn="l">
+              <a:lnSpc>
+                <a:spcPct val="140000"/>
+              </a:lnSpc>
+            </a:pPr>
+            <a:r>
+              <a:rPr sz="1900" b="0" i="0">
+                <a:solidFill>
+                  <a:srgbClr val="3A3D40"/>
+                </a:solidFill>
+                <a:latin typeface="Verdana"/>
+              </a:rPr>
+              <a:t>message   </a:t>
+            </a:r>
+            <a:r>
+              <a:rPr sz="1900" b="1" i="0">
+                <a:solidFill>
+                  <a:srgbClr val="07734A"/>
+                </a:solidFill>
+                <a:latin typeface="Verdana"/>
+              </a:rPr>
+              <a:t>» le son « j »</a:t>
+            </a:r>
+          </a:p>
+        </p:txBody>
+      </p:sp>
+      <p:sp>
+        <p:nvSpPr>
+          <p:cNvPr id="16" name="Rounded Rectangle 15"/>
+          <p:cNvSpPr/>
+          <p:nvPr/>
+        </p:nvSpPr>
+        <p:spPr>
+          <a:xfrm>
+            <a:off x="566928" y="2916428"/>
+            <a:ext cx="5464911" cy="648716"/>
+          </a:xfrm>
+          <a:prstGeom prst="roundRect">
+            <a:avLst>
+              <a:gd name="adj" fmla="val 22552"/>
+            </a:avLst>
+          </a:prstGeom>
+          <a:solidFill>
+            <a:srgbClr val="E6F5EE"/>
+          </a:solidFill>
+          <a:ln w="12700">
+            <a:solidFill>
+              <a:srgbClr val="EAEAE8"/>
+            </a:solidFill>
+          </a:ln>
+          <a:effectLst/>
+        </p:spPr>
+        <p:style>
+          <a:lnRef idx="1">
+            <a:schemeClr val="accent1"/>
+          </a:lnRef>
+          <a:fillRef idx="3">
+            <a:schemeClr val="accent1"/>
+          </a:fillRef>
+          <a:effectRef idx="2">
+            <a:schemeClr val="accent1"/>
+          </a:effectRef>
+          <a:fontRef idx="minor">
+            <a:schemeClr val="lt1"/>
+          </a:fontRef>
+        </p:style>
+        <p:txBody>
+          <a:bodyPr rtlCol="0" anchor="ctr"/>
+          <a:lstStyle/>
+          <a:p/>
+        </p:txBody>
+      </p:sp>
+      <p:sp>
+        <p:nvSpPr>
+          <p:cNvPr id="17" name="Rounded Rectangle 16"/>
+          <p:cNvSpPr/>
+          <p:nvPr/>
+        </p:nvSpPr>
+        <p:spPr>
+          <a:xfrm>
+            <a:off x="841247" y="3057905"/>
+            <a:ext cx="365760" cy="365760"/>
+          </a:xfrm>
+          <a:prstGeom prst="roundRect">
+            <a:avLst>
+              <a:gd name="adj" fmla="val 32500"/>
+            </a:avLst>
+          </a:prstGeom>
+          <a:solidFill>
+            <a:srgbClr val="EFEAFA"/>
+          </a:solidFill>
+          <a:ln>
+            <a:noFill/>
+          </a:ln>
+          <a:effectLst/>
+        </p:spPr>
+        <p:style>
+          <a:lnRef idx="1">
+            <a:schemeClr val="accent1"/>
+          </a:lnRef>
+          <a:fillRef idx="3">
+            <a:schemeClr val="accent1"/>
+          </a:fillRef>
+          <a:effectRef idx="2">
+            <a:schemeClr val="accent1"/>
+          </a:effectRef>
+          <a:fontRef idx="minor">
+            <a:schemeClr val="lt1"/>
+          </a:fontRef>
+        </p:style>
+        <p:txBody>
+          <a:bodyPr rtlCol="0" anchor="ctr"/>
+          <a:lstStyle/>
+          <a:p/>
+        </p:txBody>
+      </p:sp>
+      <p:sp>
+        <p:nvSpPr>
+          <p:cNvPr id="18" name="TextBox 17"/>
+          <p:cNvSpPr txBox="1"/>
+          <p:nvPr/>
+        </p:nvSpPr>
+        <p:spPr>
+          <a:xfrm>
+            <a:off x="841247" y="3121913"/>
+            <a:ext cx="365760" cy="256032"/>
+          </a:xfrm>
+          <a:prstGeom prst="rect">
+            <a:avLst/>
+          </a:prstGeom>
+          <a:noFill/>
+        </p:spPr>
+        <p:txBody>
+          <a:bodyPr wrap="square" lIns="0" rIns="0" tIns="0" bIns="0" anchor="t">
+            <a:spAutoFit/>
+          </a:bodyPr>
+          <a:lstStyle/>
+          <a:p>
+            <a:pPr algn="ctr">
+              <a:lnSpc>
+                <a:spcPct val="135000"/>
+              </a:lnSpc>
+            </a:pPr>
+            <a:r>
+              <a:rPr sz="1500" b="1" i="0">
+                <a:solidFill>
+                  <a:srgbClr val="6B4FBB"/>
+                </a:solidFill>
+                <a:latin typeface="Verdana"/>
+              </a:rPr>
+              <a:t>3</a:t>
+            </a:r>
+          </a:p>
+        </p:txBody>
+      </p:sp>
+      <p:sp>
+        <p:nvSpPr>
+          <p:cNvPr id="19" name="TextBox 18"/>
+          <p:cNvSpPr txBox="1"/>
+          <p:nvPr/>
+        </p:nvSpPr>
+        <p:spPr>
+          <a:xfrm>
+            <a:off x="1344168" y="3071876"/>
+            <a:ext cx="4504791" cy="374396"/>
+          </a:xfrm>
+          <a:prstGeom prst="rect">
+            <a:avLst/>
+          </a:prstGeom>
+          <a:noFill/>
+        </p:spPr>
+        <p:txBody>
+          <a:bodyPr wrap="square" lIns="0" rIns="0" tIns="0" bIns="0" anchor="t">
+            <a:spAutoFit/>
+          </a:bodyPr>
+          <a:lstStyle/>
+          <a:p>
+            <a:pPr algn="l">
+              <a:lnSpc>
+                <a:spcPct val="140000"/>
+              </a:lnSpc>
+            </a:pPr>
+            <a:r>
+              <a:rPr sz="1900" b="0" i="0">
+                <a:solidFill>
+                  <a:srgbClr val="3A3D40"/>
+                </a:solidFill>
+                <a:latin typeface="Verdana"/>
+              </a:rPr>
+              <a:t>choisis   </a:t>
+            </a:r>
+            <a:r>
+              <a:rPr sz="1900" b="1" i="0">
+                <a:solidFill>
+                  <a:srgbClr val="07734A"/>
+                </a:solidFill>
+                <a:latin typeface="Verdana"/>
+              </a:rPr>
+              <a:t>» le son « ch »</a:t>
+            </a:r>
+          </a:p>
+        </p:txBody>
+      </p:sp>
+      <p:sp>
+        <p:nvSpPr>
+          <p:cNvPr id="20" name="Rounded Rectangle 19"/>
+          <p:cNvSpPr/>
+          <p:nvPr/>
+        </p:nvSpPr>
+        <p:spPr>
+          <a:xfrm>
+            <a:off x="6159855" y="2916428"/>
+            <a:ext cx="5464911" cy="648716"/>
+          </a:xfrm>
+          <a:prstGeom prst="roundRect">
+            <a:avLst>
+              <a:gd name="adj" fmla="val 22552"/>
+            </a:avLst>
+          </a:prstGeom>
+          <a:solidFill>
+            <a:srgbClr val="E6F5EE"/>
+          </a:solidFill>
+          <a:ln w="12700">
+            <a:solidFill>
+              <a:srgbClr val="EAEAE8"/>
+            </a:solidFill>
+          </a:ln>
+          <a:effectLst/>
+        </p:spPr>
+        <p:style>
+          <a:lnRef idx="1">
+            <a:schemeClr val="accent1"/>
+          </a:lnRef>
+          <a:fillRef idx="3">
+            <a:schemeClr val="accent1"/>
+          </a:fillRef>
+          <a:effectRef idx="2">
+            <a:schemeClr val="accent1"/>
+          </a:effectRef>
+          <a:fontRef idx="minor">
+            <a:schemeClr val="lt1"/>
+          </a:fontRef>
+        </p:style>
+        <p:txBody>
+          <a:bodyPr rtlCol="0" anchor="ctr"/>
+          <a:lstStyle/>
+          <a:p/>
+        </p:txBody>
+      </p:sp>
+      <p:sp>
+        <p:nvSpPr>
+          <p:cNvPr id="21" name="Rounded Rectangle 20"/>
+          <p:cNvSpPr/>
+          <p:nvPr/>
+        </p:nvSpPr>
+        <p:spPr>
+          <a:xfrm>
+            <a:off x="6434175" y="3057905"/>
+            <a:ext cx="365760" cy="365760"/>
+          </a:xfrm>
+          <a:prstGeom prst="roundRect">
+            <a:avLst>
+              <a:gd name="adj" fmla="val 32500"/>
+            </a:avLst>
+          </a:prstGeom>
+          <a:solidFill>
+            <a:srgbClr val="EFEAFA"/>
+          </a:solidFill>
+          <a:ln>
+            <a:noFill/>
+          </a:ln>
+          <a:effectLst/>
+        </p:spPr>
+        <p:style>
+          <a:lnRef idx="1">
+            <a:schemeClr val="accent1"/>
+          </a:lnRef>
+          <a:fillRef idx="3">
+            <a:schemeClr val="accent1"/>
+          </a:fillRef>
+          <a:effectRef idx="2">
+            <a:schemeClr val="accent1"/>
+          </a:effectRef>
+          <a:fontRef idx="minor">
+            <a:schemeClr val="lt1"/>
+          </a:fontRef>
+        </p:style>
+        <p:txBody>
+          <a:bodyPr rtlCol="0" anchor="ctr"/>
+          <a:lstStyle/>
+          <a:p/>
+        </p:txBody>
+      </p:sp>
+      <p:sp>
+        <p:nvSpPr>
+          <p:cNvPr id="22" name="TextBox 21"/>
+          <p:cNvSpPr txBox="1"/>
+          <p:nvPr/>
+        </p:nvSpPr>
+        <p:spPr>
+          <a:xfrm>
+            <a:off x="6434175" y="3121913"/>
+            <a:ext cx="365760" cy="256032"/>
+          </a:xfrm>
+          <a:prstGeom prst="rect">
+            <a:avLst/>
+          </a:prstGeom>
+          <a:noFill/>
+        </p:spPr>
+        <p:txBody>
+          <a:bodyPr wrap="square" lIns="0" rIns="0" tIns="0" bIns="0" anchor="t">
+            <a:spAutoFit/>
+          </a:bodyPr>
+          <a:lstStyle/>
+          <a:p>
+            <a:pPr algn="ctr">
+              <a:lnSpc>
+                <a:spcPct val="135000"/>
+              </a:lnSpc>
+            </a:pPr>
+            <a:r>
+              <a:rPr sz="1500" b="1" i="0">
+                <a:solidFill>
+                  <a:srgbClr val="6B4FBB"/>
+                </a:solidFill>
+                <a:latin typeface="Verdana"/>
+              </a:rPr>
+              <a:t>4</a:t>
+            </a:r>
+          </a:p>
+        </p:txBody>
+      </p:sp>
+      <p:sp>
+        <p:nvSpPr>
+          <p:cNvPr id="23" name="TextBox 22"/>
+          <p:cNvSpPr txBox="1"/>
+          <p:nvPr/>
+        </p:nvSpPr>
+        <p:spPr>
+          <a:xfrm>
+            <a:off x="6937095" y="3071876"/>
+            <a:ext cx="4504791" cy="374396"/>
+          </a:xfrm>
+          <a:prstGeom prst="rect">
+            <a:avLst/>
+          </a:prstGeom>
+          <a:noFill/>
+        </p:spPr>
+        <p:txBody>
+          <a:bodyPr wrap="square" lIns="0" rIns="0" tIns="0" bIns="0" anchor="t">
+            <a:spAutoFit/>
+          </a:bodyPr>
+          <a:lstStyle/>
+          <a:p>
+            <a:pPr algn="l">
+              <a:lnSpc>
+                <a:spcPct val="140000"/>
+              </a:lnSpc>
+            </a:pPr>
+            <a:r>
+              <a:rPr sz="1900" b="0" i="0">
+                <a:solidFill>
+                  <a:srgbClr val="3A3D40"/>
+                </a:solidFill>
+                <a:latin typeface="Verdana"/>
+              </a:rPr>
+              <a:t>gens   </a:t>
+            </a:r>
+            <a:r>
+              <a:rPr sz="1900" b="1" i="0">
+                <a:solidFill>
+                  <a:srgbClr val="07734A"/>
+                </a:solidFill>
+                <a:latin typeface="Verdana"/>
+              </a:rPr>
+              <a:t>» le son « j »</a:t>
+            </a:r>
+          </a:p>
+        </p:txBody>
+      </p:sp>
+      <p:sp>
+        <p:nvSpPr>
+          <p:cNvPr id="24" name="Rounded Rectangle 23"/>
+          <p:cNvSpPr/>
+          <p:nvPr/>
+        </p:nvSpPr>
+        <p:spPr>
+          <a:xfrm>
+            <a:off x="566928" y="3693160"/>
+            <a:ext cx="5464911" cy="648716"/>
+          </a:xfrm>
+          <a:prstGeom prst="roundRect">
+            <a:avLst>
+              <a:gd name="adj" fmla="val 22552"/>
+            </a:avLst>
+          </a:prstGeom>
+          <a:solidFill>
+            <a:srgbClr val="E6F5EE"/>
+          </a:solidFill>
+          <a:ln w="12700">
+            <a:solidFill>
+              <a:srgbClr val="EAEAE8"/>
+            </a:solidFill>
+          </a:ln>
+          <a:effectLst/>
+        </p:spPr>
+        <p:style>
+          <a:lnRef idx="1">
+            <a:schemeClr val="accent1"/>
+          </a:lnRef>
+          <a:fillRef idx="3">
+            <a:schemeClr val="accent1"/>
+          </a:fillRef>
+          <a:effectRef idx="2">
+            <a:schemeClr val="accent1"/>
+          </a:effectRef>
+          <a:fontRef idx="minor">
+            <a:schemeClr val="lt1"/>
+          </a:fontRef>
+        </p:style>
+        <p:txBody>
+          <a:bodyPr rtlCol="0" anchor="ctr"/>
+          <a:lstStyle/>
+          <a:p/>
+        </p:txBody>
+      </p:sp>
+      <p:sp>
+        <p:nvSpPr>
+          <p:cNvPr id="25" name="Rounded Rectangle 24"/>
+          <p:cNvSpPr/>
+          <p:nvPr/>
+        </p:nvSpPr>
+        <p:spPr>
+          <a:xfrm>
+            <a:off x="841247" y="3834638"/>
+            <a:ext cx="365760" cy="365760"/>
+          </a:xfrm>
+          <a:prstGeom prst="roundRect">
+            <a:avLst>
+              <a:gd name="adj" fmla="val 32500"/>
+            </a:avLst>
+          </a:prstGeom>
+          <a:solidFill>
+            <a:srgbClr val="EFEAFA"/>
+          </a:solidFill>
+          <a:ln>
+            <a:noFill/>
+          </a:ln>
+          <a:effectLst/>
+        </p:spPr>
+        <p:style>
+          <a:lnRef idx="1">
+            <a:schemeClr val="accent1"/>
+          </a:lnRef>
+          <a:fillRef idx="3">
+            <a:schemeClr val="accent1"/>
+          </a:fillRef>
+          <a:effectRef idx="2">
+            <a:schemeClr val="accent1"/>
+          </a:effectRef>
+          <a:fontRef idx="minor">
+            <a:schemeClr val="lt1"/>
+          </a:fontRef>
+        </p:style>
+        <p:txBody>
+          <a:bodyPr rtlCol="0" anchor="ctr"/>
+          <a:lstStyle/>
+          <a:p/>
+        </p:txBody>
+      </p:sp>
+      <p:sp>
+        <p:nvSpPr>
+          <p:cNvPr id="26" name="TextBox 25"/>
+          <p:cNvSpPr txBox="1"/>
+          <p:nvPr/>
+        </p:nvSpPr>
+        <p:spPr>
+          <a:xfrm>
+            <a:off x="841247" y="3898646"/>
+            <a:ext cx="365760" cy="256032"/>
+          </a:xfrm>
+          <a:prstGeom prst="rect">
+            <a:avLst/>
+          </a:prstGeom>
+          <a:noFill/>
+        </p:spPr>
+        <p:txBody>
+          <a:bodyPr wrap="square" lIns="0" rIns="0" tIns="0" bIns="0" anchor="t">
+            <a:spAutoFit/>
+          </a:bodyPr>
+          <a:lstStyle/>
+          <a:p>
+            <a:pPr algn="ctr">
+              <a:lnSpc>
+                <a:spcPct val="135000"/>
+              </a:lnSpc>
+            </a:pPr>
+            <a:r>
+              <a:rPr sz="1500" b="1" i="0">
+                <a:solidFill>
+                  <a:srgbClr val="6B4FBB"/>
+                </a:solidFill>
+                <a:latin typeface="Verdana"/>
+              </a:rPr>
+              <a:t>5</a:t>
+            </a:r>
+          </a:p>
+        </p:txBody>
+      </p:sp>
+      <p:sp>
+        <p:nvSpPr>
+          <p:cNvPr id="27" name="TextBox 26"/>
+          <p:cNvSpPr txBox="1"/>
+          <p:nvPr/>
+        </p:nvSpPr>
+        <p:spPr>
+          <a:xfrm>
+            <a:off x="1344168" y="3848608"/>
+            <a:ext cx="4504791" cy="374396"/>
+          </a:xfrm>
+          <a:prstGeom prst="rect">
+            <a:avLst/>
+          </a:prstGeom>
+          <a:noFill/>
+        </p:spPr>
+        <p:txBody>
+          <a:bodyPr wrap="square" lIns="0" rIns="0" tIns="0" bIns="0" anchor="t">
+            <a:spAutoFit/>
+          </a:bodyPr>
+          <a:lstStyle/>
+          <a:p>
+            <a:pPr algn="l">
+              <a:lnSpc>
+                <a:spcPct val="140000"/>
+              </a:lnSpc>
+            </a:pPr>
+            <a:r>
+              <a:rPr sz="1900" b="0" i="0">
+                <a:solidFill>
+                  <a:srgbClr val="3A3D40"/>
+                </a:solidFill>
+                <a:latin typeface="Verdana"/>
+              </a:rPr>
+              <a:t>chaîne   </a:t>
+            </a:r>
+            <a:r>
+              <a:rPr sz="1900" b="1" i="0">
+                <a:solidFill>
+                  <a:srgbClr val="07734A"/>
+                </a:solidFill>
+                <a:latin typeface="Verdana"/>
+              </a:rPr>
+              <a:t>» le son « ch »</a:t>
+            </a:r>
+          </a:p>
+        </p:txBody>
+      </p:sp>
+      <p:sp>
+        <p:nvSpPr>
+          <p:cNvPr id="28" name="Rounded Rectangle 27"/>
+          <p:cNvSpPr/>
+          <p:nvPr/>
+        </p:nvSpPr>
+        <p:spPr>
+          <a:xfrm>
+            <a:off x="6159855" y="3693160"/>
+            <a:ext cx="5464911" cy="648716"/>
+          </a:xfrm>
+          <a:prstGeom prst="roundRect">
+            <a:avLst>
+              <a:gd name="adj" fmla="val 22552"/>
+            </a:avLst>
+          </a:prstGeom>
+          <a:solidFill>
+            <a:srgbClr val="E6F5EE"/>
+          </a:solidFill>
+          <a:ln w="12700">
+            <a:solidFill>
+              <a:srgbClr val="EAEAE8"/>
+            </a:solidFill>
+          </a:ln>
+          <a:effectLst/>
+        </p:spPr>
+        <p:style>
+          <a:lnRef idx="1">
+            <a:schemeClr val="accent1"/>
+          </a:lnRef>
+          <a:fillRef idx="3">
+            <a:schemeClr val="accent1"/>
+          </a:fillRef>
+          <a:effectRef idx="2">
+            <a:schemeClr val="accent1"/>
+          </a:effectRef>
+          <a:fontRef idx="minor">
+            <a:schemeClr val="lt1"/>
+          </a:fontRef>
+        </p:style>
+        <p:txBody>
+          <a:bodyPr rtlCol="0" anchor="ctr"/>
+          <a:lstStyle/>
+          <a:p/>
+        </p:txBody>
+      </p:sp>
+      <p:sp>
+        <p:nvSpPr>
+          <p:cNvPr id="29" name="Rounded Rectangle 28"/>
+          <p:cNvSpPr/>
+          <p:nvPr/>
+        </p:nvSpPr>
+        <p:spPr>
+          <a:xfrm>
+            <a:off x="6434175" y="3834638"/>
+            <a:ext cx="365760" cy="365760"/>
+          </a:xfrm>
+          <a:prstGeom prst="roundRect">
+            <a:avLst>
+              <a:gd name="adj" fmla="val 32500"/>
+            </a:avLst>
+          </a:prstGeom>
+          <a:solidFill>
+            <a:srgbClr val="EFEAFA"/>
+          </a:solidFill>
+          <a:ln>
+            <a:noFill/>
+          </a:ln>
+          <a:effectLst/>
+        </p:spPr>
+        <p:style>
+          <a:lnRef idx="1">
+            <a:schemeClr val="accent1"/>
+          </a:lnRef>
+          <a:fillRef idx="3">
+            <a:schemeClr val="accent1"/>
+          </a:fillRef>
+          <a:effectRef idx="2">
+            <a:schemeClr val="accent1"/>
+          </a:effectRef>
+          <a:fontRef idx="minor">
+            <a:schemeClr val="lt1"/>
+          </a:fontRef>
+        </p:style>
+        <p:txBody>
+          <a:bodyPr rtlCol="0" anchor="ctr"/>
+          <a:lstStyle/>
+          <a:p/>
+        </p:txBody>
+      </p:sp>
+      <p:sp>
+        <p:nvSpPr>
+          <p:cNvPr id="30" name="TextBox 29"/>
+          <p:cNvSpPr txBox="1"/>
+          <p:nvPr/>
+        </p:nvSpPr>
+        <p:spPr>
+          <a:xfrm>
+            <a:off x="6434175" y="3898646"/>
+            <a:ext cx="365760" cy="256032"/>
+          </a:xfrm>
+          <a:prstGeom prst="rect">
+            <a:avLst/>
+          </a:prstGeom>
+          <a:noFill/>
+        </p:spPr>
+        <p:txBody>
+          <a:bodyPr wrap="square" lIns="0" rIns="0" tIns="0" bIns="0" anchor="t">
+            <a:spAutoFit/>
+          </a:bodyPr>
+          <a:lstStyle/>
+          <a:p>
+            <a:pPr algn="ctr">
+              <a:lnSpc>
+                <a:spcPct val="135000"/>
+              </a:lnSpc>
+            </a:pPr>
+            <a:r>
+              <a:rPr sz="1500" b="1" i="0">
+                <a:solidFill>
+                  <a:srgbClr val="6B4FBB"/>
+                </a:solidFill>
+                <a:latin typeface="Verdana"/>
+              </a:rPr>
+              <a:t>6</a:t>
+            </a:r>
+          </a:p>
+        </p:txBody>
+      </p:sp>
+      <p:sp>
+        <p:nvSpPr>
+          <p:cNvPr id="31" name="TextBox 30"/>
+          <p:cNvSpPr txBox="1"/>
+          <p:nvPr/>
+        </p:nvSpPr>
+        <p:spPr>
+          <a:xfrm>
+            <a:off x="6937095" y="3848608"/>
+            <a:ext cx="4504791" cy="374396"/>
+          </a:xfrm>
+          <a:prstGeom prst="rect">
+            <a:avLst/>
+          </a:prstGeom>
+          <a:noFill/>
+        </p:spPr>
+        <p:txBody>
+          <a:bodyPr wrap="square" lIns="0" rIns="0" tIns="0" bIns="0" anchor="t">
+            <a:spAutoFit/>
+          </a:bodyPr>
+          <a:lstStyle/>
+          <a:p>
+            <a:pPr algn="l">
+              <a:lnSpc>
+                <a:spcPct val="140000"/>
+              </a:lnSpc>
+            </a:pPr>
+            <a:r>
+              <a:rPr sz="1900" b="0" i="0">
+                <a:solidFill>
+                  <a:srgbClr val="3A3D40"/>
+                </a:solidFill>
+                <a:latin typeface="Verdana"/>
+              </a:rPr>
+              <a:t>justement   </a:t>
+            </a:r>
+            <a:r>
+              <a:rPr sz="1900" b="1" i="0">
+                <a:solidFill>
+                  <a:srgbClr val="07734A"/>
+                </a:solidFill>
+                <a:latin typeface="Verdana"/>
+              </a:rPr>
+              <a:t>» le son « j »</a:t>
+            </a:r>
+          </a:p>
+        </p:txBody>
+      </p:sp>
+      <p:sp>
+        <p:nvSpPr>
+          <p:cNvPr id="32" name="Rounded Rectangle 31"/>
+          <p:cNvSpPr/>
+          <p:nvPr/>
+        </p:nvSpPr>
+        <p:spPr>
+          <a:xfrm>
+            <a:off x="566928" y="4469892"/>
+            <a:ext cx="5464911" cy="648716"/>
+          </a:xfrm>
+          <a:prstGeom prst="roundRect">
+            <a:avLst>
+              <a:gd name="adj" fmla="val 22552"/>
+            </a:avLst>
+          </a:prstGeom>
+          <a:solidFill>
+            <a:srgbClr val="E6F5EE"/>
+          </a:solidFill>
+          <a:ln w="12700">
+            <a:solidFill>
+              <a:srgbClr val="EAEAE8"/>
+            </a:solidFill>
+          </a:ln>
+          <a:effectLst/>
+        </p:spPr>
+        <p:style>
+          <a:lnRef idx="1">
+            <a:schemeClr val="accent1"/>
+          </a:lnRef>
+          <a:fillRef idx="3">
+            <a:schemeClr val="accent1"/>
+          </a:fillRef>
+          <a:effectRef idx="2">
+            <a:schemeClr val="accent1"/>
+          </a:effectRef>
+          <a:fontRef idx="minor">
+            <a:schemeClr val="lt1"/>
+          </a:fontRef>
+        </p:style>
+        <p:txBody>
+          <a:bodyPr rtlCol="0" anchor="ctr"/>
+          <a:lstStyle/>
+          <a:p/>
+        </p:txBody>
+      </p:sp>
+      <p:sp>
+        <p:nvSpPr>
+          <p:cNvPr id="33" name="Rounded Rectangle 32"/>
+          <p:cNvSpPr/>
+          <p:nvPr/>
+        </p:nvSpPr>
+        <p:spPr>
+          <a:xfrm>
+            <a:off x="841247" y="4611370"/>
+            <a:ext cx="365760" cy="365760"/>
+          </a:xfrm>
+          <a:prstGeom prst="roundRect">
+            <a:avLst>
+              <a:gd name="adj" fmla="val 32500"/>
+            </a:avLst>
+          </a:prstGeom>
+          <a:solidFill>
+            <a:srgbClr val="EFEAFA"/>
+          </a:solidFill>
+          <a:ln>
+            <a:noFill/>
+          </a:ln>
+          <a:effectLst/>
+        </p:spPr>
+        <p:style>
+          <a:lnRef idx="1">
+            <a:schemeClr val="accent1"/>
+          </a:lnRef>
+          <a:fillRef idx="3">
+            <a:schemeClr val="accent1"/>
+          </a:fillRef>
+          <a:effectRef idx="2">
+            <a:schemeClr val="accent1"/>
+          </a:effectRef>
+          <a:fontRef idx="minor">
+            <a:schemeClr val="lt1"/>
+          </a:fontRef>
+        </p:style>
+        <p:txBody>
+          <a:bodyPr rtlCol="0" anchor="ctr"/>
+          <a:lstStyle/>
+          <a:p/>
+        </p:txBody>
+      </p:sp>
+      <p:sp>
+        <p:nvSpPr>
+          <p:cNvPr id="34" name="TextBox 33"/>
+          <p:cNvSpPr txBox="1"/>
+          <p:nvPr/>
+        </p:nvSpPr>
+        <p:spPr>
+          <a:xfrm>
+            <a:off x="841247" y="4675378"/>
+            <a:ext cx="365760" cy="256032"/>
+          </a:xfrm>
+          <a:prstGeom prst="rect">
+            <a:avLst/>
+          </a:prstGeom>
+          <a:noFill/>
+        </p:spPr>
+        <p:txBody>
+          <a:bodyPr wrap="square" lIns="0" rIns="0" tIns="0" bIns="0" anchor="t">
+            <a:spAutoFit/>
+          </a:bodyPr>
+          <a:lstStyle/>
+          <a:p>
+            <a:pPr algn="ctr">
+              <a:lnSpc>
+                <a:spcPct val="135000"/>
+              </a:lnSpc>
+            </a:pPr>
+            <a:r>
+              <a:rPr sz="1500" b="1" i="0">
+                <a:solidFill>
+                  <a:srgbClr val="6B4FBB"/>
+                </a:solidFill>
+                <a:latin typeface="Verdana"/>
+              </a:rPr>
+              <a:t>7</a:t>
+            </a:r>
+          </a:p>
+        </p:txBody>
+      </p:sp>
+      <p:sp>
+        <p:nvSpPr>
+          <p:cNvPr id="35" name="TextBox 34"/>
+          <p:cNvSpPr txBox="1"/>
+          <p:nvPr/>
+        </p:nvSpPr>
+        <p:spPr>
+          <a:xfrm>
+            <a:off x="1344168" y="4625340"/>
+            <a:ext cx="4504791" cy="374396"/>
+          </a:xfrm>
+          <a:prstGeom prst="rect">
+            <a:avLst/>
+          </a:prstGeom>
+          <a:noFill/>
+        </p:spPr>
+        <p:txBody>
+          <a:bodyPr wrap="square" lIns="0" rIns="0" tIns="0" bIns="0" anchor="t">
+            <a:spAutoFit/>
+          </a:bodyPr>
+          <a:lstStyle/>
+          <a:p>
+            <a:pPr algn="l">
+              <a:lnSpc>
+                <a:spcPct val="140000"/>
+              </a:lnSpc>
+            </a:pPr>
+            <a:r>
+              <a:rPr sz="1900" b="0" i="0">
+                <a:solidFill>
+                  <a:srgbClr val="3A3D40"/>
+                </a:solidFill>
+                <a:latin typeface="Verdana"/>
+              </a:rPr>
+              <a:t>déchirés   </a:t>
+            </a:r>
+            <a:r>
+              <a:rPr sz="1900" b="1" i="0">
+                <a:solidFill>
+                  <a:srgbClr val="07734A"/>
+                </a:solidFill>
+                <a:latin typeface="Verdana"/>
+              </a:rPr>
+              <a:t>» le son « ch »</a:t>
+            </a:r>
+          </a:p>
+        </p:txBody>
+      </p:sp>
+      <p:sp>
+        <p:nvSpPr>
+          <p:cNvPr id="36" name="Rounded Rectangle 35"/>
+          <p:cNvSpPr/>
+          <p:nvPr/>
+        </p:nvSpPr>
+        <p:spPr>
+          <a:xfrm>
+            <a:off x="6159855" y="4469892"/>
+            <a:ext cx="5464911" cy="648716"/>
+          </a:xfrm>
+          <a:prstGeom prst="roundRect">
+            <a:avLst>
+              <a:gd name="adj" fmla="val 22552"/>
+            </a:avLst>
+          </a:prstGeom>
+          <a:solidFill>
+            <a:srgbClr val="E6F5EE"/>
+          </a:solidFill>
+          <a:ln w="12700">
+            <a:solidFill>
+              <a:srgbClr val="EAEAE8"/>
+            </a:solidFill>
+          </a:ln>
+          <a:effectLst/>
+        </p:spPr>
+        <p:style>
+          <a:lnRef idx="1">
+            <a:schemeClr val="accent1"/>
+          </a:lnRef>
+          <a:fillRef idx="3">
+            <a:schemeClr val="accent1"/>
+          </a:fillRef>
+          <a:effectRef idx="2">
+            <a:schemeClr val="accent1"/>
+          </a:effectRef>
+          <a:fontRef idx="minor">
+            <a:schemeClr val="lt1"/>
+          </a:fontRef>
+        </p:style>
+        <p:txBody>
+          <a:bodyPr rtlCol="0" anchor="ctr"/>
+          <a:lstStyle/>
+          <a:p/>
+        </p:txBody>
+      </p:sp>
+      <p:sp>
+        <p:nvSpPr>
+          <p:cNvPr id="37" name="Rounded Rectangle 36"/>
+          <p:cNvSpPr/>
+          <p:nvPr/>
+        </p:nvSpPr>
+        <p:spPr>
+          <a:xfrm>
+            <a:off x="6434175" y="4611370"/>
+            <a:ext cx="365760" cy="365760"/>
+          </a:xfrm>
+          <a:prstGeom prst="roundRect">
+            <a:avLst>
+              <a:gd name="adj" fmla="val 32500"/>
+            </a:avLst>
+          </a:prstGeom>
+          <a:solidFill>
+            <a:srgbClr val="EFEAFA"/>
+          </a:solidFill>
+          <a:ln>
+            <a:noFill/>
+          </a:ln>
+          <a:effectLst/>
+        </p:spPr>
+        <p:style>
+          <a:lnRef idx="1">
+            <a:schemeClr val="accent1"/>
+          </a:lnRef>
+          <a:fillRef idx="3">
+            <a:schemeClr val="accent1"/>
+          </a:fillRef>
+          <a:effectRef idx="2">
+            <a:schemeClr val="accent1"/>
+          </a:effectRef>
+          <a:fontRef idx="minor">
+            <a:schemeClr val="lt1"/>
+          </a:fontRef>
+        </p:style>
+        <p:txBody>
+          <a:bodyPr rtlCol="0" anchor="ctr"/>
+          <a:lstStyle/>
+          <a:p/>
+        </p:txBody>
+      </p:sp>
+      <p:sp>
+        <p:nvSpPr>
+          <p:cNvPr id="38" name="TextBox 37"/>
+          <p:cNvSpPr txBox="1"/>
+          <p:nvPr/>
+        </p:nvSpPr>
+        <p:spPr>
+          <a:xfrm>
+            <a:off x="6434175" y="4675378"/>
+            <a:ext cx="365760" cy="256032"/>
+          </a:xfrm>
+          <a:prstGeom prst="rect">
+            <a:avLst/>
+          </a:prstGeom>
+          <a:noFill/>
+        </p:spPr>
+        <p:txBody>
+          <a:bodyPr wrap="square" lIns="0" rIns="0" tIns="0" bIns="0" anchor="t">
+            <a:spAutoFit/>
+          </a:bodyPr>
+          <a:lstStyle/>
+          <a:p>
+            <a:pPr algn="ctr">
+              <a:lnSpc>
+                <a:spcPct val="135000"/>
+              </a:lnSpc>
+            </a:pPr>
+            <a:r>
+              <a:rPr sz="1500" b="1" i="0">
+                <a:solidFill>
+                  <a:srgbClr val="6B4FBB"/>
+                </a:solidFill>
+                <a:latin typeface="Verdana"/>
+              </a:rPr>
+              <a:t>8</a:t>
+            </a:r>
+          </a:p>
+        </p:txBody>
+      </p:sp>
+      <p:sp>
+        <p:nvSpPr>
+          <p:cNvPr id="39" name="TextBox 38"/>
+          <p:cNvSpPr txBox="1"/>
+          <p:nvPr/>
+        </p:nvSpPr>
+        <p:spPr>
+          <a:xfrm>
+            <a:off x="6937095" y="4625340"/>
+            <a:ext cx="4504791" cy="374396"/>
+          </a:xfrm>
+          <a:prstGeom prst="rect">
+            <a:avLst/>
+          </a:prstGeom>
+          <a:noFill/>
+        </p:spPr>
+        <p:txBody>
+          <a:bodyPr wrap="square" lIns="0" rIns="0" tIns="0" bIns="0" anchor="t">
+            <a:spAutoFit/>
+          </a:bodyPr>
+          <a:lstStyle/>
+          <a:p>
+            <a:pPr algn="l">
+              <a:lnSpc>
+                <a:spcPct val="140000"/>
+              </a:lnSpc>
+            </a:pPr>
+            <a:r>
+              <a:rPr sz="1900" b="0" i="0">
+                <a:solidFill>
+                  <a:srgbClr val="3A3D40"/>
+                </a:solidFill>
+                <a:latin typeface="Verdana"/>
+              </a:rPr>
+              <a:t>rejoindre   </a:t>
+            </a:r>
+            <a:r>
+              <a:rPr sz="1900" b="1" i="0">
+                <a:solidFill>
+                  <a:srgbClr val="07734A"/>
+                </a:solidFill>
+                <a:latin typeface="Verdana"/>
+              </a:rPr>
+              <a:t>» le son « j »</a:t>
+            </a:r>
+          </a:p>
+        </p:txBody>
+      </p:sp>
+    </p:spTree>
+  </p:cSld>
+  <p:clrMapOvr>
+    <a:masterClrMapping/>
+  </p:clrMapOvr>
+</p:sld>
+</file>
+
+<file path=ppt/slides/slide22.xml><?xml version="1.0" encoding="utf-8"?>
+<p:sld xmlns:a="http://schemas.openxmlformats.org/drawingml/2006/main" xmlns:p="http://schemas.openxmlformats.org/presentationml/2006/main" xmlns:r="http://schemas.openxmlformats.org/officeDocument/2006/relationships">
+  <p:cSld>
+    <p:spTree>
+      <p:nvGrpSpPr>
+        <p:cNvPr id="1" name=""/>
+        <p:cNvGrpSpPr/>
+        <p:nvPr/>
+      </p:nvGrpSpPr>
+      <p:grpSpPr/>
+      <p:sp>
+        <p:nvSpPr>
+          <p:cNvPr id="2" name="Rectangle 1"/>
+          <p:cNvSpPr/>
+          <p:nvPr/>
+        </p:nvSpPr>
+        <p:spPr>
+          <a:xfrm>
+            <a:off x="0" y="0"/>
+            <a:ext cx="12191695" cy="6858000"/>
+          </a:xfrm>
+          <a:prstGeom prst="rect">
+            <a:avLst/>
+          </a:prstGeom>
+          <a:solidFill>
+            <a:srgbClr val="F7F7F5"/>
+          </a:solidFill>
+          <a:ln>
+            <a:noFill/>
+          </a:ln>
+          <a:effectLst/>
+        </p:spPr>
+        <p:style>
+          <a:lnRef idx="1">
+            <a:schemeClr val="accent1"/>
+          </a:lnRef>
+          <a:fillRef idx="3">
+            <a:schemeClr val="accent1"/>
+          </a:fillRef>
+          <a:effectRef idx="2">
+            <a:schemeClr val="accent1"/>
+          </a:effectRef>
+          <a:fontRef idx="minor">
+            <a:schemeClr val="lt1"/>
+          </a:fontRef>
+        </p:style>
+        <p:txBody>
+          <a:bodyPr rtlCol="0" anchor="ctr"/>
+          <a:lstStyle/>
+          <a:p/>
+        </p:txBody>
+      </p:sp>
+      <p:sp>
+        <p:nvSpPr>
+          <p:cNvPr id="3" name="TextBox 2"/>
+          <p:cNvSpPr txBox="1"/>
+          <p:nvPr/>
+        </p:nvSpPr>
+        <p:spPr>
+          <a:xfrm>
+            <a:off x="566928" y="6355080"/>
+            <a:ext cx="6400800" cy="219456"/>
+          </a:xfrm>
+          <a:prstGeom prst="rect">
+            <a:avLst/>
+          </a:prstGeom>
+          <a:noFill/>
+        </p:spPr>
+        <p:txBody>
+          <a:bodyPr wrap="square" lIns="0" rIns="0" tIns="0" bIns="0" anchor="t">
+            <a:spAutoFit/>
+          </a:bodyPr>
+          <a:lstStyle/>
+          <a:p>
+            <a:pPr algn="l">
+              <a:lnSpc>
+                <a:spcPct val="135000"/>
+              </a:lnSpc>
+            </a:pPr>
+            <a:r>
+              <a:rPr sz="1200" b="0" i="0">
+                <a:solidFill>
+                  <a:srgbClr val="6E7175"/>
+                </a:solidFill>
+                <a:latin typeface="Verdana"/>
+              </a:rPr>
+              <a:t>A2 · Des publicités efficaces</a:t>
+            </a:r>
+          </a:p>
+        </p:txBody>
+      </p:sp>
+      <p:sp>
+        <p:nvSpPr>
+          <p:cNvPr id="4" name="TextBox 3"/>
+          <p:cNvSpPr txBox="1"/>
+          <p:nvPr/>
+        </p:nvSpPr>
+        <p:spPr>
+          <a:xfrm>
+            <a:off x="10710367" y="6355080"/>
+            <a:ext cx="914400" cy="219456"/>
+          </a:xfrm>
+          <a:prstGeom prst="rect">
+            <a:avLst/>
+          </a:prstGeom>
+          <a:noFill/>
+        </p:spPr>
+        <p:txBody>
+          <a:bodyPr wrap="square" lIns="0" rIns="0" tIns="0" bIns="0" anchor="t">
+            <a:spAutoFit/>
+          </a:bodyPr>
+          <a:lstStyle/>
+          <a:p>
+            <a:pPr algn="r">
+              <a:lnSpc>
+                <a:spcPct val="135000"/>
+              </a:lnSpc>
+            </a:pPr>
+            <a:r>
+              <a:rPr sz="1200" b="0" i="0">
+                <a:solidFill>
+                  <a:srgbClr val="6E7175"/>
+                </a:solidFill>
+                <a:latin typeface="Verdana"/>
+              </a:rPr>
+              <a:t>22</a:t>
+            </a:r>
+          </a:p>
+        </p:txBody>
+      </p:sp>
+      <p:sp>
+        <p:nvSpPr>
+          <p:cNvPr id="5" name="TextBox 4"/>
+          <p:cNvSpPr txBox="1"/>
+          <p:nvPr/>
+        </p:nvSpPr>
+        <p:spPr>
+          <a:xfrm>
+            <a:off x="566928" y="420624"/>
+            <a:ext cx="11057839" cy="237744"/>
+          </a:xfrm>
+          <a:prstGeom prst="rect">
+            <a:avLst/>
+          </a:prstGeom>
+          <a:noFill/>
+        </p:spPr>
+        <p:txBody>
+          <a:bodyPr wrap="square" lIns="0" rIns="0" tIns="0" bIns="0" anchor="t">
+            <a:spAutoFit/>
+          </a:bodyPr>
+          <a:lstStyle/>
+          <a:p>
+            <a:pPr algn="l">
+              <a:lnSpc>
+                <a:spcPct val="135000"/>
+              </a:lnSpc>
+            </a:pPr>
+            <a:r>
+              <a:rPr sz="1300" b="1" i="0" spc="156">
+                <a:solidFill>
+                  <a:srgbClr val="6B4FBB"/>
+                </a:solidFill>
+                <a:latin typeface="Verdana"/>
+              </a:rPr>
+              <a:t>PRATIQUE · 6 DE 6</a:t>
+            </a:r>
+          </a:p>
+        </p:txBody>
+      </p:sp>
+      <p:sp>
+        <p:nvSpPr>
+          <p:cNvPr id="6" name="TextBox 5"/>
+          <p:cNvSpPr txBox="1"/>
+          <p:nvPr/>
+        </p:nvSpPr>
+        <p:spPr>
+          <a:xfrm>
+            <a:off x="566928" y="749808"/>
+            <a:ext cx="11057839" cy="877824"/>
+          </a:xfrm>
+          <a:prstGeom prst="rect">
+            <a:avLst/>
+          </a:prstGeom>
+          <a:noFill/>
+        </p:spPr>
+        <p:txBody>
+          <a:bodyPr wrap="square" lIns="0" rIns="0" tIns="0" bIns="0" anchor="t">
+            <a:spAutoFit/>
+          </a:bodyPr>
+          <a:lstStyle/>
+          <a:p>
+            <a:pPr algn="l">
+              <a:lnSpc>
+                <a:spcPct val="115000"/>
+              </a:lnSpc>
+            </a:pPr>
+            <a:r>
+              <a:rPr sz="3400" b="1" i="0">
+                <a:solidFill>
+                  <a:srgbClr val="17181A"/>
+                </a:solidFill>
+                <a:latin typeface="Verdana"/>
+              </a:rPr>
+              <a:t>Trois phrases de capsule à lire à voix haute</a:t>
+            </a:r>
+          </a:p>
+        </p:txBody>
+      </p:sp>
+      <p:sp>
+        <p:nvSpPr>
+          <p:cNvPr id="7" name="TextBox 6"/>
+          <p:cNvSpPr txBox="1"/>
+          <p:nvPr/>
+        </p:nvSpPr>
+        <p:spPr>
+          <a:xfrm>
+            <a:off x="566928" y="1645920"/>
+            <a:ext cx="11057839" cy="329184"/>
+          </a:xfrm>
+          <a:prstGeom prst="rect">
+            <a:avLst/>
+          </a:prstGeom>
+          <a:noFill/>
+        </p:spPr>
+        <p:txBody>
+          <a:bodyPr wrap="square" lIns="0" rIns="0" tIns="0" bIns="0" anchor="t">
+            <a:spAutoFit/>
+          </a:bodyPr>
+          <a:lstStyle/>
+          <a:p>
+            <a:pPr algn="l">
+              <a:lnSpc>
+                <a:spcPct val="135000"/>
+              </a:lnSpc>
+            </a:pPr>
+            <a:r>
+              <a:rPr sz="1800" b="0" i="0">
+                <a:solidFill>
+                  <a:srgbClr val="6E7175"/>
+                </a:solidFill>
+                <a:latin typeface="Verdana"/>
+              </a:rPr>
+              <a:t>Chacun lit une phrase. Le groupe ne corrige que les « ch » et les « j ».</a:t>
+            </a:r>
+          </a:p>
+        </p:txBody>
+      </p:sp>
+      <p:sp>
+        <p:nvSpPr>
+          <p:cNvPr id="8" name="Rounded Rectangle 7"/>
+          <p:cNvSpPr/>
+          <p:nvPr/>
+        </p:nvSpPr>
+        <p:spPr>
+          <a:xfrm>
+            <a:off x="566928" y="2139696"/>
+            <a:ext cx="11057839" cy="648716"/>
+          </a:xfrm>
+          <a:prstGeom prst="roundRect">
+            <a:avLst>
+              <a:gd name="adj" fmla="val 22552"/>
+            </a:avLst>
+          </a:prstGeom>
+          <a:solidFill>
+            <a:srgbClr val="FFFFFF"/>
+          </a:solidFill>
+          <a:ln w="12700">
+            <a:solidFill>
+              <a:srgbClr val="EAEAE8"/>
+            </a:solidFill>
+          </a:ln>
+          <a:effectLst/>
+        </p:spPr>
+        <p:style>
+          <a:lnRef idx="1">
+            <a:schemeClr val="accent1"/>
+          </a:lnRef>
+          <a:fillRef idx="3">
+            <a:schemeClr val="accent1"/>
+          </a:fillRef>
+          <a:effectRef idx="2">
+            <a:schemeClr val="accent1"/>
+          </a:effectRef>
+          <a:fontRef idx="minor">
+            <a:schemeClr val="lt1"/>
+          </a:fontRef>
+        </p:style>
+        <p:txBody>
+          <a:bodyPr rtlCol="0" anchor="ctr"/>
+          <a:lstStyle/>
+          <a:p/>
+        </p:txBody>
+      </p:sp>
+      <p:sp>
+        <p:nvSpPr>
+          <p:cNvPr id="9" name="Rounded Rectangle 8"/>
+          <p:cNvSpPr/>
+          <p:nvPr/>
+        </p:nvSpPr>
+        <p:spPr>
+          <a:xfrm>
+            <a:off x="841247" y="2281174"/>
+            <a:ext cx="365760" cy="365760"/>
+          </a:xfrm>
+          <a:prstGeom prst="roundRect">
+            <a:avLst>
+              <a:gd name="adj" fmla="val 32500"/>
+            </a:avLst>
+          </a:prstGeom>
+          <a:solidFill>
+            <a:srgbClr val="EFEAFA"/>
+          </a:solidFill>
+          <a:ln>
+            <a:noFill/>
+          </a:ln>
+          <a:effectLst/>
+        </p:spPr>
+        <p:style>
+          <a:lnRef idx="1">
+            <a:schemeClr val="accent1"/>
+          </a:lnRef>
+          <a:fillRef idx="3">
+            <a:schemeClr val="accent1"/>
+          </a:fillRef>
+          <a:effectRef idx="2">
+            <a:schemeClr val="accent1"/>
+          </a:effectRef>
+          <a:fontRef idx="minor">
+            <a:schemeClr val="lt1"/>
+          </a:fontRef>
+        </p:style>
+        <p:txBody>
+          <a:bodyPr rtlCol="0" anchor="ctr"/>
+          <a:lstStyle/>
+          <a:p/>
+        </p:txBody>
+      </p:sp>
+      <p:sp>
+        <p:nvSpPr>
+          <p:cNvPr id="10" name="TextBox 9"/>
+          <p:cNvSpPr txBox="1"/>
+          <p:nvPr/>
+        </p:nvSpPr>
+        <p:spPr>
+          <a:xfrm>
+            <a:off x="841247" y="2345182"/>
+            <a:ext cx="365760" cy="256032"/>
+          </a:xfrm>
+          <a:prstGeom prst="rect">
+            <a:avLst/>
+          </a:prstGeom>
+          <a:noFill/>
+        </p:spPr>
+        <p:txBody>
+          <a:bodyPr wrap="square" lIns="0" rIns="0" tIns="0" bIns="0" anchor="t">
+            <a:spAutoFit/>
+          </a:bodyPr>
+          <a:lstStyle/>
+          <a:p>
+            <a:pPr algn="ctr">
+              <a:lnSpc>
+                <a:spcPct val="135000"/>
+              </a:lnSpc>
+            </a:pPr>
+            <a:r>
+              <a:rPr sz="1500" b="1" i="0">
+                <a:solidFill>
+                  <a:srgbClr val="6B4FBB"/>
+                </a:solidFill>
+                <a:latin typeface="Verdana"/>
+              </a:rPr>
+              <a:t>1</a:t>
+            </a:r>
+          </a:p>
+        </p:txBody>
+      </p:sp>
+      <p:sp>
+        <p:nvSpPr>
+          <p:cNvPr id="11" name="TextBox 10"/>
+          <p:cNvSpPr txBox="1"/>
+          <p:nvPr/>
+        </p:nvSpPr>
+        <p:spPr>
+          <a:xfrm>
+            <a:off x="1344168" y="2295144"/>
+            <a:ext cx="10097719" cy="374396"/>
+          </a:xfrm>
+          <a:prstGeom prst="rect">
+            <a:avLst/>
+          </a:prstGeom>
+          <a:noFill/>
+        </p:spPr>
+        <p:txBody>
+          <a:bodyPr wrap="square" lIns="0" rIns="0" tIns="0" bIns="0" anchor="t">
+            <a:spAutoFit/>
+          </a:bodyPr>
+          <a:lstStyle/>
+          <a:p>
+            <a:pPr algn="l">
+              <a:lnSpc>
+                <a:spcPct val="140000"/>
+              </a:lnSpc>
+            </a:pPr>
+            <a:r>
+              <a:rPr sz="1900" b="0" i="0">
+                <a:solidFill>
+                  <a:srgbClr val="3A3D40"/>
+                </a:solidFill>
+                <a:latin typeface="Verdana"/>
+              </a:rPr>
+              <a:t>Choisis une seule idée par capsule.</a:t>
+            </a:r>
+          </a:p>
+        </p:txBody>
+      </p:sp>
+      <p:sp>
+        <p:nvSpPr>
+          <p:cNvPr id="12" name="Rounded Rectangle 11"/>
+          <p:cNvSpPr/>
+          <p:nvPr/>
+        </p:nvSpPr>
+        <p:spPr>
+          <a:xfrm>
+            <a:off x="566928" y="2916428"/>
+            <a:ext cx="11057839" cy="648716"/>
+          </a:xfrm>
+          <a:prstGeom prst="roundRect">
+            <a:avLst>
+              <a:gd name="adj" fmla="val 22552"/>
+            </a:avLst>
+          </a:prstGeom>
+          <a:solidFill>
+            <a:srgbClr val="FFFFFF"/>
+          </a:solidFill>
+          <a:ln w="12700">
+            <a:solidFill>
+              <a:srgbClr val="EAEAE8"/>
+            </a:solidFill>
+          </a:ln>
+          <a:effectLst/>
+        </p:spPr>
+        <p:style>
+          <a:lnRef idx="1">
+            <a:schemeClr val="accent1"/>
+          </a:lnRef>
+          <a:fillRef idx="3">
+            <a:schemeClr val="accent1"/>
+          </a:fillRef>
+          <a:effectRef idx="2">
+            <a:schemeClr val="accent1"/>
+          </a:effectRef>
+          <a:fontRef idx="minor">
+            <a:schemeClr val="lt1"/>
+          </a:fontRef>
+        </p:style>
+        <p:txBody>
+          <a:bodyPr rtlCol="0" anchor="ctr"/>
+          <a:lstStyle/>
+          <a:p/>
+        </p:txBody>
+      </p:sp>
+      <p:sp>
+        <p:nvSpPr>
+          <p:cNvPr id="13" name="Rounded Rectangle 12"/>
+          <p:cNvSpPr/>
+          <p:nvPr/>
+        </p:nvSpPr>
+        <p:spPr>
+          <a:xfrm>
+            <a:off x="841247" y="3057905"/>
+            <a:ext cx="365760" cy="365760"/>
+          </a:xfrm>
+          <a:prstGeom prst="roundRect">
+            <a:avLst>
+              <a:gd name="adj" fmla="val 32500"/>
+            </a:avLst>
+          </a:prstGeom>
+          <a:solidFill>
+            <a:srgbClr val="EFEAFA"/>
+          </a:solidFill>
+          <a:ln>
+            <a:noFill/>
+          </a:ln>
+          <a:effectLst/>
+        </p:spPr>
+        <p:style>
+          <a:lnRef idx="1">
+            <a:schemeClr val="accent1"/>
+          </a:lnRef>
+          <a:fillRef idx="3">
+            <a:schemeClr val="accent1"/>
+          </a:fillRef>
+          <a:effectRef idx="2">
+            <a:schemeClr val="accent1"/>
+          </a:effectRef>
+          <a:fontRef idx="minor">
+            <a:schemeClr val="lt1"/>
+          </a:fontRef>
+        </p:style>
+        <p:txBody>
+          <a:bodyPr rtlCol="0" anchor="ctr"/>
+          <a:lstStyle/>
+          <a:p/>
+        </p:txBody>
+      </p:sp>
+      <p:sp>
+        <p:nvSpPr>
+          <p:cNvPr id="14" name="TextBox 13"/>
+          <p:cNvSpPr txBox="1"/>
+          <p:nvPr/>
+        </p:nvSpPr>
+        <p:spPr>
+          <a:xfrm>
+            <a:off x="841247" y="3121913"/>
+            <a:ext cx="365760" cy="256032"/>
+          </a:xfrm>
+          <a:prstGeom prst="rect">
+            <a:avLst/>
+          </a:prstGeom>
+          <a:noFill/>
+        </p:spPr>
+        <p:txBody>
+          <a:bodyPr wrap="square" lIns="0" rIns="0" tIns="0" bIns="0" anchor="t">
+            <a:spAutoFit/>
+          </a:bodyPr>
+          <a:lstStyle/>
+          <a:p>
+            <a:pPr algn="ctr">
+              <a:lnSpc>
+                <a:spcPct val="135000"/>
+              </a:lnSpc>
+            </a:pPr>
+            <a:r>
+              <a:rPr sz="1500" b="1" i="0">
+                <a:solidFill>
+                  <a:srgbClr val="6B4FBB"/>
+                </a:solidFill>
+                <a:latin typeface="Verdana"/>
+              </a:rPr>
+              <a:t>2</a:t>
+            </a:r>
+          </a:p>
+        </p:txBody>
+      </p:sp>
+      <p:sp>
+        <p:nvSpPr>
+          <p:cNvPr id="15" name="TextBox 14"/>
+          <p:cNvSpPr txBox="1"/>
+          <p:nvPr/>
+        </p:nvSpPr>
+        <p:spPr>
+          <a:xfrm>
+            <a:off x="1344168" y="3071876"/>
+            <a:ext cx="10097719" cy="374396"/>
+          </a:xfrm>
+          <a:prstGeom prst="rect">
+            <a:avLst/>
+          </a:prstGeom>
+          <a:noFill/>
+        </p:spPr>
+        <p:txBody>
+          <a:bodyPr wrap="square" lIns="0" rIns="0" tIns="0" bIns="0" anchor="t">
+            <a:spAutoFit/>
+          </a:bodyPr>
+          <a:lstStyle/>
+          <a:p>
+            <a:pPr algn="l">
+              <a:lnSpc>
+                <a:spcPct val="140000"/>
+              </a:lnSpc>
+            </a:pPr>
+            <a:r>
+              <a:rPr sz="1900" b="0" i="0">
+                <a:solidFill>
+                  <a:srgbClr val="3A3D40"/>
+                </a:solidFill>
+                <a:latin typeface="Verdana"/>
+              </a:rPr>
+              <a:t>Le message doit rejoindre les gens du quartier.</a:t>
+            </a:r>
+          </a:p>
+        </p:txBody>
+      </p:sp>
+      <p:sp>
+        <p:nvSpPr>
+          <p:cNvPr id="16" name="Rounded Rectangle 15"/>
+          <p:cNvSpPr/>
+          <p:nvPr/>
+        </p:nvSpPr>
+        <p:spPr>
+          <a:xfrm>
+            <a:off x="566928" y="3693160"/>
+            <a:ext cx="11057839" cy="648716"/>
+          </a:xfrm>
+          <a:prstGeom prst="roundRect">
+            <a:avLst>
+              <a:gd name="adj" fmla="val 22552"/>
+            </a:avLst>
+          </a:prstGeom>
+          <a:solidFill>
+            <a:srgbClr val="FFFFFF"/>
+          </a:solidFill>
+          <a:ln w="12700">
+            <a:solidFill>
+              <a:srgbClr val="EAEAE8"/>
+            </a:solidFill>
+          </a:ln>
+          <a:effectLst/>
+        </p:spPr>
+        <p:style>
+          <a:lnRef idx="1">
+            <a:schemeClr val="accent1"/>
+          </a:lnRef>
+          <a:fillRef idx="3">
+            <a:schemeClr val="accent1"/>
+          </a:fillRef>
+          <a:effectRef idx="2">
+            <a:schemeClr val="accent1"/>
+          </a:effectRef>
+          <a:fontRef idx="minor">
+            <a:schemeClr val="lt1"/>
+          </a:fontRef>
+        </p:style>
+        <p:txBody>
+          <a:bodyPr rtlCol="0" anchor="ctr"/>
+          <a:lstStyle/>
+          <a:p/>
+        </p:txBody>
+      </p:sp>
+      <p:sp>
+        <p:nvSpPr>
+          <p:cNvPr id="17" name="Rounded Rectangle 16"/>
+          <p:cNvSpPr/>
+          <p:nvPr/>
+        </p:nvSpPr>
+        <p:spPr>
+          <a:xfrm>
+            <a:off x="841247" y="3834638"/>
+            <a:ext cx="365760" cy="365760"/>
+          </a:xfrm>
+          <a:prstGeom prst="roundRect">
+            <a:avLst>
+              <a:gd name="adj" fmla="val 32500"/>
+            </a:avLst>
+          </a:prstGeom>
+          <a:solidFill>
+            <a:srgbClr val="EFEAFA"/>
+          </a:solidFill>
+          <a:ln>
+            <a:noFill/>
+          </a:ln>
+          <a:effectLst/>
+        </p:spPr>
+        <p:style>
+          <a:lnRef idx="1">
+            <a:schemeClr val="accent1"/>
+          </a:lnRef>
+          <a:fillRef idx="3">
+            <a:schemeClr val="accent1"/>
+          </a:fillRef>
+          <a:effectRef idx="2">
+            <a:schemeClr val="accent1"/>
+          </a:effectRef>
+          <a:fontRef idx="minor">
+            <a:schemeClr val="lt1"/>
+          </a:fontRef>
+        </p:style>
+        <p:txBody>
+          <a:bodyPr rtlCol="0" anchor="ctr"/>
+          <a:lstStyle/>
+          <a:p/>
+        </p:txBody>
+      </p:sp>
+      <p:sp>
+        <p:nvSpPr>
+          <p:cNvPr id="18" name="TextBox 17"/>
+          <p:cNvSpPr txBox="1"/>
+          <p:nvPr/>
+        </p:nvSpPr>
+        <p:spPr>
+          <a:xfrm>
+            <a:off x="841247" y="3898646"/>
+            <a:ext cx="365760" cy="256032"/>
+          </a:xfrm>
+          <a:prstGeom prst="rect">
+            <a:avLst/>
+          </a:prstGeom>
+          <a:noFill/>
+        </p:spPr>
+        <p:txBody>
+          <a:bodyPr wrap="square" lIns="0" rIns="0" tIns="0" bIns="0" anchor="t">
+            <a:spAutoFit/>
+          </a:bodyPr>
+          <a:lstStyle/>
+          <a:p>
+            <a:pPr algn="ctr">
+              <a:lnSpc>
+                <a:spcPct val="135000"/>
+              </a:lnSpc>
+            </a:pPr>
+            <a:r>
+              <a:rPr sz="1500" b="1" i="0">
+                <a:solidFill>
+                  <a:srgbClr val="6B4FBB"/>
+                </a:solidFill>
+                <a:latin typeface="Verdana"/>
+              </a:rPr>
+              <a:t>3</a:t>
+            </a:r>
+          </a:p>
+        </p:txBody>
+      </p:sp>
+      <p:sp>
+        <p:nvSpPr>
+          <p:cNvPr id="19" name="TextBox 18"/>
+          <p:cNvSpPr txBox="1"/>
+          <p:nvPr/>
+        </p:nvSpPr>
+        <p:spPr>
+          <a:xfrm>
+            <a:off x="1344168" y="3848608"/>
+            <a:ext cx="10097719" cy="374396"/>
+          </a:xfrm>
+          <a:prstGeom prst="rect">
+            <a:avLst/>
+          </a:prstGeom>
+          <a:noFill/>
+        </p:spPr>
+        <p:txBody>
+          <a:bodyPr wrap="square" lIns="0" rIns="0" tIns="0" bIns="0" anchor="t">
+            <a:spAutoFit/>
+          </a:bodyPr>
+          <a:lstStyle/>
+          <a:p>
+            <a:pPr algn="l">
+              <a:lnSpc>
+                <a:spcPct val="140000"/>
+              </a:lnSpc>
+            </a:pPr>
+            <a:r>
+              <a:rPr sz="1900" b="0" i="0">
+                <a:solidFill>
+                  <a:srgbClr val="3A3D40"/>
+                </a:solidFill>
+                <a:latin typeface="Verdana"/>
+              </a:rPr>
+              <a:t>L'affiche annonce un atelier gratuit.</a:t>
+            </a:r>
+          </a:p>
+        </p:txBody>
+      </p:sp>
+    </p:spTree>
+  </p:cSld>
+  <p:clrMapOvr>
+    <a:masterClrMapping/>
+  </p:clrMapOvr>
+</p:sld>
+</file>
+
+<file path=ppt/slides/slide23.xml><?xml version="1.0" encoding="utf-8"?>
+<p:sld xmlns:a="http://schemas.openxmlformats.org/drawingml/2006/main" xmlns:p="http://schemas.openxmlformats.org/presentationml/2006/main" xmlns:r="http://schemas.openxmlformats.org/officeDocument/2006/relationships">
+  <p:cSld>
+    <p:spTree>
+      <p:nvGrpSpPr>
+        <p:cNvPr id="1" name=""/>
+        <p:cNvGrpSpPr/>
+        <p:nvPr/>
+      </p:nvGrpSpPr>
+      <p:grpSpPr/>
+      <p:sp>
+        <p:nvSpPr>
+          <p:cNvPr id="2" name="Rectangle 1"/>
+          <p:cNvSpPr/>
+          <p:nvPr/>
+        </p:nvSpPr>
+        <p:spPr>
+          <a:xfrm>
+            <a:off x="0" y="0"/>
+            <a:ext cx="12191695" cy="6858000"/>
+          </a:xfrm>
+          <a:prstGeom prst="rect">
+            <a:avLst/>
+          </a:prstGeom>
+          <a:solidFill>
+            <a:srgbClr val="F7F7F5"/>
+          </a:solidFill>
+          <a:ln>
+            <a:noFill/>
+          </a:ln>
+          <a:effectLst/>
+        </p:spPr>
+        <p:style>
+          <a:lnRef idx="1">
+            <a:schemeClr val="accent1"/>
+          </a:lnRef>
+          <a:fillRef idx="3">
+            <a:schemeClr val="accent1"/>
+          </a:fillRef>
+          <a:effectRef idx="2">
+            <a:schemeClr val="accent1"/>
+          </a:effectRef>
+          <a:fontRef idx="minor">
+            <a:schemeClr val="lt1"/>
+          </a:fontRef>
+        </p:style>
+        <p:txBody>
+          <a:bodyPr rtlCol="0" anchor="ctr"/>
+          <a:lstStyle/>
+          <a:p/>
+        </p:txBody>
+      </p:sp>
+      <p:sp>
+        <p:nvSpPr>
+          <p:cNvPr id="3" name="TextBox 2"/>
+          <p:cNvSpPr txBox="1"/>
+          <p:nvPr/>
+        </p:nvSpPr>
+        <p:spPr>
+          <a:xfrm>
+            <a:off x="566928" y="6355080"/>
+            <a:ext cx="6400800" cy="219456"/>
+          </a:xfrm>
+          <a:prstGeom prst="rect">
+            <a:avLst/>
+          </a:prstGeom>
+          <a:noFill/>
+        </p:spPr>
+        <p:txBody>
+          <a:bodyPr wrap="square" lIns="0" rIns="0" tIns="0" bIns="0" anchor="t">
+            <a:spAutoFit/>
+          </a:bodyPr>
+          <a:lstStyle/>
+          <a:p>
+            <a:pPr algn="l">
+              <a:lnSpc>
+                <a:spcPct val="135000"/>
+              </a:lnSpc>
+            </a:pPr>
+            <a:r>
+              <a:rPr sz="1200" b="0" i="0">
+                <a:solidFill>
+                  <a:srgbClr val="6E7175"/>
+                </a:solidFill>
+                <a:latin typeface="Verdana"/>
+              </a:rPr>
+              <a:t>A2 · Des publicités efficaces</a:t>
+            </a:r>
+          </a:p>
+        </p:txBody>
+      </p:sp>
+      <p:sp>
+        <p:nvSpPr>
+          <p:cNvPr id="4" name="TextBox 3"/>
+          <p:cNvSpPr txBox="1"/>
+          <p:nvPr/>
+        </p:nvSpPr>
+        <p:spPr>
+          <a:xfrm>
+            <a:off x="10710367" y="6355080"/>
+            <a:ext cx="914400" cy="219456"/>
+          </a:xfrm>
+          <a:prstGeom prst="rect">
+            <a:avLst/>
+          </a:prstGeom>
+          <a:noFill/>
+        </p:spPr>
+        <p:txBody>
+          <a:bodyPr wrap="square" lIns="0" rIns="0" tIns="0" bIns="0" anchor="t">
+            <a:spAutoFit/>
+          </a:bodyPr>
+          <a:lstStyle/>
+          <a:p>
+            <a:pPr algn="r">
+              <a:lnSpc>
+                <a:spcPct val="135000"/>
+              </a:lnSpc>
+            </a:pPr>
+            <a:r>
+              <a:rPr sz="1200" b="0" i="0">
+                <a:solidFill>
+                  <a:srgbClr val="6E7175"/>
+                </a:solidFill>
+                <a:latin typeface="Verdana"/>
+              </a:rPr>
+              <a:t>23</a:t>
+            </a:r>
+          </a:p>
+        </p:txBody>
+      </p:sp>
+      <p:sp>
+        <p:nvSpPr>
+          <p:cNvPr id="5" name="TextBox 4"/>
+          <p:cNvSpPr txBox="1"/>
+          <p:nvPr/>
+        </p:nvSpPr>
+        <p:spPr>
+          <a:xfrm>
+            <a:off x="566928" y="420624"/>
+            <a:ext cx="11057839" cy="237744"/>
+          </a:xfrm>
+          <a:prstGeom prst="rect">
+            <a:avLst/>
+          </a:prstGeom>
+          <a:noFill/>
+        </p:spPr>
+        <p:txBody>
+          <a:bodyPr wrap="square" lIns="0" rIns="0" tIns="0" bIns="0" anchor="t">
+            <a:spAutoFit/>
+          </a:bodyPr>
+          <a:lstStyle/>
+          <a:p>
+            <a:pPr algn="l">
+              <a:lnSpc>
+                <a:spcPct val="135000"/>
+              </a:lnSpc>
+            </a:pPr>
+            <a:r>
+              <a:rPr sz="1300" b="1" i="0" spc="156">
+                <a:solidFill>
+                  <a:srgbClr val="6B4FBB"/>
+                </a:solidFill>
+                <a:latin typeface="Verdana"/>
+              </a:rPr>
+              <a:t>CORRECTION</a:t>
+            </a:r>
+          </a:p>
+        </p:txBody>
+      </p:sp>
+      <p:sp>
+        <p:nvSpPr>
+          <p:cNvPr id="6" name="TextBox 5"/>
+          <p:cNvSpPr txBox="1"/>
+          <p:nvPr/>
+        </p:nvSpPr>
+        <p:spPr>
+          <a:xfrm>
+            <a:off x="566928" y="749808"/>
+            <a:ext cx="11057839" cy="877824"/>
+          </a:xfrm>
+          <a:prstGeom prst="rect">
+            <a:avLst/>
+          </a:prstGeom>
+          <a:noFill/>
+        </p:spPr>
+        <p:txBody>
+          <a:bodyPr wrap="square" lIns="0" rIns="0" tIns="0" bIns="0" anchor="t">
+            <a:spAutoFit/>
+          </a:bodyPr>
+          <a:lstStyle/>
+          <a:p>
+            <a:pPr algn="l">
+              <a:lnSpc>
+                <a:spcPct val="115000"/>
+              </a:lnSpc>
+            </a:pPr>
+            <a:r>
+              <a:rPr sz="3400" b="1" i="0">
+                <a:solidFill>
+                  <a:srgbClr val="17181A"/>
+                </a:solidFill>
+                <a:latin typeface="Verdana"/>
+              </a:rPr>
+              <a:t>Trois phrases de capsule à lire à voix haute</a:t>
+            </a:r>
+          </a:p>
+        </p:txBody>
+      </p:sp>
+      <p:sp>
+        <p:nvSpPr>
+          <p:cNvPr id="7" name="TextBox 6"/>
+          <p:cNvSpPr txBox="1"/>
+          <p:nvPr/>
+        </p:nvSpPr>
+        <p:spPr>
+          <a:xfrm>
+            <a:off x="566928" y="1645920"/>
+            <a:ext cx="11057839" cy="329184"/>
+          </a:xfrm>
+          <a:prstGeom prst="rect">
+            <a:avLst/>
+          </a:prstGeom>
+          <a:noFill/>
+        </p:spPr>
+        <p:txBody>
+          <a:bodyPr wrap="square" lIns="0" rIns="0" tIns="0" bIns="0" anchor="t">
+            <a:spAutoFit/>
+          </a:bodyPr>
+          <a:lstStyle/>
+          <a:p>
+            <a:pPr algn="l">
+              <a:lnSpc>
+                <a:spcPct val="135000"/>
+              </a:lnSpc>
+            </a:pPr>
+            <a:r>
+              <a:rPr sz="1800" b="0" i="0">
+                <a:solidFill>
+                  <a:srgbClr val="6E7175"/>
+                </a:solidFill>
+                <a:latin typeface="Verdana"/>
+              </a:rPr>
+              <a:t>Correction — on lit la réponse, on ne commente pas l'erreur.</a:t>
+            </a:r>
+          </a:p>
+        </p:txBody>
+      </p:sp>
+      <p:sp>
+        <p:nvSpPr>
+          <p:cNvPr id="8" name="Rounded Rectangle 7"/>
+          <p:cNvSpPr/>
+          <p:nvPr/>
+        </p:nvSpPr>
+        <p:spPr>
+          <a:xfrm>
+            <a:off x="566928" y="2139696"/>
+            <a:ext cx="11057839" cy="648716"/>
+          </a:xfrm>
+          <a:prstGeom prst="roundRect">
+            <a:avLst>
+              <a:gd name="adj" fmla="val 22552"/>
+            </a:avLst>
+          </a:prstGeom>
+          <a:solidFill>
+            <a:srgbClr val="E6F5EE"/>
+          </a:solidFill>
+          <a:ln w="12700">
+            <a:solidFill>
+              <a:srgbClr val="EAEAE8"/>
+            </a:solidFill>
+          </a:ln>
+          <a:effectLst/>
+        </p:spPr>
+        <p:style>
+          <a:lnRef idx="1">
+            <a:schemeClr val="accent1"/>
+          </a:lnRef>
+          <a:fillRef idx="3">
+            <a:schemeClr val="accent1"/>
+          </a:fillRef>
+          <a:effectRef idx="2">
+            <a:schemeClr val="accent1"/>
+          </a:effectRef>
+          <a:fontRef idx="minor">
+            <a:schemeClr val="lt1"/>
+          </a:fontRef>
+        </p:style>
+        <p:txBody>
+          <a:bodyPr rtlCol="0" anchor="ctr"/>
+          <a:lstStyle/>
+          <a:p/>
+        </p:txBody>
+      </p:sp>
+      <p:sp>
+        <p:nvSpPr>
+          <p:cNvPr id="9" name="Rounded Rectangle 8"/>
+          <p:cNvSpPr/>
+          <p:nvPr/>
+        </p:nvSpPr>
+        <p:spPr>
+          <a:xfrm>
+            <a:off x="841247" y="2281174"/>
+            <a:ext cx="365760" cy="365760"/>
+          </a:xfrm>
+          <a:prstGeom prst="roundRect">
+            <a:avLst>
+              <a:gd name="adj" fmla="val 32500"/>
+            </a:avLst>
+          </a:prstGeom>
+          <a:solidFill>
+            <a:srgbClr val="EFEAFA"/>
+          </a:solidFill>
+          <a:ln>
+            <a:noFill/>
+          </a:ln>
+          <a:effectLst/>
+        </p:spPr>
+        <p:style>
+          <a:lnRef idx="1">
+            <a:schemeClr val="accent1"/>
+          </a:lnRef>
+          <a:fillRef idx="3">
+            <a:schemeClr val="accent1"/>
+          </a:fillRef>
+          <a:effectRef idx="2">
+            <a:schemeClr val="accent1"/>
+          </a:effectRef>
+          <a:fontRef idx="minor">
+            <a:schemeClr val="lt1"/>
+          </a:fontRef>
+        </p:style>
+        <p:txBody>
+          <a:bodyPr rtlCol="0" anchor="ctr"/>
+          <a:lstStyle/>
+          <a:p/>
+        </p:txBody>
+      </p:sp>
+      <p:sp>
+        <p:nvSpPr>
+          <p:cNvPr id="10" name="TextBox 9"/>
+          <p:cNvSpPr txBox="1"/>
+          <p:nvPr/>
+        </p:nvSpPr>
+        <p:spPr>
+          <a:xfrm>
+            <a:off x="841247" y="2345182"/>
+            <a:ext cx="365760" cy="256032"/>
+          </a:xfrm>
+          <a:prstGeom prst="rect">
+            <a:avLst/>
+          </a:prstGeom>
+          <a:noFill/>
+        </p:spPr>
+        <p:txBody>
+          <a:bodyPr wrap="square" lIns="0" rIns="0" tIns="0" bIns="0" anchor="t">
+            <a:spAutoFit/>
+          </a:bodyPr>
+          <a:lstStyle/>
+          <a:p>
+            <a:pPr algn="ctr">
+              <a:lnSpc>
+                <a:spcPct val="135000"/>
+              </a:lnSpc>
+            </a:pPr>
+            <a:r>
+              <a:rPr sz="1500" b="1" i="0">
+                <a:solidFill>
+                  <a:srgbClr val="6B4FBB"/>
+                </a:solidFill>
+                <a:latin typeface="Verdana"/>
+              </a:rPr>
+              <a:t>1</a:t>
+            </a:r>
+          </a:p>
+        </p:txBody>
+      </p:sp>
+      <p:sp>
+        <p:nvSpPr>
+          <p:cNvPr id="11" name="TextBox 10"/>
+          <p:cNvSpPr txBox="1"/>
+          <p:nvPr/>
+        </p:nvSpPr>
+        <p:spPr>
+          <a:xfrm>
+            <a:off x="1344168" y="2295144"/>
+            <a:ext cx="10097719" cy="374396"/>
+          </a:xfrm>
+          <a:prstGeom prst="rect">
+            <a:avLst/>
+          </a:prstGeom>
+          <a:noFill/>
+        </p:spPr>
+        <p:txBody>
+          <a:bodyPr wrap="square" lIns="0" rIns="0" tIns="0" bIns="0" anchor="t">
+            <a:spAutoFit/>
+          </a:bodyPr>
+          <a:lstStyle/>
+          <a:p>
+            <a:pPr algn="l">
+              <a:lnSpc>
+                <a:spcPct val="140000"/>
+              </a:lnSpc>
+            </a:pPr>
+            <a:r>
+              <a:rPr sz="1900" b="0" i="0">
+                <a:solidFill>
+                  <a:srgbClr val="3A3D40"/>
+                </a:solidFill>
+                <a:latin typeface="Verdana"/>
+              </a:rPr>
+              <a:t>Choisis une seule idée par capsule.   </a:t>
+            </a:r>
+            <a:r>
+              <a:rPr sz="1900" b="1" i="0">
+                <a:solidFill>
+                  <a:srgbClr val="07734A"/>
+                </a:solidFill>
+                <a:latin typeface="Verdana"/>
+              </a:rPr>
+              <a:t>» ch</a:t>
+            </a:r>
+          </a:p>
+        </p:txBody>
+      </p:sp>
+      <p:sp>
+        <p:nvSpPr>
+          <p:cNvPr id="12" name="Rounded Rectangle 11"/>
+          <p:cNvSpPr/>
+          <p:nvPr/>
+        </p:nvSpPr>
+        <p:spPr>
+          <a:xfrm>
+            <a:off x="566928" y="2916428"/>
+            <a:ext cx="11057839" cy="648716"/>
+          </a:xfrm>
+          <a:prstGeom prst="roundRect">
+            <a:avLst>
+              <a:gd name="adj" fmla="val 22552"/>
+            </a:avLst>
+          </a:prstGeom>
+          <a:solidFill>
+            <a:srgbClr val="E6F5EE"/>
+          </a:solidFill>
+          <a:ln w="12700">
+            <a:solidFill>
+              <a:srgbClr val="EAEAE8"/>
+            </a:solidFill>
+          </a:ln>
+          <a:effectLst/>
+        </p:spPr>
+        <p:style>
+          <a:lnRef idx="1">
+            <a:schemeClr val="accent1"/>
+          </a:lnRef>
+          <a:fillRef idx="3">
+            <a:schemeClr val="accent1"/>
+          </a:fillRef>
+          <a:effectRef idx="2">
+            <a:schemeClr val="accent1"/>
+          </a:effectRef>
+          <a:fontRef idx="minor">
+            <a:schemeClr val="lt1"/>
+          </a:fontRef>
+        </p:style>
+        <p:txBody>
+          <a:bodyPr rtlCol="0" anchor="ctr"/>
+          <a:lstStyle/>
+          <a:p/>
+        </p:txBody>
+      </p:sp>
+      <p:sp>
+        <p:nvSpPr>
+          <p:cNvPr id="13" name="Rounded Rectangle 12"/>
+          <p:cNvSpPr/>
+          <p:nvPr/>
+        </p:nvSpPr>
+        <p:spPr>
+          <a:xfrm>
+            <a:off x="841247" y="3057905"/>
+            <a:ext cx="365760" cy="365760"/>
+          </a:xfrm>
+          <a:prstGeom prst="roundRect">
+            <a:avLst>
+              <a:gd name="adj" fmla="val 32500"/>
+            </a:avLst>
+          </a:prstGeom>
+          <a:solidFill>
+            <a:srgbClr val="EFEAFA"/>
+          </a:solidFill>
+          <a:ln>
+            <a:noFill/>
+          </a:ln>
+          <a:effectLst/>
+        </p:spPr>
+        <p:style>
+          <a:lnRef idx="1">
+            <a:schemeClr val="accent1"/>
+          </a:lnRef>
+          <a:fillRef idx="3">
+            <a:schemeClr val="accent1"/>
+          </a:fillRef>
+          <a:effectRef idx="2">
+            <a:schemeClr val="accent1"/>
+          </a:effectRef>
+          <a:fontRef idx="minor">
+            <a:schemeClr val="lt1"/>
+          </a:fontRef>
+        </p:style>
+        <p:txBody>
+          <a:bodyPr rtlCol="0" anchor="ctr"/>
+          <a:lstStyle/>
+          <a:p/>
+        </p:txBody>
+      </p:sp>
+      <p:sp>
+        <p:nvSpPr>
+          <p:cNvPr id="14" name="TextBox 13"/>
+          <p:cNvSpPr txBox="1"/>
+          <p:nvPr/>
+        </p:nvSpPr>
+        <p:spPr>
+          <a:xfrm>
+            <a:off x="841247" y="3121913"/>
+            <a:ext cx="365760" cy="256032"/>
+          </a:xfrm>
+          <a:prstGeom prst="rect">
+            <a:avLst/>
+          </a:prstGeom>
+          <a:noFill/>
+        </p:spPr>
+        <p:txBody>
+          <a:bodyPr wrap="square" lIns="0" rIns="0" tIns="0" bIns="0" anchor="t">
+            <a:spAutoFit/>
+          </a:bodyPr>
+          <a:lstStyle/>
+          <a:p>
+            <a:pPr algn="ctr">
+              <a:lnSpc>
+                <a:spcPct val="135000"/>
+              </a:lnSpc>
+            </a:pPr>
+            <a:r>
+              <a:rPr sz="1500" b="1" i="0">
+                <a:solidFill>
+                  <a:srgbClr val="6B4FBB"/>
+                </a:solidFill>
+                <a:latin typeface="Verdana"/>
+              </a:rPr>
+              <a:t>2</a:t>
+            </a:r>
+          </a:p>
+        </p:txBody>
+      </p:sp>
+      <p:sp>
+        <p:nvSpPr>
+          <p:cNvPr id="15" name="TextBox 14"/>
+          <p:cNvSpPr txBox="1"/>
+          <p:nvPr/>
+        </p:nvSpPr>
+        <p:spPr>
+          <a:xfrm>
+            <a:off x="1344168" y="3071876"/>
+            <a:ext cx="10097719" cy="374396"/>
+          </a:xfrm>
+          <a:prstGeom prst="rect">
+            <a:avLst/>
+          </a:prstGeom>
+          <a:noFill/>
+        </p:spPr>
+        <p:txBody>
+          <a:bodyPr wrap="square" lIns="0" rIns="0" tIns="0" bIns="0" anchor="t">
+            <a:spAutoFit/>
+          </a:bodyPr>
+          <a:lstStyle/>
+          <a:p>
+            <a:pPr algn="l">
+              <a:lnSpc>
+                <a:spcPct val="140000"/>
+              </a:lnSpc>
+            </a:pPr>
+            <a:r>
+              <a:rPr sz="1900" b="0" i="0">
+                <a:solidFill>
+                  <a:srgbClr val="3A3D40"/>
+                </a:solidFill>
+                <a:latin typeface="Verdana"/>
+              </a:rPr>
+              <a:t>Le message doit rejoindre les gens du quartier.   </a:t>
+            </a:r>
+            <a:r>
+              <a:rPr sz="1900" b="1" i="0">
+                <a:solidFill>
+                  <a:srgbClr val="07734A"/>
+                </a:solidFill>
+                <a:latin typeface="Verdana"/>
+              </a:rPr>
+              <a:t>» j · j · j</a:t>
+            </a:r>
+          </a:p>
+        </p:txBody>
+      </p:sp>
+      <p:sp>
+        <p:nvSpPr>
+          <p:cNvPr id="16" name="Rounded Rectangle 15"/>
+          <p:cNvSpPr/>
+          <p:nvPr/>
+        </p:nvSpPr>
+        <p:spPr>
+          <a:xfrm>
+            <a:off x="566928" y="3693160"/>
+            <a:ext cx="11057839" cy="648716"/>
+          </a:xfrm>
+          <a:prstGeom prst="roundRect">
+            <a:avLst>
+              <a:gd name="adj" fmla="val 22552"/>
+            </a:avLst>
+          </a:prstGeom>
+          <a:solidFill>
+            <a:srgbClr val="E6F5EE"/>
+          </a:solidFill>
+          <a:ln w="12700">
+            <a:solidFill>
+              <a:srgbClr val="EAEAE8"/>
+            </a:solidFill>
+          </a:ln>
+          <a:effectLst/>
+        </p:spPr>
+        <p:style>
+          <a:lnRef idx="1">
+            <a:schemeClr val="accent1"/>
+          </a:lnRef>
+          <a:fillRef idx="3">
+            <a:schemeClr val="accent1"/>
+          </a:fillRef>
+          <a:effectRef idx="2">
+            <a:schemeClr val="accent1"/>
+          </a:effectRef>
+          <a:fontRef idx="minor">
+            <a:schemeClr val="lt1"/>
+          </a:fontRef>
+        </p:style>
+        <p:txBody>
+          <a:bodyPr rtlCol="0" anchor="ctr"/>
+          <a:lstStyle/>
+          <a:p/>
+        </p:txBody>
+      </p:sp>
+      <p:sp>
+        <p:nvSpPr>
+          <p:cNvPr id="17" name="Rounded Rectangle 16"/>
+          <p:cNvSpPr/>
+          <p:nvPr/>
+        </p:nvSpPr>
+        <p:spPr>
+          <a:xfrm>
+            <a:off x="841247" y="3834638"/>
+            <a:ext cx="365760" cy="365760"/>
+          </a:xfrm>
+          <a:prstGeom prst="roundRect">
+            <a:avLst>
+              <a:gd name="adj" fmla="val 32500"/>
+            </a:avLst>
+          </a:prstGeom>
+          <a:solidFill>
+            <a:srgbClr val="EFEAFA"/>
+          </a:solidFill>
+          <a:ln>
+            <a:noFill/>
+          </a:ln>
+          <a:effectLst/>
+        </p:spPr>
+        <p:style>
+          <a:lnRef idx="1">
+            <a:schemeClr val="accent1"/>
+          </a:lnRef>
+          <a:fillRef idx="3">
+            <a:schemeClr val="accent1"/>
+          </a:fillRef>
+          <a:effectRef idx="2">
+            <a:schemeClr val="accent1"/>
+          </a:effectRef>
+          <a:fontRef idx="minor">
+            <a:schemeClr val="lt1"/>
+          </a:fontRef>
+        </p:style>
+        <p:txBody>
+          <a:bodyPr rtlCol="0" anchor="ctr"/>
+          <a:lstStyle/>
+          <a:p/>
+        </p:txBody>
+      </p:sp>
+      <p:sp>
+        <p:nvSpPr>
+          <p:cNvPr id="18" name="TextBox 17"/>
+          <p:cNvSpPr txBox="1"/>
+          <p:nvPr/>
+        </p:nvSpPr>
+        <p:spPr>
+          <a:xfrm>
+            <a:off x="841247" y="3898646"/>
+            <a:ext cx="365760" cy="256032"/>
+          </a:xfrm>
+          <a:prstGeom prst="rect">
+            <a:avLst/>
+          </a:prstGeom>
+          <a:noFill/>
+        </p:spPr>
+        <p:txBody>
+          <a:bodyPr wrap="square" lIns="0" rIns="0" tIns="0" bIns="0" anchor="t">
+            <a:spAutoFit/>
+          </a:bodyPr>
+          <a:lstStyle/>
+          <a:p>
+            <a:pPr algn="ctr">
+              <a:lnSpc>
+                <a:spcPct val="135000"/>
+              </a:lnSpc>
+            </a:pPr>
+            <a:r>
+              <a:rPr sz="1500" b="1" i="0">
+                <a:solidFill>
+                  <a:srgbClr val="6B4FBB"/>
+                </a:solidFill>
+                <a:latin typeface="Verdana"/>
+              </a:rPr>
+              <a:t>3</a:t>
+            </a:r>
+          </a:p>
+        </p:txBody>
+      </p:sp>
+      <p:sp>
+        <p:nvSpPr>
+          <p:cNvPr id="19" name="TextBox 18"/>
+          <p:cNvSpPr txBox="1"/>
+          <p:nvPr/>
+        </p:nvSpPr>
+        <p:spPr>
+          <a:xfrm>
+            <a:off x="1344168" y="3848608"/>
+            <a:ext cx="10097719" cy="374396"/>
+          </a:xfrm>
+          <a:prstGeom prst="rect">
+            <a:avLst/>
+          </a:prstGeom>
+          <a:noFill/>
+        </p:spPr>
+        <p:txBody>
+          <a:bodyPr wrap="square" lIns="0" rIns="0" tIns="0" bIns="0" anchor="t">
+            <a:spAutoFit/>
+          </a:bodyPr>
+          <a:lstStyle/>
+          <a:p>
+            <a:pPr algn="l">
+              <a:lnSpc>
+                <a:spcPct val="140000"/>
+              </a:lnSpc>
+            </a:pPr>
+            <a:r>
+              <a:rPr sz="1900" b="0" i="0">
+                <a:solidFill>
+                  <a:srgbClr val="3A3D40"/>
+                </a:solidFill>
+                <a:latin typeface="Verdana"/>
+              </a:rPr>
+              <a:t>L'affiche annonce un atelier gratuit.   </a:t>
+            </a:r>
+            <a:r>
+              <a:rPr sz="1900" b="1" i="0">
+                <a:solidFill>
+                  <a:srgbClr val="07734A"/>
+                </a:solidFill>
+                <a:latin typeface="Verdana"/>
+              </a:rPr>
+              <a:t>» ch · g dur</a:t>
+            </a:r>
+          </a:p>
+        </p:txBody>
+      </p:sp>
+    </p:spTree>
+  </p:cSld>
+  <p:clrMapOvr>
+    <a:masterClrMapping/>
+  </p:clrMapOvr>
+</p:sld>
+</file>
+
+<file path=ppt/slides/slide24.xml><?xml version="1.0" encoding="utf-8"?>
+<p:sld xmlns:a="http://schemas.openxmlformats.org/drawingml/2006/main" xmlns:p="http://schemas.openxmlformats.org/presentationml/2006/main" xmlns:r="http://schemas.openxmlformats.org/officeDocument/2006/relationships">
+  <p:cSld>
+    <p:spTree>
+      <p:nvGrpSpPr>
+        <p:cNvPr id="1" name=""/>
+        <p:cNvGrpSpPr/>
+        <p:nvPr/>
+      </p:nvGrpSpPr>
+      <p:grpSpPr/>
+      <p:sp>
+        <p:nvSpPr>
+          <p:cNvPr id="2" name="Rectangle 1"/>
+          <p:cNvSpPr/>
+          <p:nvPr/>
+        </p:nvSpPr>
+        <p:spPr>
+          <a:xfrm>
+            <a:off x="0" y="0"/>
+            <a:ext cx="12191695" cy="6858000"/>
+          </a:xfrm>
+          <a:prstGeom prst="rect">
+            <a:avLst/>
+          </a:prstGeom>
+          <a:solidFill>
+            <a:srgbClr val="F7F7F5"/>
+          </a:solidFill>
+          <a:ln>
+            <a:noFill/>
+          </a:ln>
+          <a:effectLst/>
+        </p:spPr>
+        <p:style>
+          <a:lnRef idx="1">
+            <a:schemeClr val="accent1"/>
+          </a:lnRef>
+          <a:fillRef idx="3">
+            <a:schemeClr val="accent1"/>
+          </a:fillRef>
+          <a:effectRef idx="2">
+            <a:schemeClr val="accent1"/>
+          </a:effectRef>
+          <a:fontRef idx="minor">
+            <a:schemeClr val="lt1"/>
+          </a:fontRef>
+        </p:style>
+        <p:txBody>
+          <a:bodyPr rtlCol="0" anchor="ctr"/>
+          <a:lstStyle/>
+          <a:p/>
+        </p:txBody>
+      </p:sp>
+      <p:sp>
+        <p:nvSpPr>
+          <p:cNvPr id="3" name="TextBox 2"/>
+          <p:cNvSpPr txBox="1"/>
+          <p:nvPr/>
+        </p:nvSpPr>
+        <p:spPr>
+          <a:xfrm>
+            <a:off x="566928" y="6355080"/>
+            <a:ext cx="6400800" cy="219456"/>
+          </a:xfrm>
+          <a:prstGeom prst="rect">
+            <a:avLst/>
+          </a:prstGeom>
+          <a:noFill/>
+        </p:spPr>
+        <p:txBody>
+          <a:bodyPr wrap="square" lIns="0" rIns="0" tIns="0" bIns="0" anchor="t">
+            <a:spAutoFit/>
+          </a:bodyPr>
+          <a:lstStyle/>
+          <a:p>
+            <a:pPr algn="l">
+              <a:lnSpc>
+                <a:spcPct val="135000"/>
+              </a:lnSpc>
+            </a:pPr>
+            <a:r>
+              <a:rPr sz="1200" b="0" i="0">
+                <a:solidFill>
+                  <a:srgbClr val="6E7175"/>
+                </a:solidFill>
+                <a:latin typeface="Verdana"/>
+              </a:rPr>
+              <a:t>A2 · Des publicités efficaces</a:t>
+            </a:r>
+          </a:p>
+        </p:txBody>
+      </p:sp>
+      <p:sp>
+        <p:nvSpPr>
+          <p:cNvPr id="4" name="TextBox 3"/>
+          <p:cNvSpPr txBox="1"/>
+          <p:nvPr/>
+        </p:nvSpPr>
+        <p:spPr>
+          <a:xfrm>
+            <a:off x="10710367" y="6355080"/>
+            <a:ext cx="914400" cy="219456"/>
+          </a:xfrm>
+          <a:prstGeom prst="rect">
+            <a:avLst/>
+          </a:prstGeom>
+          <a:noFill/>
+        </p:spPr>
+        <p:txBody>
+          <a:bodyPr wrap="square" lIns="0" rIns="0" tIns="0" bIns="0" anchor="t">
+            <a:spAutoFit/>
+          </a:bodyPr>
+          <a:lstStyle/>
+          <a:p>
+            <a:pPr algn="r">
+              <a:lnSpc>
+                <a:spcPct val="135000"/>
+              </a:lnSpc>
+            </a:pPr>
+            <a:r>
+              <a:rPr sz="1200" b="0" i="0">
+                <a:solidFill>
+                  <a:srgbClr val="6E7175"/>
+                </a:solidFill>
+                <a:latin typeface="Verdana"/>
+              </a:rPr>
+              <a:t>24</a:t>
+            </a:r>
+          </a:p>
+        </p:txBody>
+      </p:sp>
+      <p:sp>
+        <p:nvSpPr>
+          <p:cNvPr id="5" name="Rectangle 4"/>
+          <p:cNvSpPr/>
+          <p:nvPr/>
+        </p:nvSpPr>
+        <p:spPr>
+          <a:xfrm>
+            <a:off x="0" y="0"/>
+            <a:ext cx="12191695" cy="6858000"/>
+          </a:xfrm>
+          <a:prstGeom prst="rect">
+            <a:avLst/>
+          </a:prstGeom>
+          <a:solidFill>
+            <a:srgbClr val="17181A"/>
+          </a:solidFill>
+          <a:ln>
+            <a:noFill/>
+          </a:ln>
+          <a:effectLst/>
+        </p:spPr>
+        <p:style>
+          <a:lnRef idx="1">
+            <a:schemeClr val="accent1"/>
+          </a:lnRef>
+          <a:fillRef idx="3">
+            <a:schemeClr val="accent1"/>
+          </a:fillRef>
+          <a:effectRef idx="2">
+            <a:schemeClr val="accent1"/>
+          </a:effectRef>
+          <a:fontRef idx="minor">
+            <a:schemeClr val="lt1"/>
+          </a:fontRef>
+        </p:style>
+        <p:txBody>
+          <a:bodyPr rtlCol="0" anchor="ctr"/>
+          <a:lstStyle/>
+          <a:p/>
+        </p:txBody>
+      </p:sp>
+      <p:sp>
+        <p:nvSpPr>
+          <p:cNvPr id="6" name="TextBox 5"/>
+          <p:cNvSpPr txBox="1"/>
+          <p:nvPr/>
+        </p:nvSpPr>
+        <p:spPr>
+          <a:xfrm>
+            <a:off x="566928" y="1051560"/>
+            <a:ext cx="11057839" cy="274320"/>
+          </a:xfrm>
+          <a:prstGeom prst="rect">
+            <a:avLst/>
+          </a:prstGeom>
+          <a:noFill/>
+        </p:spPr>
+        <p:txBody>
+          <a:bodyPr wrap="square" lIns="0" rIns="0" tIns="0" bIns="0" anchor="t">
+            <a:spAutoFit/>
+          </a:bodyPr>
+          <a:lstStyle/>
+          <a:p>
+            <a:pPr algn="l">
+              <a:lnSpc>
+                <a:spcPct val="135000"/>
+              </a:lnSpc>
+            </a:pPr>
+            <a:r>
+              <a:rPr sz="1300" b="1" i="0" spc="156">
+                <a:solidFill>
+                  <a:srgbClr val="FFFFFF"/>
+                </a:solidFill>
+                <a:latin typeface="Verdana"/>
+              </a:rPr>
+              <a:t>BILLET DE SORTIE</a:t>
+            </a:r>
+          </a:p>
+        </p:txBody>
+      </p:sp>
+      <p:sp>
+        <p:nvSpPr>
+          <p:cNvPr id="7" name="TextBox 6"/>
+          <p:cNvSpPr txBox="1"/>
+          <p:nvPr/>
+        </p:nvSpPr>
+        <p:spPr>
+          <a:xfrm>
+            <a:off x="566928" y="1572768"/>
+            <a:ext cx="9777679" cy="2103120"/>
+          </a:xfrm>
+          <a:prstGeom prst="rect">
+            <a:avLst/>
+          </a:prstGeom>
+          <a:noFill/>
+        </p:spPr>
+        <p:txBody>
+          <a:bodyPr wrap="square" lIns="0" rIns="0" tIns="0" bIns="0" anchor="t">
+            <a:spAutoFit/>
+          </a:bodyPr>
+          <a:lstStyle/>
+          <a:p>
+            <a:pPr algn="l">
+              <a:lnSpc>
+                <a:spcPct val="125000"/>
+              </a:lnSpc>
+            </a:pPr>
+            <a:r>
+              <a:rPr sz="3400" b="1" i="0">
+                <a:solidFill>
+                  <a:srgbClr val="FFFFFF"/>
+                </a:solidFill>
+                <a:latin typeface="Verdana"/>
+              </a:rPr>
+              <a:t>Écrivez une annonce de deux phrases et soulignez le mot sur lequel vous insisterez.</a:t>
+            </a:r>
+          </a:p>
+        </p:txBody>
+      </p:sp>
+      <p:sp>
+        <p:nvSpPr>
+          <p:cNvPr id="8" name="Rounded Rectangle 7"/>
+          <p:cNvSpPr/>
+          <p:nvPr/>
+        </p:nvSpPr>
+        <p:spPr>
+          <a:xfrm>
+            <a:off x="566928" y="3931920"/>
+            <a:ext cx="11057839" cy="666496"/>
+          </a:xfrm>
+          <a:prstGeom prst="roundRect">
+            <a:avLst>
+              <a:gd name="adj" fmla="val 13719"/>
+            </a:avLst>
+          </a:prstGeom>
+          <a:solidFill>
+            <a:srgbClr val="2A2C2F"/>
+          </a:solidFill>
+          <a:ln>
+            <a:noFill/>
+          </a:ln>
+          <a:effectLst/>
+        </p:spPr>
+        <p:style>
+          <a:lnRef idx="1">
+            <a:schemeClr val="accent1"/>
+          </a:lnRef>
+          <a:fillRef idx="3">
+            <a:schemeClr val="accent1"/>
+          </a:fillRef>
+          <a:effectRef idx="2">
+            <a:schemeClr val="accent1"/>
+          </a:effectRef>
+          <a:fontRef idx="minor">
+            <a:schemeClr val="lt1"/>
+          </a:fontRef>
+        </p:style>
+        <p:txBody>
+          <a:bodyPr rtlCol="0" anchor="ctr"/>
+          <a:lstStyle/>
+          <a:p/>
+        </p:txBody>
+      </p:sp>
+      <p:sp>
+        <p:nvSpPr>
+          <p:cNvPr id="9" name="TextBox 8"/>
+          <p:cNvSpPr txBox="1"/>
+          <p:nvPr/>
+        </p:nvSpPr>
+        <p:spPr>
+          <a:xfrm>
+            <a:off x="932688" y="4087368"/>
+            <a:ext cx="10051999" cy="392176"/>
+          </a:xfrm>
+          <a:prstGeom prst="rect">
+            <a:avLst/>
+          </a:prstGeom>
+          <a:noFill/>
+        </p:spPr>
+        <p:txBody>
+          <a:bodyPr wrap="square" lIns="0" rIns="0" tIns="0" bIns="0" anchor="t">
+            <a:spAutoFit/>
+          </a:bodyPr>
+          <a:lstStyle/>
+          <a:p>
+            <a:pPr algn="l">
+              <a:lnSpc>
+                <a:spcPct val="140000"/>
+              </a:lnSpc>
+            </a:pPr>
+            <a:r>
+              <a:rPr sz="2000" b="0" i="0">
+                <a:solidFill>
+                  <a:srgbClr val="FFFFFF"/>
+                </a:solidFill>
+                <a:latin typeface="Verdana"/>
+              </a:rPr>
+              <a:t>Un seul mot souligné.</a:t>
+            </a:r>
+          </a:p>
+        </p:txBody>
+      </p:sp>
+      <p:sp>
+        <p:nvSpPr>
+          <p:cNvPr id="10" name="Rounded Rectangle 9"/>
+          <p:cNvSpPr/>
+          <p:nvPr/>
+        </p:nvSpPr>
+        <p:spPr>
+          <a:xfrm>
+            <a:off x="566928" y="4680712"/>
+            <a:ext cx="11057839" cy="666496"/>
+          </a:xfrm>
+          <a:prstGeom prst="roundRect">
+            <a:avLst>
+              <a:gd name="adj" fmla="val 13719"/>
+            </a:avLst>
+          </a:prstGeom>
+          <a:solidFill>
+            <a:srgbClr val="2A2C2F"/>
+          </a:solidFill>
+          <a:ln>
+            <a:noFill/>
+          </a:ln>
+          <a:effectLst/>
+        </p:spPr>
+        <p:style>
+          <a:lnRef idx="1">
+            <a:schemeClr val="accent1"/>
+          </a:lnRef>
+          <a:fillRef idx="3">
+            <a:schemeClr val="accent1"/>
+          </a:fillRef>
+          <a:effectRef idx="2">
+            <a:schemeClr val="accent1"/>
+          </a:effectRef>
+          <a:fontRef idx="minor">
+            <a:schemeClr val="lt1"/>
+          </a:fontRef>
+        </p:style>
+        <p:txBody>
+          <a:bodyPr rtlCol="0" anchor="ctr"/>
+          <a:lstStyle/>
+          <a:p/>
+        </p:txBody>
+      </p:sp>
+      <p:sp>
+        <p:nvSpPr>
+          <p:cNvPr id="11" name="TextBox 10"/>
+          <p:cNvSpPr txBox="1"/>
+          <p:nvPr/>
+        </p:nvSpPr>
+        <p:spPr>
+          <a:xfrm>
+            <a:off x="932688" y="4836160"/>
+            <a:ext cx="10051999" cy="392176"/>
+          </a:xfrm>
+          <a:prstGeom prst="rect">
+            <a:avLst/>
+          </a:prstGeom>
+          <a:noFill/>
+        </p:spPr>
+        <p:txBody>
+          <a:bodyPr wrap="square" lIns="0" rIns="0" tIns="0" bIns="0" anchor="t">
+            <a:spAutoFit/>
+          </a:bodyPr>
+          <a:lstStyle/>
+          <a:p>
+            <a:pPr algn="l">
+              <a:lnSpc>
+                <a:spcPct val="140000"/>
+              </a:lnSpc>
+            </a:pPr>
+            <a:r>
+              <a:rPr sz="2000" b="0" i="0">
+                <a:solidFill>
+                  <a:srgbClr val="FFFFFF"/>
+                </a:solidFill>
+                <a:latin typeface="Verdana"/>
+              </a:rPr>
+              <a:t>Écrivez à côté pourquoi vous avez choisi celui-là.</a:t>
+            </a:r>
+          </a:p>
+        </p:txBody>
+      </p:sp>
+      <p:sp>
+        <p:nvSpPr>
+          <p:cNvPr id="12" name="TextBox 11"/>
+          <p:cNvSpPr txBox="1"/>
+          <p:nvPr/>
+        </p:nvSpPr>
+        <p:spPr>
+          <a:xfrm>
+            <a:off x="566928" y="6355080"/>
+            <a:ext cx="6400800" cy="219456"/>
+          </a:xfrm>
+          <a:prstGeom prst="rect">
+            <a:avLst/>
+          </a:prstGeom>
+          <a:noFill/>
+        </p:spPr>
+        <p:txBody>
+          <a:bodyPr wrap="square" lIns="0" rIns="0" tIns="0" bIns="0" anchor="t">
+            <a:spAutoFit/>
+          </a:bodyPr>
+          <a:lstStyle/>
+          <a:p>
+            <a:pPr algn="l">
+              <a:lnSpc>
+                <a:spcPct val="135000"/>
+              </a:lnSpc>
+            </a:pPr>
+            <a:r>
+              <a:rPr sz="1200" b="0" i="0">
+                <a:solidFill>
+                  <a:srgbClr val="6E7175"/>
+                </a:solidFill>
+                <a:latin typeface="Verdana"/>
+              </a:rPr>
+              <a:t>A2 · Des publicités efficaces</a:t>
             </a:r>
           </a:p>
         </p:txBody>
@@ -13886,7 +21002,7 @@
                 </a:solidFill>
                 <a:latin typeface="Verdana"/>
               </a:rPr>
-              <a:t>PRATIQUE · 1 DE 4</a:t>
+              <a:t>PRATIQUE · 1 DE 6</a:t>
             </a:r>
           </a:p>
         </p:txBody>
@@ -16468,7 +23584,7 @@
                 </a:solidFill>
                 <a:latin typeface="Verdana"/>
               </a:rPr>
-              <a:t>PRATIQUE · 2 DE 4</a:t>
+              <a:t>PRATIQUE · 2 DE 6</a:t>
             </a:r>
           </a:p>
         </p:txBody>

--- a/assets/powerpoints/module-pub/A2-l-accent-d-insistance.pptx
+++ b/assets/powerpoints/module-pub/A2-l-accent-d-insistance.pptx
@@ -5213,7 +5213,7 @@
             <a:r>
               <a:rPr sz="1300" b="1" i="0" spc="156">
                 <a:solidFill>
-                  <a:srgbClr val="6B4FBB"/>
+                  <a:srgbClr val="3B49A0"/>
                 </a:solidFill>
                 <a:latin typeface="Verdana"/>
               </a:rPr>
@@ -5553,7 +5553,7 @@
             <a:r>
               <a:rPr sz="1300" b="1" i="0" spc="156">
                 <a:solidFill>
-                  <a:srgbClr val="6B4FBB"/>
+                  <a:srgbClr val="3B49A0"/>
                 </a:solidFill>
                 <a:latin typeface="Verdana"/>
               </a:rPr>
@@ -5703,7 +5703,7 @@
             </a:avLst>
           </a:prstGeom>
           <a:solidFill>
-            <a:srgbClr val="EFEAFA"/>
+            <a:srgbClr val="E8EAFA"/>
           </a:solidFill>
           <a:ln>
             <a:noFill/>
@@ -5760,7 +5760,7 @@
             <a:r>
               <a:rPr sz="1500" b="1" i="0">
                 <a:solidFill>
-                  <a:srgbClr val="6B4FBB"/>
+                  <a:srgbClr val="3B49A0"/>
                 </a:solidFill>
                 <a:latin typeface="Verdana"/>
               </a:rPr>
@@ -5880,7 +5880,7 @@
             </a:avLst>
           </a:prstGeom>
           <a:solidFill>
-            <a:srgbClr val="EFEAFA"/>
+            <a:srgbClr val="E8EAFA"/>
           </a:solidFill>
           <a:ln>
             <a:noFill/>
@@ -5937,7 +5937,7 @@
             <a:r>
               <a:rPr sz="1500" b="1" i="0">
                 <a:solidFill>
-                  <a:srgbClr val="6B4FBB"/>
+                  <a:srgbClr val="3B49A0"/>
                 </a:solidFill>
                 <a:latin typeface="Verdana"/>
               </a:rPr>
@@ -6057,7 +6057,7 @@
             </a:avLst>
           </a:prstGeom>
           <a:solidFill>
-            <a:srgbClr val="EFEAFA"/>
+            <a:srgbClr val="E8EAFA"/>
           </a:solidFill>
           <a:ln>
             <a:noFill/>
@@ -6114,7 +6114,7 @@
             <a:r>
               <a:rPr sz="1500" b="1" i="0">
                 <a:solidFill>
-                  <a:srgbClr val="6B4FBB"/>
+                  <a:srgbClr val="3B49A0"/>
                 </a:solidFill>
                 <a:latin typeface="Verdana"/>
               </a:rPr>
@@ -6234,7 +6234,7 @@
             </a:avLst>
           </a:prstGeom>
           <a:solidFill>
-            <a:srgbClr val="EFEAFA"/>
+            <a:srgbClr val="E8EAFA"/>
           </a:solidFill>
           <a:ln>
             <a:noFill/>
@@ -6291,7 +6291,7 @@
             <a:r>
               <a:rPr sz="1500" b="1" i="0">
                 <a:solidFill>
-                  <a:srgbClr val="6B4FBB"/>
+                  <a:srgbClr val="3B49A0"/>
                 </a:solidFill>
                 <a:latin typeface="Verdana"/>
               </a:rPr>
@@ -6411,7 +6411,7 @@
             </a:avLst>
           </a:prstGeom>
           <a:solidFill>
-            <a:srgbClr val="EFEAFA"/>
+            <a:srgbClr val="E8EAFA"/>
           </a:solidFill>
           <a:ln>
             <a:noFill/>
@@ -6468,7 +6468,7 @@
             <a:r>
               <a:rPr sz="1500" b="1" i="0">
                 <a:solidFill>
-                  <a:srgbClr val="6B4FBB"/>
+                  <a:srgbClr val="3B49A0"/>
                 </a:solidFill>
                 <a:latin typeface="Verdana"/>
               </a:rPr>
@@ -6693,7 +6693,7 @@
             <a:r>
               <a:rPr sz="1300" b="1" i="0" spc="156">
                 <a:solidFill>
-                  <a:srgbClr val="6B4FBB"/>
+                  <a:srgbClr val="3B49A0"/>
                 </a:solidFill>
                 <a:latin typeface="Verdana"/>
               </a:rPr>
@@ -7242,7 +7242,7 @@
             <a:r>
               <a:rPr sz="1300" b="1" i="0" spc="156">
                 <a:solidFill>
-                  <a:srgbClr val="6B4FBB"/>
+                  <a:srgbClr val="3B49A0"/>
                 </a:solidFill>
                 <a:latin typeface="Verdana"/>
               </a:rPr>
@@ -7791,7 +7791,7 @@
             <a:r>
               <a:rPr sz="1300" b="1" i="0" spc="156">
                 <a:solidFill>
-                  <a:srgbClr val="6B4FBB"/>
+                  <a:srgbClr val="3B49A0"/>
                 </a:solidFill>
                 <a:latin typeface="Verdana"/>
               </a:rPr>
@@ -7941,7 +7941,7 @@
             </a:avLst>
           </a:prstGeom>
           <a:solidFill>
-            <a:srgbClr val="EFEAFA"/>
+            <a:srgbClr val="E8EAFA"/>
           </a:solidFill>
           <a:ln>
             <a:noFill/>
@@ -7998,7 +7998,7 @@
             <a:r>
               <a:rPr sz="1500" b="1" i="0">
                 <a:solidFill>
-                  <a:srgbClr val="6B4FBB"/>
+                  <a:srgbClr val="3B49A0"/>
                 </a:solidFill>
                 <a:latin typeface="Verdana"/>
               </a:rPr>
@@ -8109,7 +8109,7 @@
             </a:avLst>
           </a:prstGeom>
           <a:solidFill>
-            <a:srgbClr val="EFEAFA"/>
+            <a:srgbClr val="E8EAFA"/>
           </a:solidFill>
           <a:ln>
             <a:noFill/>
@@ -8166,7 +8166,7 @@
             <a:r>
               <a:rPr sz="1500" b="1" i="0">
                 <a:solidFill>
-                  <a:srgbClr val="6B4FBB"/>
+                  <a:srgbClr val="3B49A0"/>
                 </a:solidFill>
                 <a:latin typeface="Verdana"/>
               </a:rPr>
@@ -8277,7 +8277,7 @@
             </a:avLst>
           </a:prstGeom>
           <a:solidFill>
-            <a:srgbClr val="EFEAFA"/>
+            <a:srgbClr val="E8EAFA"/>
           </a:solidFill>
           <a:ln>
             <a:noFill/>
@@ -8334,7 +8334,7 @@
             <a:r>
               <a:rPr sz="1500" b="1" i="0">
                 <a:solidFill>
-                  <a:srgbClr val="6B4FBB"/>
+                  <a:srgbClr val="3B49A0"/>
                 </a:solidFill>
                 <a:latin typeface="Verdana"/>
               </a:rPr>
@@ -8445,7 +8445,7 @@
             </a:avLst>
           </a:prstGeom>
           <a:solidFill>
-            <a:srgbClr val="EFEAFA"/>
+            <a:srgbClr val="E8EAFA"/>
           </a:solidFill>
           <a:ln>
             <a:noFill/>
@@ -8502,7 +8502,7 @@
             <a:r>
               <a:rPr sz="1500" b="1" i="0">
                 <a:solidFill>
-                  <a:srgbClr val="6B4FBB"/>
+                  <a:srgbClr val="3B49A0"/>
                 </a:solidFill>
                 <a:latin typeface="Verdana"/>
               </a:rPr>
@@ -8718,7 +8718,7 @@
             <a:r>
               <a:rPr sz="1300" b="1" i="0" spc="156">
                 <a:solidFill>
-                  <a:srgbClr val="6B4FBB"/>
+                  <a:srgbClr val="3B49A0"/>
                 </a:solidFill>
                 <a:latin typeface="Verdana"/>
               </a:rPr>
@@ -8868,7 +8868,7 @@
             </a:avLst>
           </a:prstGeom>
           <a:solidFill>
-            <a:srgbClr val="EFEAFA"/>
+            <a:srgbClr val="E8EAFA"/>
           </a:solidFill>
           <a:ln>
             <a:noFill/>
@@ -8925,7 +8925,7 @@
             <a:r>
               <a:rPr sz="1500" b="1" i="0">
                 <a:solidFill>
-                  <a:srgbClr val="6B4FBB"/>
+                  <a:srgbClr val="3B49A0"/>
                 </a:solidFill>
                 <a:latin typeface="Verdana"/>
               </a:rPr>
@@ -9045,7 +9045,7 @@
             </a:avLst>
           </a:prstGeom>
           <a:solidFill>
-            <a:srgbClr val="EFEAFA"/>
+            <a:srgbClr val="E8EAFA"/>
           </a:solidFill>
           <a:ln>
             <a:noFill/>
@@ -9102,7 +9102,7 @@
             <a:r>
               <a:rPr sz="1500" b="1" i="0">
                 <a:solidFill>
-                  <a:srgbClr val="6B4FBB"/>
+                  <a:srgbClr val="3B49A0"/>
                 </a:solidFill>
                 <a:latin typeface="Verdana"/>
               </a:rPr>
@@ -9222,7 +9222,7 @@
             </a:avLst>
           </a:prstGeom>
           <a:solidFill>
-            <a:srgbClr val="EFEAFA"/>
+            <a:srgbClr val="E8EAFA"/>
           </a:solidFill>
           <a:ln>
             <a:noFill/>
@@ -9279,7 +9279,7 @@
             <a:r>
               <a:rPr sz="1500" b="1" i="0">
                 <a:solidFill>
-                  <a:srgbClr val="6B4FBB"/>
+                  <a:srgbClr val="3B49A0"/>
                 </a:solidFill>
                 <a:latin typeface="Verdana"/>
               </a:rPr>
@@ -9399,7 +9399,7 @@
             </a:avLst>
           </a:prstGeom>
           <a:solidFill>
-            <a:srgbClr val="EFEAFA"/>
+            <a:srgbClr val="E8EAFA"/>
           </a:solidFill>
           <a:ln>
             <a:noFill/>
@@ -9456,7 +9456,7 @@
             <a:r>
               <a:rPr sz="1500" b="1" i="0">
                 <a:solidFill>
-                  <a:srgbClr val="6B4FBB"/>
+                  <a:srgbClr val="3B49A0"/>
                 </a:solidFill>
                 <a:latin typeface="Verdana"/>
               </a:rPr>
@@ -9681,7 +9681,7 @@
             <a:r>
               <a:rPr sz="1300" b="1" i="0" spc="156">
                 <a:solidFill>
-                  <a:srgbClr val="6B4FBB"/>
+                  <a:srgbClr val="3B49A0"/>
                 </a:solidFill>
                 <a:latin typeface="Verdana"/>
               </a:rPr>
@@ -9831,7 +9831,7 @@
             </a:avLst>
           </a:prstGeom>
           <a:solidFill>
-            <a:srgbClr val="EFEAFA"/>
+            <a:srgbClr val="E8EAFA"/>
           </a:solidFill>
           <a:ln>
             <a:noFill/>
@@ -9888,7 +9888,7 @@
             <a:r>
               <a:rPr sz="1500" b="1" i="0">
                 <a:solidFill>
-                  <a:srgbClr val="6B4FBB"/>
+                  <a:srgbClr val="3B49A0"/>
                 </a:solidFill>
                 <a:latin typeface="Verdana"/>
               </a:rPr>
@@ -9999,7 +9999,7 @@
             </a:avLst>
           </a:prstGeom>
           <a:solidFill>
-            <a:srgbClr val="EFEAFA"/>
+            <a:srgbClr val="E8EAFA"/>
           </a:solidFill>
           <a:ln>
             <a:noFill/>
@@ -10056,7 +10056,7 @@
             <a:r>
               <a:rPr sz="1500" b="1" i="0">
                 <a:solidFill>
-                  <a:srgbClr val="6B4FBB"/>
+                  <a:srgbClr val="3B49A0"/>
                 </a:solidFill>
                 <a:latin typeface="Verdana"/>
               </a:rPr>
@@ -10167,7 +10167,7 @@
             </a:avLst>
           </a:prstGeom>
           <a:solidFill>
-            <a:srgbClr val="EFEAFA"/>
+            <a:srgbClr val="E8EAFA"/>
           </a:solidFill>
           <a:ln>
             <a:noFill/>
@@ -10224,7 +10224,7 @@
             <a:r>
               <a:rPr sz="1500" b="1" i="0">
                 <a:solidFill>
-                  <a:srgbClr val="6B4FBB"/>
+                  <a:srgbClr val="3B49A0"/>
                 </a:solidFill>
                 <a:latin typeface="Verdana"/>
               </a:rPr>
@@ -10440,7 +10440,7 @@
             <a:r>
               <a:rPr sz="1300" b="1" i="0" spc="156">
                 <a:solidFill>
-                  <a:srgbClr val="6B4FBB"/>
+                  <a:srgbClr val="3B49A0"/>
                 </a:solidFill>
                 <a:latin typeface="Verdana"/>
               </a:rPr>
@@ -10590,7 +10590,7 @@
             </a:avLst>
           </a:prstGeom>
           <a:solidFill>
-            <a:srgbClr val="EFEAFA"/>
+            <a:srgbClr val="E8EAFA"/>
           </a:solidFill>
           <a:ln>
             <a:noFill/>
@@ -10647,7 +10647,7 @@
             <a:r>
               <a:rPr sz="1500" b="1" i="0">
                 <a:solidFill>
-                  <a:srgbClr val="6B4FBB"/>
+                  <a:srgbClr val="3B49A0"/>
                 </a:solidFill>
                 <a:latin typeface="Verdana"/>
               </a:rPr>
@@ -10767,7 +10767,7 @@
             </a:avLst>
           </a:prstGeom>
           <a:solidFill>
-            <a:srgbClr val="EFEAFA"/>
+            <a:srgbClr val="E8EAFA"/>
           </a:solidFill>
           <a:ln>
             <a:noFill/>
@@ -10824,7 +10824,7 @@
             <a:r>
               <a:rPr sz="1500" b="1" i="0">
                 <a:solidFill>
-                  <a:srgbClr val="6B4FBB"/>
+                  <a:srgbClr val="3B49A0"/>
                 </a:solidFill>
                 <a:latin typeface="Verdana"/>
               </a:rPr>
@@ -10944,7 +10944,7 @@
             </a:avLst>
           </a:prstGeom>
           <a:solidFill>
-            <a:srgbClr val="EFEAFA"/>
+            <a:srgbClr val="E8EAFA"/>
           </a:solidFill>
           <a:ln>
             <a:noFill/>
@@ -11001,7 +11001,7 @@
             <a:r>
               <a:rPr sz="1500" b="1" i="0">
                 <a:solidFill>
-                  <a:srgbClr val="6B4FBB"/>
+                  <a:srgbClr val="3B49A0"/>
                 </a:solidFill>
                 <a:latin typeface="Verdana"/>
               </a:rPr>
@@ -11226,7 +11226,7 @@
             <a:r>
               <a:rPr sz="1300" b="1" i="0" spc="156">
                 <a:solidFill>
-                  <a:srgbClr val="6B4FBB"/>
+                  <a:srgbClr val="3B49A0"/>
                 </a:solidFill>
                 <a:latin typeface="Verdana"/>
               </a:rPr>
@@ -11252,7 +11252,7 @@
             </a:avLst>
           </a:prstGeom>
           <a:solidFill>
-            <a:srgbClr val="EFEAFA"/>
+            <a:srgbClr val="E8EAFA"/>
           </a:solidFill>
           <a:ln w="12700">
             <a:solidFill>
@@ -11573,7 +11573,7 @@
             <a:r>
               <a:rPr sz="1300" b="1" i="0" spc="156">
                 <a:solidFill>
-                  <a:srgbClr val="6B4FBB"/>
+                  <a:srgbClr val="3B49A0"/>
                 </a:solidFill>
                 <a:latin typeface="Verdana"/>
               </a:rPr>
@@ -11814,7 +11814,7 @@
             <a:r>
               <a:rPr sz="1800" b="1" i="0">
                 <a:solidFill>
-                  <a:srgbClr val="6B4FBB"/>
+                  <a:srgbClr val="3B49A0"/>
                 </a:solidFill>
                 <a:latin typeface="Verdana"/>
               </a:rPr>
@@ -11973,7 +11973,7 @@
             <a:r>
               <a:rPr sz="1800" b="1" i="0">
                 <a:solidFill>
-                  <a:srgbClr val="6B4FBB"/>
+                  <a:srgbClr val="3B49A0"/>
                 </a:solidFill>
                 <a:latin typeface="Verdana"/>
               </a:rPr>
@@ -12313,7 +12313,7 @@
             <a:r>
               <a:rPr sz="1300" b="1" i="0" spc="156">
                 <a:solidFill>
-                  <a:srgbClr val="6B4FBB"/>
+                  <a:srgbClr val="3B49A0"/>
                 </a:solidFill>
                 <a:latin typeface="Verdana"/>
               </a:rPr>
@@ -12862,7 +12862,7 @@
             <a:r>
               <a:rPr sz="1300" b="1" i="0" spc="156">
                 <a:solidFill>
-                  <a:srgbClr val="6B4FBB"/>
+                  <a:srgbClr val="3B49A0"/>
                 </a:solidFill>
                 <a:latin typeface="Verdana"/>
               </a:rPr>
@@ -12973,7 +12973,7 @@
             </a:avLst>
           </a:prstGeom>
           <a:solidFill>
-            <a:srgbClr val="EFEAFA"/>
+            <a:srgbClr val="E8EAFA"/>
           </a:solidFill>
           <a:ln>
             <a:noFill/>
@@ -13030,7 +13030,7 @@
             <a:r>
               <a:rPr sz="1500" b="1" i="0">
                 <a:solidFill>
-                  <a:srgbClr val="6B4FBB"/>
+                  <a:srgbClr val="3B49A0"/>
                 </a:solidFill>
                 <a:latin typeface="Verdana"/>
               </a:rPr>
@@ -13141,7 +13141,7 @@
             </a:avLst>
           </a:prstGeom>
           <a:solidFill>
-            <a:srgbClr val="EFEAFA"/>
+            <a:srgbClr val="E8EAFA"/>
           </a:solidFill>
           <a:ln>
             <a:noFill/>
@@ -13198,7 +13198,7 @@
             <a:r>
               <a:rPr sz="1500" b="1" i="0">
                 <a:solidFill>
-                  <a:srgbClr val="6B4FBB"/>
+                  <a:srgbClr val="3B49A0"/>
                 </a:solidFill>
                 <a:latin typeface="Verdana"/>
               </a:rPr>
@@ -13309,7 +13309,7 @@
             </a:avLst>
           </a:prstGeom>
           <a:solidFill>
-            <a:srgbClr val="EFEAFA"/>
+            <a:srgbClr val="E8EAFA"/>
           </a:solidFill>
           <a:ln>
             <a:noFill/>
@@ -13366,7 +13366,7 @@
             <a:r>
               <a:rPr sz="1500" b="1" i="0">
                 <a:solidFill>
-                  <a:srgbClr val="6B4FBB"/>
+                  <a:srgbClr val="3B49A0"/>
                 </a:solidFill>
                 <a:latin typeface="Verdana"/>
               </a:rPr>
@@ -13477,7 +13477,7 @@
             </a:avLst>
           </a:prstGeom>
           <a:solidFill>
-            <a:srgbClr val="EFEAFA"/>
+            <a:srgbClr val="E8EAFA"/>
           </a:solidFill>
           <a:ln>
             <a:noFill/>
@@ -13534,7 +13534,7 @@
             <a:r>
               <a:rPr sz="1500" b="1" i="0">
                 <a:solidFill>
-                  <a:srgbClr val="6B4FBB"/>
+                  <a:srgbClr val="3B49A0"/>
                 </a:solidFill>
                 <a:latin typeface="Verdana"/>
               </a:rPr>
@@ -13645,7 +13645,7 @@
             </a:avLst>
           </a:prstGeom>
           <a:solidFill>
-            <a:srgbClr val="EFEAFA"/>
+            <a:srgbClr val="E8EAFA"/>
           </a:solidFill>
           <a:ln>
             <a:noFill/>
@@ -13702,7 +13702,7 @@
             <a:r>
               <a:rPr sz="1500" b="1" i="0">
                 <a:solidFill>
-                  <a:srgbClr val="6B4FBB"/>
+                  <a:srgbClr val="3B49A0"/>
                 </a:solidFill>
                 <a:latin typeface="Verdana"/>
               </a:rPr>
@@ -13918,7 +13918,7 @@
             <a:r>
               <a:rPr sz="1300" b="1" i="0" spc="156">
                 <a:solidFill>
-                  <a:srgbClr val="6B4FBB"/>
+                  <a:srgbClr val="3B49A0"/>
                 </a:solidFill>
                 <a:latin typeface="Verdana"/>
               </a:rPr>
@@ -14068,7 +14068,7 @@
             </a:avLst>
           </a:prstGeom>
           <a:solidFill>
-            <a:srgbClr val="EFEAFA"/>
+            <a:srgbClr val="E8EAFA"/>
           </a:solidFill>
           <a:ln>
             <a:noFill/>
@@ -14125,7 +14125,7 @@
             <a:r>
               <a:rPr sz="1500" b="1" i="0">
                 <a:solidFill>
-                  <a:srgbClr val="6B4FBB"/>
+                  <a:srgbClr val="3B49A0"/>
                 </a:solidFill>
                 <a:latin typeface="Verdana"/>
               </a:rPr>
@@ -14236,7 +14236,7 @@
             </a:avLst>
           </a:prstGeom>
           <a:solidFill>
-            <a:srgbClr val="EFEAFA"/>
+            <a:srgbClr val="E8EAFA"/>
           </a:solidFill>
           <a:ln>
             <a:noFill/>
@@ -14293,7 +14293,7 @@
             <a:r>
               <a:rPr sz="1500" b="1" i="0">
                 <a:solidFill>
-                  <a:srgbClr val="6B4FBB"/>
+                  <a:srgbClr val="3B49A0"/>
                 </a:solidFill>
                 <a:latin typeface="Verdana"/>
               </a:rPr>
@@ -14404,7 +14404,7 @@
             </a:avLst>
           </a:prstGeom>
           <a:solidFill>
-            <a:srgbClr val="EFEAFA"/>
+            <a:srgbClr val="E8EAFA"/>
           </a:solidFill>
           <a:ln>
             <a:noFill/>
@@ -14461,7 +14461,7 @@
             <a:r>
               <a:rPr sz="1500" b="1" i="0">
                 <a:solidFill>
-                  <a:srgbClr val="6B4FBB"/>
+                  <a:srgbClr val="3B49A0"/>
                 </a:solidFill>
                 <a:latin typeface="Verdana"/>
               </a:rPr>
@@ -14572,7 +14572,7 @@
             </a:avLst>
           </a:prstGeom>
           <a:solidFill>
-            <a:srgbClr val="EFEAFA"/>
+            <a:srgbClr val="E8EAFA"/>
           </a:solidFill>
           <a:ln>
             <a:noFill/>
@@ -14629,7 +14629,7 @@
             <a:r>
               <a:rPr sz="1500" b="1" i="0">
                 <a:solidFill>
-                  <a:srgbClr val="6B4FBB"/>
+                  <a:srgbClr val="3B49A0"/>
                 </a:solidFill>
                 <a:latin typeface="Verdana"/>
               </a:rPr>
@@ -14740,7 +14740,7 @@
             </a:avLst>
           </a:prstGeom>
           <a:solidFill>
-            <a:srgbClr val="EFEAFA"/>
+            <a:srgbClr val="E8EAFA"/>
           </a:solidFill>
           <a:ln>
             <a:noFill/>
@@ -14797,7 +14797,7 @@
             <a:r>
               <a:rPr sz="1500" b="1" i="0">
                 <a:solidFill>
-                  <a:srgbClr val="6B4FBB"/>
+                  <a:srgbClr val="3B49A0"/>
                 </a:solidFill>
                 <a:latin typeface="Verdana"/>
               </a:rPr>
@@ -14908,7 +14908,7 @@
             </a:avLst>
           </a:prstGeom>
           <a:solidFill>
-            <a:srgbClr val="EFEAFA"/>
+            <a:srgbClr val="E8EAFA"/>
           </a:solidFill>
           <a:ln>
             <a:noFill/>
@@ -14965,7 +14965,7 @@
             <a:r>
               <a:rPr sz="1500" b="1" i="0">
                 <a:solidFill>
-                  <a:srgbClr val="6B4FBB"/>
+                  <a:srgbClr val="3B49A0"/>
                 </a:solidFill>
                 <a:latin typeface="Verdana"/>
               </a:rPr>
@@ -15076,7 +15076,7 @@
             </a:avLst>
           </a:prstGeom>
           <a:solidFill>
-            <a:srgbClr val="EFEAFA"/>
+            <a:srgbClr val="E8EAFA"/>
           </a:solidFill>
           <a:ln>
             <a:noFill/>
@@ -15133,7 +15133,7 @@
             <a:r>
               <a:rPr sz="1500" b="1" i="0">
                 <a:solidFill>
-                  <a:srgbClr val="6B4FBB"/>
+                  <a:srgbClr val="3B49A0"/>
                 </a:solidFill>
                 <a:latin typeface="Verdana"/>
               </a:rPr>
@@ -15244,7 +15244,7 @@
             </a:avLst>
           </a:prstGeom>
           <a:solidFill>
-            <a:srgbClr val="EFEAFA"/>
+            <a:srgbClr val="E8EAFA"/>
           </a:solidFill>
           <a:ln>
             <a:noFill/>
@@ -15301,7 +15301,7 @@
             <a:r>
               <a:rPr sz="1500" b="1" i="0">
                 <a:solidFill>
-                  <a:srgbClr val="6B4FBB"/>
+                  <a:srgbClr val="3B49A0"/>
                 </a:solidFill>
                 <a:latin typeface="Verdana"/>
               </a:rPr>
@@ -15517,7 +15517,7 @@
             <a:r>
               <a:rPr sz="1300" b="1" i="0" spc="156">
                 <a:solidFill>
-                  <a:srgbClr val="6B4FBB"/>
+                  <a:srgbClr val="3B49A0"/>
                 </a:solidFill>
                 <a:latin typeface="Verdana"/>
               </a:rPr>
@@ -15667,7 +15667,7 @@
             </a:avLst>
           </a:prstGeom>
           <a:solidFill>
-            <a:srgbClr val="EFEAFA"/>
+            <a:srgbClr val="E8EAFA"/>
           </a:solidFill>
           <a:ln>
             <a:noFill/>
@@ -15724,7 +15724,7 @@
             <a:r>
               <a:rPr sz="1500" b="1" i="0">
                 <a:solidFill>
-                  <a:srgbClr val="6B4FBB"/>
+                  <a:srgbClr val="3B49A0"/>
                 </a:solidFill>
                 <a:latin typeface="Verdana"/>
               </a:rPr>
@@ -15844,7 +15844,7 @@
             </a:avLst>
           </a:prstGeom>
           <a:solidFill>
-            <a:srgbClr val="EFEAFA"/>
+            <a:srgbClr val="E8EAFA"/>
           </a:solidFill>
           <a:ln>
             <a:noFill/>
@@ -15901,7 +15901,7 @@
             <a:r>
               <a:rPr sz="1500" b="1" i="0">
                 <a:solidFill>
-                  <a:srgbClr val="6B4FBB"/>
+                  <a:srgbClr val="3B49A0"/>
                 </a:solidFill>
                 <a:latin typeface="Verdana"/>
               </a:rPr>
@@ -16021,7 +16021,7 @@
             </a:avLst>
           </a:prstGeom>
           <a:solidFill>
-            <a:srgbClr val="EFEAFA"/>
+            <a:srgbClr val="E8EAFA"/>
           </a:solidFill>
           <a:ln>
             <a:noFill/>
@@ -16078,7 +16078,7 @@
             <a:r>
               <a:rPr sz="1500" b="1" i="0">
                 <a:solidFill>
-                  <a:srgbClr val="6B4FBB"/>
+                  <a:srgbClr val="3B49A0"/>
                 </a:solidFill>
                 <a:latin typeface="Verdana"/>
               </a:rPr>
@@ -16198,7 +16198,7 @@
             </a:avLst>
           </a:prstGeom>
           <a:solidFill>
-            <a:srgbClr val="EFEAFA"/>
+            <a:srgbClr val="E8EAFA"/>
           </a:solidFill>
           <a:ln>
             <a:noFill/>
@@ -16255,7 +16255,7 @@
             <a:r>
               <a:rPr sz="1500" b="1" i="0">
                 <a:solidFill>
-                  <a:srgbClr val="6B4FBB"/>
+                  <a:srgbClr val="3B49A0"/>
                 </a:solidFill>
                 <a:latin typeface="Verdana"/>
               </a:rPr>
@@ -16375,7 +16375,7 @@
             </a:avLst>
           </a:prstGeom>
           <a:solidFill>
-            <a:srgbClr val="EFEAFA"/>
+            <a:srgbClr val="E8EAFA"/>
           </a:solidFill>
           <a:ln>
             <a:noFill/>
@@ -16432,7 +16432,7 @@
             <a:r>
               <a:rPr sz="1500" b="1" i="0">
                 <a:solidFill>
-                  <a:srgbClr val="6B4FBB"/>
+                  <a:srgbClr val="3B49A0"/>
                 </a:solidFill>
                 <a:latin typeface="Verdana"/>
               </a:rPr>
@@ -16552,7 +16552,7 @@
             </a:avLst>
           </a:prstGeom>
           <a:solidFill>
-            <a:srgbClr val="EFEAFA"/>
+            <a:srgbClr val="E8EAFA"/>
           </a:solidFill>
           <a:ln>
             <a:noFill/>
@@ -16609,7 +16609,7 @@
             <a:r>
               <a:rPr sz="1500" b="1" i="0">
                 <a:solidFill>
-                  <a:srgbClr val="6B4FBB"/>
+                  <a:srgbClr val="3B49A0"/>
                 </a:solidFill>
                 <a:latin typeface="Verdana"/>
               </a:rPr>
@@ -16729,7 +16729,7 @@
             </a:avLst>
           </a:prstGeom>
           <a:solidFill>
-            <a:srgbClr val="EFEAFA"/>
+            <a:srgbClr val="E8EAFA"/>
           </a:solidFill>
           <a:ln>
             <a:noFill/>
@@ -16786,7 +16786,7 @@
             <a:r>
               <a:rPr sz="1500" b="1" i="0">
                 <a:solidFill>
-                  <a:srgbClr val="6B4FBB"/>
+                  <a:srgbClr val="3B49A0"/>
                 </a:solidFill>
                 <a:latin typeface="Verdana"/>
               </a:rPr>
@@ -16906,7 +16906,7 @@
             </a:avLst>
           </a:prstGeom>
           <a:solidFill>
-            <a:srgbClr val="EFEAFA"/>
+            <a:srgbClr val="E8EAFA"/>
           </a:solidFill>
           <a:ln>
             <a:noFill/>
@@ -16963,7 +16963,7 @@
             <a:r>
               <a:rPr sz="1500" b="1" i="0">
                 <a:solidFill>
-                  <a:srgbClr val="6B4FBB"/>
+                  <a:srgbClr val="3B49A0"/>
                 </a:solidFill>
                 <a:latin typeface="Verdana"/>
               </a:rPr>
@@ -17188,7 +17188,7 @@
             <a:r>
               <a:rPr sz="1300" b="1" i="0" spc="156">
                 <a:solidFill>
-                  <a:srgbClr val="6B4FBB"/>
+                  <a:srgbClr val="3B49A0"/>
                 </a:solidFill>
                 <a:latin typeface="Verdana"/>
               </a:rPr>
@@ -17338,7 +17338,7 @@
             </a:avLst>
           </a:prstGeom>
           <a:solidFill>
-            <a:srgbClr val="EFEAFA"/>
+            <a:srgbClr val="E8EAFA"/>
           </a:solidFill>
           <a:ln>
             <a:noFill/>
@@ -17395,7 +17395,7 @@
             <a:r>
               <a:rPr sz="1500" b="1" i="0">
                 <a:solidFill>
-                  <a:srgbClr val="6B4FBB"/>
+                  <a:srgbClr val="3B49A0"/>
                 </a:solidFill>
                 <a:latin typeface="Verdana"/>
               </a:rPr>
@@ -17506,7 +17506,7 @@
             </a:avLst>
           </a:prstGeom>
           <a:solidFill>
-            <a:srgbClr val="EFEAFA"/>
+            <a:srgbClr val="E8EAFA"/>
           </a:solidFill>
           <a:ln>
             <a:noFill/>
@@ -17563,7 +17563,7 @@
             <a:r>
               <a:rPr sz="1500" b="1" i="0">
                 <a:solidFill>
-                  <a:srgbClr val="6B4FBB"/>
+                  <a:srgbClr val="3B49A0"/>
                 </a:solidFill>
                 <a:latin typeface="Verdana"/>
               </a:rPr>
@@ -17674,7 +17674,7 @@
             </a:avLst>
           </a:prstGeom>
           <a:solidFill>
-            <a:srgbClr val="EFEAFA"/>
+            <a:srgbClr val="E8EAFA"/>
           </a:solidFill>
           <a:ln>
             <a:noFill/>
@@ -17731,7 +17731,7 @@
             <a:r>
               <a:rPr sz="1500" b="1" i="0">
                 <a:solidFill>
-                  <a:srgbClr val="6B4FBB"/>
+                  <a:srgbClr val="3B49A0"/>
                 </a:solidFill>
                 <a:latin typeface="Verdana"/>
               </a:rPr>
@@ -17947,7 +17947,7 @@
             <a:r>
               <a:rPr sz="1300" b="1" i="0" spc="156">
                 <a:solidFill>
-                  <a:srgbClr val="6B4FBB"/>
+                  <a:srgbClr val="3B49A0"/>
                 </a:solidFill>
                 <a:latin typeface="Verdana"/>
               </a:rPr>
@@ -18097,7 +18097,7 @@
             </a:avLst>
           </a:prstGeom>
           <a:solidFill>
-            <a:srgbClr val="EFEAFA"/>
+            <a:srgbClr val="E8EAFA"/>
           </a:solidFill>
           <a:ln>
             <a:noFill/>
@@ -18154,7 +18154,7 @@
             <a:r>
               <a:rPr sz="1500" b="1" i="0">
                 <a:solidFill>
-                  <a:srgbClr val="6B4FBB"/>
+                  <a:srgbClr val="3B49A0"/>
                 </a:solidFill>
                 <a:latin typeface="Verdana"/>
               </a:rPr>
@@ -18274,7 +18274,7 @@
             </a:avLst>
           </a:prstGeom>
           <a:solidFill>
-            <a:srgbClr val="EFEAFA"/>
+            <a:srgbClr val="E8EAFA"/>
           </a:solidFill>
           <a:ln>
             <a:noFill/>
@@ -18331,7 +18331,7 @@
             <a:r>
               <a:rPr sz="1500" b="1" i="0">
                 <a:solidFill>
-                  <a:srgbClr val="6B4FBB"/>
+                  <a:srgbClr val="3B49A0"/>
                 </a:solidFill>
                 <a:latin typeface="Verdana"/>
               </a:rPr>
@@ -18451,7 +18451,7 @@
             </a:avLst>
           </a:prstGeom>
           <a:solidFill>
-            <a:srgbClr val="EFEAFA"/>
+            <a:srgbClr val="E8EAFA"/>
           </a:solidFill>
           <a:ln>
             <a:noFill/>
@@ -18508,7 +18508,7 @@
             <a:r>
               <a:rPr sz="1500" b="1" i="0">
                 <a:solidFill>
-                  <a:srgbClr val="6B4FBB"/>
+                  <a:srgbClr val="3B49A0"/>
                 </a:solidFill>
                 <a:latin typeface="Verdana"/>
               </a:rPr>
@@ -19196,7 +19196,7 @@
             <a:r>
               <a:rPr sz="1300" b="1" i="0" spc="156">
                 <a:solidFill>
-                  <a:srgbClr val="6B4FBB"/>
+                  <a:srgbClr val="3B49A0"/>
                 </a:solidFill>
                 <a:latin typeface="Verdana"/>
               </a:rPr>
@@ -19222,7 +19222,7 @@
             </a:avLst>
           </a:prstGeom>
           <a:solidFill>
-            <a:srgbClr val="EFEAFA"/>
+            <a:srgbClr val="E8EAFA"/>
           </a:solidFill>
           <a:ln w="12700">
             <a:solidFill>
@@ -19543,7 +19543,7 @@
             <a:r>
               <a:rPr sz="1300" b="1" i="0" spc="156">
                 <a:solidFill>
-                  <a:srgbClr val="6B4FBB"/>
+                  <a:srgbClr val="3B49A0"/>
                 </a:solidFill>
                 <a:latin typeface="Verdana"/>
               </a:rPr>
@@ -19745,7 +19745,7 @@
             <a:r>
               <a:rPr sz="1800" b="1" i="0">
                 <a:solidFill>
-                  <a:srgbClr val="6B4FBB"/>
+                  <a:srgbClr val="3B49A0"/>
                 </a:solidFill>
                 <a:latin typeface="Verdana"/>
               </a:rPr>
@@ -19865,7 +19865,7 @@
             <a:r>
               <a:rPr sz="1800" b="1" i="0">
                 <a:solidFill>
-                  <a:srgbClr val="6B4FBB"/>
+                  <a:srgbClr val="3B49A0"/>
                 </a:solidFill>
                 <a:latin typeface="Verdana"/>
               </a:rPr>
@@ -19985,7 +19985,7 @@
             <a:r>
               <a:rPr sz="1800" b="1" i="0">
                 <a:solidFill>
-                  <a:srgbClr val="6B4FBB"/>
+                  <a:srgbClr val="3B49A0"/>
                 </a:solidFill>
                 <a:latin typeface="Verdana"/>
               </a:rPr>
@@ -20286,7 +20286,7 @@
             <a:r>
               <a:rPr sz="1300" b="1" i="0" spc="156">
                 <a:solidFill>
-                  <a:srgbClr val="6B4FBB"/>
+                  <a:srgbClr val="3B49A0"/>
                 </a:solidFill>
                 <a:latin typeface="Verdana"/>
               </a:rPr>
@@ -20410,7 +20410,7 @@
             <a:r>
               <a:rPr sz="2100" b="1" i="0">
                 <a:solidFill>
-                  <a:srgbClr val="6B4FBB"/>
+                  <a:srgbClr val="3B49A0"/>
                 </a:solidFill>
                 <a:latin typeface="Verdana"/>
               </a:rPr>
@@ -20534,7 +20534,7 @@
             <a:r>
               <a:rPr sz="2100" b="1" i="0">
                 <a:solidFill>
-                  <a:srgbClr val="6B4FBB"/>
+                  <a:srgbClr val="3B49A0"/>
                 </a:solidFill>
                 <a:latin typeface="Verdana"/>
               </a:rPr>
@@ -20658,7 +20658,7 @@
             <a:r>
               <a:rPr sz="2100" b="1" i="0">
                 <a:solidFill>
-                  <a:srgbClr val="6B4FBB"/>
+                  <a:srgbClr val="3B49A0"/>
                 </a:solidFill>
                 <a:latin typeface="Verdana"/>
               </a:rPr>
@@ -20782,7 +20782,7 @@
             <a:r>
               <a:rPr sz="2100" b="1" i="0">
                 <a:solidFill>
-                  <a:srgbClr val="6B4FBB"/>
+                  <a:srgbClr val="3B49A0"/>
                 </a:solidFill>
                 <a:latin typeface="Verdana"/>
               </a:rPr>
@@ -20998,7 +20998,7 @@
             <a:r>
               <a:rPr sz="1300" b="1" i="0" spc="156">
                 <a:solidFill>
-                  <a:srgbClr val="6B4FBB"/>
+                  <a:srgbClr val="3B49A0"/>
                 </a:solidFill>
                 <a:latin typeface="Verdana"/>
               </a:rPr>
@@ -21148,7 +21148,7 @@
             </a:avLst>
           </a:prstGeom>
           <a:solidFill>
-            <a:srgbClr val="EFEAFA"/>
+            <a:srgbClr val="E8EAFA"/>
           </a:solidFill>
           <a:ln>
             <a:noFill/>
@@ -21205,7 +21205,7 @@
             <a:r>
               <a:rPr sz="1500" b="1" i="0">
                 <a:solidFill>
-                  <a:srgbClr val="6B4FBB"/>
+                  <a:srgbClr val="3B49A0"/>
                 </a:solidFill>
                 <a:latin typeface="Verdana"/>
               </a:rPr>
@@ -21316,7 +21316,7 @@
             </a:avLst>
           </a:prstGeom>
           <a:solidFill>
-            <a:srgbClr val="EFEAFA"/>
+            <a:srgbClr val="E8EAFA"/>
           </a:solidFill>
           <a:ln>
             <a:noFill/>
@@ -21373,7 +21373,7 @@
             <a:r>
               <a:rPr sz="1500" b="1" i="0">
                 <a:solidFill>
-                  <a:srgbClr val="6B4FBB"/>
+                  <a:srgbClr val="3B49A0"/>
                 </a:solidFill>
                 <a:latin typeface="Verdana"/>
               </a:rPr>
@@ -21484,7 +21484,7 @@
             </a:avLst>
           </a:prstGeom>
           <a:solidFill>
-            <a:srgbClr val="EFEAFA"/>
+            <a:srgbClr val="E8EAFA"/>
           </a:solidFill>
           <a:ln>
             <a:noFill/>
@@ -21541,7 +21541,7 @@
             <a:r>
               <a:rPr sz="1500" b="1" i="0">
                 <a:solidFill>
-                  <a:srgbClr val="6B4FBB"/>
+                  <a:srgbClr val="3B49A0"/>
                 </a:solidFill>
                 <a:latin typeface="Verdana"/>
               </a:rPr>
@@ -21652,7 +21652,7 @@
             </a:avLst>
           </a:prstGeom>
           <a:solidFill>
-            <a:srgbClr val="EFEAFA"/>
+            <a:srgbClr val="E8EAFA"/>
           </a:solidFill>
           <a:ln>
             <a:noFill/>
@@ -21709,7 +21709,7 @@
             <a:r>
               <a:rPr sz="1500" b="1" i="0">
                 <a:solidFill>
-                  <a:srgbClr val="6B4FBB"/>
+                  <a:srgbClr val="3B49A0"/>
                 </a:solidFill>
                 <a:latin typeface="Verdana"/>
               </a:rPr>
@@ -21820,7 +21820,7 @@
             </a:avLst>
           </a:prstGeom>
           <a:solidFill>
-            <a:srgbClr val="EFEAFA"/>
+            <a:srgbClr val="E8EAFA"/>
           </a:solidFill>
           <a:ln>
             <a:noFill/>
@@ -21877,7 +21877,7 @@
             <a:r>
               <a:rPr sz="1500" b="1" i="0">
                 <a:solidFill>
-                  <a:srgbClr val="6B4FBB"/>
+                  <a:srgbClr val="3B49A0"/>
                 </a:solidFill>
                 <a:latin typeface="Verdana"/>
               </a:rPr>
@@ -22093,7 +22093,7 @@
             <a:r>
               <a:rPr sz="1300" b="1" i="0" spc="156">
                 <a:solidFill>
-                  <a:srgbClr val="6B4FBB"/>
+                  <a:srgbClr val="3B49A0"/>
                 </a:solidFill>
                 <a:latin typeface="Verdana"/>
               </a:rPr>
@@ -22243,7 +22243,7 @@
             </a:avLst>
           </a:prstGeom>
           <a:solidFill>
-            <a:srgbClr val="EFEAFA"/>
+            <a:srgbClr val="E8EAFA"/>
           </a:solidFill>
           <a:ln>
             <a:noFill/>
@@ -22300,7 +22300,7 @@
             <a:r>
               <a:rPr sz="1500" b="1" i="0">
                 <a:solidFill>
-                  <a:srgbClr val="6B4FBB"/>
+                  <a:srgbClr val="3B49A0"/>
                 </a:solidFill>
                 <a:latin typeface="Verdana"/>
               </a:rPr>
@@ -22420,7 +22420,7 @@
             </a:avLst>
           </a:prstGeom>
           <a:solidFill>
-            <a:srgbClr val="EFEAFA"/>
+            <a:srgbClr val="E8EAFA"/>
           </a:solidFill>
           <a:ln>
             <a:noFill/>
@@ -22477,7 +22477,7 @@
             <a:r>
               <a:rPr sz="1500" b="1" i="0">
                 <a:solidFill>
-                  <a:srgbClr val="6B4FBB"/>
+                  <a:srgbClr val="3B49A0"/>
                 </a:solidFill>
                 <a:latin typeface="Verdana"/>
               </a:rPr>
@@ -22597,7 +22597,7 @@
             </a:avLst>
           </a:prstGeom>
           <a:solidFill>
-            <a:srgbClr val="EFEAFA"/>
+            <a:srgbClr val="E8EAFA"/>
           </a:solidFill>
           <a:ln>
             <a:noFill/>
@@ -22654,7 +22654,7 @@
             <a:r>
               <a:rPr sz="1500" b="1" i="0">
                 <a:solidFill>
-                  <a:srgbClr val="6B4FBB"/>
+                  <a:srgbClr val="3B49A0"/>
                 </a:solidFill>
                 <a:latin typeface="Verdana"/>
               </a:rPr>
@@ -22774,7 +22774,7 @@
             </a:avLst>
           </a:prstGeom>
           <a:solidFill>
-            <a:srgbClr val="EFEAFA"/>
+            <a:srgbClr val="E8EAFA"/>
           </a:solidFill>
           <a:ln>
             <a:noFill/>
@@ -22831,7 +22831,7 @@
             <a:r>
               <a:rPr sz="1500" b="1" i="0">
                 <a:solidFill>
-                  <a:srgbClr val="6B4FBB"/>
+                  <a:srgbClr val="3B49A0"/>
                 </a:solidFill>
                 <a:latin typeface="Verdana"/>
               </a:rPr>
@@ -22951,7 +22951,7 @@
             </a:avLst>
           </a:prstGeom>
           <a:solidFill>
-            <a:srgbClr val="EFEAFA"/>
+            <a:srgbClr val="E8EAFA"/>
           </a:solidFill>
           <a:ln>
             <a:noFill/>
@@ -23008,7 +23008,7 @@
             <a:r>
               <a:rPr sz="1500" b="1" i="0">
                 <a:solidFill>
-                  <a:srgbClr val="6B4FBB"/>
+                  <a:srgbClr val="3B49A0"/>
                 </a:solidFill>
                 <a:latin typeface="Verdana"/>
               </a:rPr>
@@ -23233,7 +23233,7 @@
             <a:r>
               <a:rPr sz="1300" b="1" i="0" spc="156">
                 <a:solidFill>
-                  <a:srgbClr val="6B4FBB"/>
+                  <a:srgbClr val="3B49A0"/>
                 </a:solidFill>
                 <a:latin typeface="Verdana"/>
               </a:rPr>
@@ -23259,7 +23259,7 @@
             </a:avLst>
           </a:prstGeom>
           <a:solidFill>
-            <a:srgbClr val="EFEAFA"/>
+            <a:srgbClr val="E8EAFA"/>
           </a:solidFill>
           <a:ln w="12700">
             <a:solidFill>
@@ -23580,7 +23580,7 @@
             <a:r>
               <a:rPr sz="1300" b="1" i="0" spc="156">
                 <a:solidFill>
-                  <a:srgbClr val="6B4FBB"/>
+                  <a:srgbClr val="3B49A0"/>
                 </a:solidFill>
                 <a:latin typeface="Verdana"/>
               </a:rPr>
@@ -23730,7 +23730,7 @@
             </a:avLst>
           </a:prstGeom>
           <a:solidFill>
-            <a:srgbClr val="EFEAFA"/>
+            <a:srgbClr val="E8EAFA"/>
           </a:solidFill>
           <a:ln>
             <a:noFill/>
@@ -23787,7 +23787,7 @@
             <a:r>
               <a:rPr sz="1500" b="1" i="0">
                 <a:solidFill>
-                  <a:srgbClr val="6B4FBB"/>
+                  <a:srgbClr val="3B49A0"/>
                 </a:solidFill>
                 <a:latin typeface="Verdana"/>
               </a:rPr>
@@ -23898,7 +23898,7 @@
             </a:avLst>
           </a:prstGeom>
           <a:solidFill>
-            <a:srgbClr val="EFEAFA"/>
+            <a:srgbClr val="E8EAFA"/>
           </a:solidFill>
           <a:ln>
             <a:noFill/>
@@ -23955,7 +23955,7 @@
             <a:r>
               <a:rPr sz="1500" b="1" i="0">
                 <a:solidFill>
-                  <a:srgbClr val="6B4FBB"/>
+                  <a:srgbClr val="3B49A0"/>
                 </a:solidFill>
                 <a:latin typeface="Verdana"/>
               </a:rPr>
@@ -24066,7 +24066,7 @@
             </a:avLst>
           </a:prstGeom>
           <a:solidFill>
-            <a:srgbClr val="EFEAFA"/>
+            <a:srgbClr val="E8EAFA"/>
           </a:solidFill>
           <a:ln>
             <a:noFill/>
@@ -24123,7 +24123,7 @@
             <a:r>
               <a:rPr sz="1500" b="1" i="0">
                 <a:solidFill>
-                  <a:srgbClr val="6B4FBB"/>
+                  <a:srgbClr val="3B49A0"/>
                 </a:solidFill>
                 <a:latin typeface="Verdana"/>
               </a:rPr>
@@ -24234,7 +24234,7 @@
             </a:avLst>
           </a:prstGeom>
           <a:solidFill>
-            <a:srgbClr val="EFEAFA"/>
+            <a:srgbClr val="E8EAFA"/>
           </a:solidFill>
           <a:ln>
             <a:noFill/>
@@ -24291,7 +24291,7 @@
             <a:r>
               <a:rPr sz="1500" b="1" i="0">
                 <a:solidFill>
-                  <a:srgbClr val="6B4FBB"/>
+                  <a:srgbClr val="3B49A0"/>
                 </a:solidFill>
                 <a:latin typeface="Verdana"/>
               </a:rPr>
@@ -24402,7 +24402,7 @@
             </a:avLst>
           </a:prstGeom>
           <a:solidFill>
-            <a:srgbClr val="EFEAFA"/>
+            <a:srgbClr val="E8EAFA"/>
           </a:solidFill>
           <a:ln>
             <a:noFill/>
@@ -24459,7 +24459,7 @@
             <a:r>
               <a:rPr sz="1500" b="1" i="0">
                 <a:solidFill>
-                  <a:srgbClr val="6B4FBB"/>
+                  <a:srgbClr val="3B49A0"/>
                 </a:solidFill>
                 <a:latin typeface="Verdana"/>
               </a:rPr>
